--- a/docs/test/stress/m3-challenger-output/a24_overflow_25r.pptx
+++ b/docs/test/stress/m3-challenger-output/a24_overflow_25r.pptx
@@ -1016,14 +1016,39 @@
       </p:sp>
       <p:sp>
         <p:nvSpPr>
-          <p:cNvPr id="6" name="Text 4"/>
+          <p:cNvPr id="6" name="Shape 4"/>
           <p:cNvSpPr/>
           <p:nvPr/>
         </p:nvSpPr>
         <p:spPr>
           <a:xfrm>
-            <a:off x="566928" y="5961888"/>
-            <a:ext cx="3108960" cy="182880"/>
+            <a:off x="566928" y="1645920"/>
+            <a:ext cx="2011680" cy="221381"/>
+          </a:xfrm>
+          <a:prstGeom prst="rect">
+            <a:avLst/>
+          </a:prstGeom>
+          <a:solidFill>
+            <a:srgbClr val="10161F"/>
+          </a:solidFill>
+          <a:ln w="6350">
+            <a:solidFill>
+              <a:srgbClr val="10161F"/>
+            </a:solidFill>
+            <a:prstDash val="solid"/>
+          </a:ln>
+        </p:spPr>
+      </p:sp>
+      <p:sp>
+        <p:nvSpPr>
+          <p:cNvPr id="7" name="Text 5"/>
+          <p:cNvSpPr/>
+          <p:nvPr/>
+        </p:nvSpPr>
+        <p:spPr>
+          <a:xfrm>
+            <a:off x="566928" y="1645920"/>
+            <a:ext cx="2011680" cy="221381"/>
           </a:xfrm>
           <a:prstGeom prst="rect">
             <a:avLst/>
@@ -1032,24 +1057,2014 @@
           <a:ln/>
         </p:spPr>
         <p:txBody>
-          <a:bodyPr wrap="square" lIns="0" tIns="0" rIns="0" bIns="0" rtlCol="0" anchor="ctr"/>
+          <a:bodyPr wrap="none" lIns="0" tIns="0" rIns="0" bIns="0" rtlCol="0" anchor="ctr"/>
           <a:lstStyle/>
           <a:p>
-            <a:pPr algn="l" indent="0" marL="0">
+            <a:pPr algn="ctr" indent="0" marL="0">
               <a:buNone/>
             </a:pPr>
             <a:r>
-              <a:rPr lang="en-US" sz="850" dirty="0">
+              <a:rPr lang="en-US" sz="750" b="1" dirty="0">
                 <a:solidFill>
-                  <a:srgbClr val="8A8A8A"/>
+                  <a:srgbClr val="FFFFFF"/>
                 </a:solidFill>
                 <a:latin typeface="맑은 고딕" pitchFamily="34" charset="0"/>
                 <a:ea typeface="맑은 고딕" pitchFamily="34" charset="-122"/>
                 <a:cs typeface="맑은 고딕" pitchFamily="34" charset="-120"/>
               </a:rPr>
-              <a:t>※ 렌트롤 현황 기준 층별 공간 배치도</a:t>
+              <a:t>층별 스태킹 플랜 (㎡)</a:t>
             </a:r>
-            <a:endParaRPr lang="en-US" sz="850" dirty="0"/>
+            <a:endParaRPr lang="en-US" sz="750" dirty="0"/>
+          </a:p>
+        </p:txBody>
+      </p:sp>
+      <p:sp>
+        <p:nvSpPr>
+          <p:cNvPr id="8" name="Text 6"/>
+          <p:cNvSpPr/>
+          <p:nvPr/>
+        </p:nvSpPr>
+        <p:spPr>
+          <a:xfrm>
+            <a:off x="566928" y="5666753"/>
+            <a:ext cx="475488" cy="165194"/>
+          </a:xfrm>
+          <a:prstGeom prst="rect">
+            <a:avLst/>
+          </a:prstGeom>
+          <a:noFill/>
+          <a:ln/>
+        </p:spPr>
+        <p:txBody>
+          <a:bodyPr wrap="none" lIns="0" tIns="0" rIns="0" bIns="0" rtlCol="0" anchor="ctr"/>
+          <a:lstStyle/>
+          <a:p>
+            <a:pPr algn="r" indent="0" marL="0">
+              <a:buNone/>
+            </a:pPr>
+            <a:r>
+              <a:rPr lang="en-US" sz="700" b="1" dirty="0">
+                <a:solidFill>
+                  <a:srgbClr val="10161F"/>
+                </a:solidFill>
+                <a:latin typeface="맑은 고딕" pitchFamily="34" charset="0"/>
+                <a:ea typeface="맑은 고딕" pitchFamily="34" charset="-122"/>
+                <a:cs typeface="맑은 고딕" pitchFamily="34" charset="-120"/>
+              </a:rPr>
+              <a:t>1F</a:t>
+            </a:r>
+            <a:endParaRPr lang="en-US" sz="700" dirty="0"/>
+          </a:p>
+        </p:txBody>
+      </p:sp>
+      <p:sp>
+        <p:nvSpPr>
+          <p:cNvPr id="9" name="Shape 7"/>
+          <p:cNvSpPr/>
+          <p:nvPr/>
+        </p:nvSpPr>
+        <p:spPr>
+          <a:xfrm>
+            <a:off x="1115568" y="5698757"/>
+            <a:ext cx="1444752" cy="101186"/>
+          </a:xfrm>
+          <a:prstGeom prst="rect">
+            <a:avLst/>
+          </a:prstGeom>
+          <a:solidFill>
+            <a:srgbClr val="C5B4E3"/>
+          </a:solidFill>
+          <a:ln w="9525">
+            <a:solidFill>
+              <a:srgbClr val="5B6B73"/>
+            </a:solidFill>
+            <a:prstDash val="solid"/>
+          </a:ln>
+        </p:spPr>
+      </p:sp>
+      <p:sp>
+        <p:nvSpPr>
+          <p:cNvPr id="10" name="Text 8"/>
+          <p:cNvSpPr/>
+          <p:nvPr/>
+        </p:nvSpPr>
+        <p:spPr>
+          <a:xfrm>
+            <a:off x="1143000" y="5698757"/>
+            <a:ext cx="1389888" cy="101186"/>
+          </a:xfrm>
+          <a:prstGeom prst="rect">
+            <a:avLst/>
+          </a:prstGeom>
+          <a:noFill/>
+          <a:ln/>
+        </p:spPr>
+        <p:txBody>
+          <a:bodyPr wrap="none" lIns="0" tIns="0" rIns="0" bIns="0" rtlCol="0" anchor="ctr"/>
+          <a:lstStyle/>
+          <a:p>
+            <a:pPr algn="ctr" indent="0" marL="0">
+              <a:buNone/>
+            </a:pPr>
+            <a:r>
+              <a:rPr lang="en-US" sz="630" dirty="0">
+                <a:solidFill>
+                  <a:srgbClr val="3A3A3A"/>
+                </a:solidFill>
+                <a:latin typeface="맑은 고딕" pitchFamily="34" charset="0"/>
+                <a:ea typeface="맑은 고딕" pitchFamily="34" charset="-122"/>
+                <a:cs typeface="맑은 고딕" pitchFamily="34" charset="-120"/>
+              </a:rPr>
+              <a:t>스타벅스코리아리저브DT점 1,250.5㎡</a:t>
+            </a:r>
+            <a:endParaRPr lang="en-US" sz="630" dirty="0"/>
+          </a:p>
+        </p:txBody>
+      </p:sp>
+      <p:sp>
+        <p:nvSpPr>
+          <p:cNvPr id="11" name="Text 9"/>
+          <p:cNvSpPr/>
+          <p:nvPr/>
+        </p:nvSpPr>
+        <p:spPr>
+          <a:xfrm>
+            <a:off x="566928" y="5501560"/>
+            <a:ext cx="475488" cy="165194"/>
+          </a:xfrm>
+          <a:prstGeom prst="rect">
+            <a:avLst/>
+          </a:prstGeom>
+          <a:noFill/>
+          <a:ln/>
+        </p:spPr>
+        <p:txBody>
+          <a:bodyPr wrap="none" lIns="0" tIns="0" rIns="0" bIns="0" rtlCol="0" anchor="ctr"/>
+          <a:lstStyle/>
+          <a:p>
+            <a:pPr algn="r" indent="0" marL="0">
+              <a:buNone/>
+            </a:pPr>
+            <a:r>
+              <a:rPr lang="en-US" sz="700" b="1" dirty="0">
+                <a:solidFill>
+                  <a:srgbClr val="10161F"/>
+                </a:solidFill>
+                <a:latin typeface="맑은 고딕" pitchFamily="34" charset="0"/>
+                <a:ea typeface="맑은 고딕" pitchFamily="34" charset="-122"/>
+                <a:cs typeface="맑은 고딕" pitchFamily="34" charset="-120"/>
+              </a:rPr>
+              <a:t>2F</a:t>
+            </a:r>
+            <a:endParaRPr lang="en-US" sz="700" dirty="0"/>
+          </a:p>
+        </p:txBody>
+      </p:sp>
+      <p:sp>
+        <p:nvSpPr>
+          <p:cNvPr id="12" name="Shape 10"/>
+          <p:cNvSpPr/>
+          <p:nvPr/>
+        </p:nvSpPr>
+        <p:spPr>
+          <a:xfrm>
+            <a:off x="1115568" y="5533564"/>
+            <a:ext cx="1444752" cy="101186"/>
+          </a:xfrm>
+          <a:prstGeom prst="rect">
+            <a:avLst/>
+          </a:prstGeom>
+          <a:solidFill>
+            <a:srgbClr val="C5B4E3"/>
+          </a:solidFill>
+          <a:ln w="9525">
+            <a:solidFill>
+              <a:srgbClr val="5B6B73"/>
+            </a:solidFill>
+            <a:prstDash val="solid"/>
+          </a:ln>
+        </p:spPr>
+      </p:sp>
+      <p:sp>
+        <p:nvSpPr>
+          <p:cNvPr id="13" name="Text 11"/>
+          <p:cNvSpPr/>
+          <p:nvPr/>
+        </p:nvSpPr>
+        <p:spPr>
+          <a:xfrm>
+            <a:off x="1143000" y="5533564"/>
+            <a:ext cx="1389888" cy="101186"/>
+          </a:xfrm>
+          <a:prstGeom prst="rect">
+            <a:avLst/>
+          </a:prstGeom>
+          <a:noFill/>
+          <a:ln/>
+        </p:spPr>
+        <p:txBody>
+          <a:bodyPr wrap="none" lIns="0" tIns="0" rIns="0" bIns="0" rtlCol="0" anchor="ctr"/>
+          <a:lstStyle/>
+          <a:p>
+            <a:pPr algn="ctr" indent="0" marL="0">
+              <a:buNone/>
+            </a:pPr>
+            <a:r>
+              <a:rPr lang="en-US" sz="630" dirty="0">
+                <a:solidFill>
+                  <a:srgbClr val="3A3A3A"/>
+                </a:solidFill>
+                <a:latin typeface="맑은 고딕" pitchFamily="34" charset="0"/>
+                <a:ea typeface="맑은 고딕" pitchFamily="34" charset="-122"/>
+                <a:cs typeface="맑은 고딕" pitchFamily="34" charset="-120"/>
+              </a:rPr>
+              <a:t>한국글로벌자산운용_2층_본사사업부</a:t>
+            </a:r>
+            <a:endParaRPr lang="en-US" sz="630" dirty="0"/>
+          </a:p>
+        </p:txBody>
+      </p:sp>
+      <p:sp>
+        <p:nvSpPr>
+          <p:cNvPr id="14" name="Text 12"/>
+          <p:cNvSpPr/>
+          <p:nvPr/>
+        </p:nvSpPr>
+        <p:spPr>
+          <a:xfrm>
+            <a:off x="566928" y="5336366"/>
+            <a:ext cx="475488" cy="165194"/>
+          </a:xfrm>
+          <a:prstGeom prst="rect">
+            <a:avLst/>
+          </a:prstGeom>
+          <a:noFill/>
+          <a:ln/>
+        </p:spPr>
+        <p:txBody>
+          <a:bodyPr wrap="none" lIns="0" tIns="0" rIns="0" bIns="0" rtlCol="0" anchor="ctr"/>
+          <a:lstStyle/>
+          <a:p>
+            <a:pPr algn="r" indent="0" marL="0">
+              <a:buNone/>
+            </a:pPr>
+            <a:r>
+              <a:rPr lang="en-US" sz="700" b="1" dirty="0">
+                <a:solidFill>
+                  <a:srgbClr val="10161F"/>
+                </a:solidFill>
+                <a:latin typeface="맑은 고딕" pitchFamily="34" charset="0"/>
+                <a:ea typeface="맑은 고딕" pitchFamily="34" charset="-122"/>
+                <a:cs typeface="맑은 고딕" pitchFamily="34" charset="-120"/>
+              </a:rPr>
+              <a:t>3F</a:t>
+            </a:r>
+            <a:endParaRPr lang="en-US" sz="700" dirty="0"/>
+          </a:p>
+        </p:txBody>
+      </p:sp>
+      <p:sp>
+        <p:nvSpPr>
+          <p:cNvPr id="15" name="Shape 13"/>
+          <p:cNvSpPr/>
+          <p:nvPr/>
+        </p:nvSpPr>
+        <p:spPr>
+          <a:xfrm>
+            <a:off x="1115568" y="5368370"/>
+            <a:ext cx="1444752" cy="101186"/>
+          </a:xfrm>
+          <a:prstGeom prst="rect">
+            <a:avLst/>
+          </a:prstGeom>
+          <a:solidFill>
+            <a:srgbClr val="C5B4E3"/>
+          </a:solidFill>
+          <a:ln w="9525">
+            <a:solidFill>
+              <a:srgbClr val="5B6B73"/>
+            </a:solidFill>
+            <a:prstDash val="solid"/>
+          </a:ln>
+        </p:spPr>
+      </p:sp>
+      <p:sp>
+        <p:nvSpPr>
+          <p:cNvPr id="16" name="Text 14"/>
+          <p:cNvSpPr/>
+          <p:nvPr/>
+        </p:nvSpPr>
+        <p:spPr>
+          <a:xfrm>
+            <a:off x="1143000" y="5368370"/>
+            <a:ext cx="1389888" cy="101186"/>
+          </a:xfrm>
+          <a:prstGeom prst="rect">
+            <a:avLst/>
+          </a:prstGeom>
+          <a:noFill/>
+          <a:ln/>
+        </p:spPr>
+        <p:txBody>
+          <a:bodyPr wrap="none" lIns="0" tIns="0" rIns="0" bIns="0" rtlCol="0" anchor="ctr"/>
+          <a:lstStyle/>
+          <a:p>
+            <a:pPr algn="ctr" indent="0" marL="0">
+              <a:buNone/>
+            </a:pPr>
+            <a:r>
+              <a:rPr lang="en-US" sz="630" dirty="0">
+                <a:solidFill>
+                  <a:srgbClr val="3A3A3A"/>
+                </a:solidFill>
+                <a:latin typeface="맑은 고딕" pitchFamily="34" charset="0"/>
+                <a:ea typeface="맑은 고딕" pitchFamily="34" charset="-122"/>
+                <a:cs typeface="맑은 고딕" pitchFamily="34" charset="-120"/>
+              </a:rPr>
+              <a:t>한국글로벌자산운용_3층_본사사업부</a:t>
+            </a:r>
+            <a:endParaRPr lang="en-US" sz="630" dirty="0"/>
+          </a:p>
+        </p:txBody>
+      </p:sp>
+      <p:sp>
+        <p:nvSpPr>
+          <p:cNvPr id="17" name="Text 15"/>
+          <p:cNvSpPr/>
+          <p:nvPr/>
+        </p:nvSpPr>
+        <p:spPr>
+          <a:xfrm>
+            <a:off x="566928" y="5171173"/>
+            <a:ext cx="475488" cy="165194"/>
+          </a:xfrm>
+          <a:prstGeom prst="rect">
+            <a:avLst/>
+          </a:prstGeom>
+          <a:noFill/>
+          <a:ln/>
+        </p:spPr>
+        <p:txBody>
+          <a:bodyPr wrap="none" lIns="0" tIns="0" rIns="0" bIns="0" rtlCol="0" anchor="ctr"/>
+          <a:lstStyle/>
+          <a:p>
+            <a:pPr algn="r" indent="0" marL="0">
+              <a:buNone/>
+            </a:pPr>
+            <a:r>
+              <a:rPr lang="en-US" sz="700" b="1" dirty="0">
+                <a:solidFill>
+                  <a:srgbClr val="10161F"/>
+                </a:solidFill>
+                <a:latin typeface="맑은 고딕" pitchFamily="34" charset="0"/>
+                <a:ea typeface="맑은 고딕" pitchFamily="34" charset="-122"/>
+                <a:cs typeface="맑은 고딕" pitchFamily="34" charset="-120"/>
+              </a:rPr>
+              <a:t>4F</a:t>
+            </a:r>
+            <a:endParaRPr lang="en-US" sz="700" dirty="0"/>
+          </a:p>
+        </p:txBody>
+      </p:sp>
+      <p:sp>
+        <p:nvSpPr>
+          <p:cNvPr id="18" name="Shape 16"/>
+          <p:cNvSpPr/>
+          <p:nvPr/>
+        </p:nvSpPr>
+        <p:spPr>
+          <a:xfrm>
+            <a:off x="1115568" y="5203177"/>
+            <a:ext cx="1444752" cy="101186"/>
+          </a:xfrm>
+          <a:prstGeom prst="rect">
+            <a:avLst/>
+          </a:prstGeom>
+          <a:solidFill>
+            <a:srgbClr val="C5B4E3"/>
+          </a:solidFill>
+          <a:ln w="9525">
+            <a:solidFill>
+              <a:srgbClr val="5B6B73"/>
+            </a:solidFill>
+            <a:prstDash val="solid"/>
+          </a:ln>
+        </p:spPr>
+      </p:sp>
+      <p:sp>
+        <p:nvSpPr>
+          <p:cNvPr id="19" name="Text 17"/>
+          <p:cNvSpPr/>
+          <p:nvPr/>
+        </p:nvSpPr>
+        <p:spPr>
+          <a:xfrm>
+            <a:off x="1143000" y="5203177"/>
+            <a:ext cx="1389888" cy="101186"/>
+          </a:xfrm>
+          <a:prstGeom prst="rect">
+            <a:avLst/>
+          </a:prstGeom>
+          <a:noFill/>
+          <a:ln/>
+        </p:spPr>
+        <p:txBody>
+          <a:bodyPr wrap="none" lIns="0" tIns="0" rIns="0" bIns="0" rtlCol="0" anchor="ctr"/>
+          <a:lstStyle/>
+          <a:p>
+            <a:pPr algn="ctr" indent="0" marL="0">
+              <a:buNone/>
+            </a:pPr>
+            <a:r>
+              <a:rPr lang="en-US" sz="630" dirty="0">
+                <a:solidFill>
+                  <a:srgbClr val="3A3A3A"/>
+                </a:solidFill>
+                <a:latin typeface="맑은 고딕" pitchFamily="34" charset="0"/>
+                <a:ea typeface="맑은 고딕" pitchFamily="34" charset="-122"/>
+                <a:cs typeface="맑은 고딕" pitchFamily="34" charset="-120"/>
+              </a:rPr>
+              <a:t>한국글로벌자산운용_4층_본사사업부</a:t>
+            </a:r>
+            <a:endParaRPr lang="en-US" sz="630" dirty="0"/>
+          </a:p>
+        </p:txBody>
+      </p:sp>
+      <p:sp>
+        <p:nvSpPr>
+          <p:cNvPr id="20" name="Text 18"/>
+          <p:cNvSpPr/>
+          <p:nvPr/>
+        </p:nvSpPr>
+        <p:spPr>
+          <a:xfrm>
+            <a:off x="566928" y="5005979"/>
+            <a:ext cx="475488" cy="165194"/>
+          </a:xfrm>
+          <a:prstGeom prst="rect">
+            <a:avLst/>
+          </a:prstGeom>
+          <a:noFill/>
+          <a:ln/>
+        </p:spPr>
+        <p:txBody>
+          <a:bodyPr wrap="none" lIns="0" tIns="0" rIns="0" bIns="0" rtlCol="0" anchor="ctr"/>
+          <a:lstStyle/>
+          <a:p>
+            <a:pPr algn="r" indent="0" marL="0">
+              <a:buNone/>
+            </a:pPr>
+            <a:r>
+              <a:rPr lang="en-US" sz="700" b="1" dirty="0">
+                <a:solidFill>
+                  <a:srgbClr val="10161F"/>
+                </a:solidFill>
+                <a:latin typeface="맑은 고딕" pitchFamily="34" charset="0"/>
+                <a:ea typeface="맑은 고딕" pitchFamily="34" charset="-122"/>
+                <a:cs typeface="맑은 고딕" pitchFamily="34" charset="-120"/>
+              </a:rPr>
+              <a:t>5F</a:t>
+            </a:r>
+            <a:endParaRPr lang="en-US" sz="700" dirty="0"/>
+          </a:p>
+        </p:txBody>
+      </p:sp>
+      <p:sp>
+        <p:nvSpPr>
+          <p:cNvPr id="21" name="Shape 19"/>
+          <p:cNvSpPr/>
+          <p:nvPr/>
+        </p:nvSpPr>
+        <p:spPr>
+          <a:xfrm>
+            <a:off x="1115568" y="5037983"/>
+            <a:ext cx="1444752" cy="101186"/>
+          </a:xfrm>
+          <a:prstGeom prst="rect">
+            <a:avLst/>
+          </a:prstGeom>
+          <a:solidFill>
+            <a:srgbClr val="C5B4E3"/>
+          </a:solidFill>
+          <a:ln w="9525">
+            <a:solidFill>
+              <a:srgbClr val="5B6B73"/>
+            </a:solidFill>
+            <a:prstDash val="solid"/>
+          </a:ln>
+        </p:spPr>
+      </p:sp>
+      <p:sp>
+        <p:nvSpPr>
+          <p:cNvPr id="22" name="Text 20"/>
+          <p:cNvSpPr/>
+          <p:nvPr/>
+        </p:nvSpPr>
+        <p:spPr>
+          <a:xfrm>
+            <a:off x="1143000" y="5037983"/>
+            <a:ext cx="1389888" cy="101186"/>
+          </a:xfrm>
+          <a:prstGeom prst="rect">
+            <a:avLst/>
+          </a:prstGeom>
+          <a:noFill/>
+          <a:ln/>
+        </p:spPr>
+        <p:txBody>
+          <a:bodyPr wrap="none" lIns="0" tIns="0" rIns="0" bIns="0" rtlCol="0" anchor="ctr"/>
+          <a:lstStyle/>
+          <a:p>
+            <a:pPr algn="ctr" indent="0" marL="0">
+              <a:buNone/>
+            </a:pPr>
+            <a:r>
+              <a:rPr lang="en-US" sz="630" dirty="0">
+                <a:solidFill>
+                  <a:srgbClr val="3A3A3A"/>
+                </a:solidFill>
+                <a:latin typeface="맑은 고딕" pitchFamily="34" charset="0"/>
+                <a:ea typeface="맑은 고딕" pitchFamily="34" charset="-122"/>
+                <a:cs typeface="맑은 고딕" pitchFamily="34" charset="-120"/>
+              </a:rPr>
+              <a:t>한국글로벌자산운용_5층_본사사업부</a:t>
+            </a:r>
+            <a:endParaRPr lang="en-US" sz="630" dirty="0"/>
+          </a:p>
+        </p:txBody>
+      </p:sp>
+      <p:sp>
+        <p:nvSpPr>
+          <p:cNvPr id="23" name="Text 21"/>
+          <p:cNvSpPr/>
+          <p:nvPr/>
+        </p:nvSpPr>
+        <p:spPr>
+          <a:xfrm>
+            <a:off x="566928" y="4840785"/>
+            <a:ext cx="475488" cy="165194"/>
+          </a:xfrm>
+          <a:prstGeom prst="rect">
+            <a:avLst/>
+          </a:prstGeom>
+          <a:noFill/>
+          <a:ln/>
+        </p:spPr>
+        <p:txBody>
+          <a:bodyPr wrap="none" lIns="0" tIns="0" rIns="0" bIns="0" rtlCol="0" anchor="ctr"/>
+          <a:lstStyle/>
+          <a:p>
+            <a:pPr algn="r" indent="0" marL="0">
+              <a:buNone/>
+            </a:pPr>
+            <a:r>
+              <a:rPr lang="en-US" sz="700" b="1" dirty="0">
+                <a:solidFill>
+                  <a:srgbClr val="10161F"/>
+                </a:solidFill>
+                <a:latin typeface="맑은 고딕" pitchFamily="34" charset="0"/>
+                <a:ea typeface="맑은 고딕" pitchFamily="34" charset="-122"/>
+                <a:cs typeface="맑은 고딕" pitchFamily="34" charset="-120"/>
+              </a:rPr>
+              <a:t>6F</a:t>
+            </a:r>
+            <a:endParaRPr lang="en-US" sz="700" dirty="0"/>
+          </a:p>
+        </p:txBody>
+      </p:sp>
+      <p:sp>
+        <p:nvSpPr>
+          <p:cNvPr id="24" name="Shape 22"/>
+          <p:cNvSpPr/>
+          <p:nvPr/>
+        </p:nvSpPr>
+        <p:spPr>
+          <a:xfrm>
+            <a:off x="1115568" y="4872789"/>
+            <a:ext cx="1444752" cy="101186"/>
+          </a:xfrm>
+          <a:prstGeom prst="rect">
+            <a:avLst/>
+          </a:prstGeom>
+          <a:solidFill>
+            <a:srgbClr val="C5B4E3"/>
+          </a:solidFill>
+          <a:ln w="9525">
+            <a:solidFill>
+              <a:srgbClr val="5B6B73"/>
+            </a:solidFill>
+            <a:prstDash val="solid"/>
+          </a:ln>
+        </p:spPr>
+      </p:sp>
+      <p:sp>
+        <p:nvSpPr>
+          <p:cNvPr id="25" name="Text 23"/>
+          <p:cNvSpPr/>
+          <p:nvPr/>
+        </p:nvSpPr>
+        <p:spPr>
+          <a:xfrm>
+            <a:off x="1143000" y="4872789"/>
+            <a:ext cx="1389888" cy="101186"/>
+          </a:xfrm>
+          <a:prstGeom prst="rect">
+            <a:avLst/>
+          </a:prstGeom>
+          <a:noFill/>
+          <a:ln/>
+        </p:spPr>
+        <p:txBody>
+          <a:bodyPr wrap="none" lIns="0" tIns="0" rIns="0" bIns="0" rtlCol="0" anchor="ctr"/>
+          <a:lstStyle/>
+          <a:p>
+            <a:pPr algn="ctr" indent="0" marL="0">
+              <a:buNone/>
+            </a:pPr>
+            <a:r>
+              <a:rPr lang="en-US" sz="630" dirty="0">
+                <a:solidFill>
+                  <a:srgbClr val="3A3A3A"/>
+                </a:solidFill>
+                <a:latin typeface="맑은 고딕" pitchFamily="34" charset="0"/>
+                <a:ea typeface="맑은 고딕" pitchFamily="34" charset="-122"/>
+                <a:cs typeface="맑은 고딕" pitchFamily="34" charset="-120"/>
+              </a:rPr>
+              <a:t>한국글로벌자산운용_6층_본사사업부</a:t>
+            </a:r>
+            <a:endParaRPr lang="en-US" sz="630" dirty="0"/>
+          </a:p>
+        </p:txBody>
+      </p:sp>
+      <p:sp>
+        <p:nvSpPr>
+          <p:cNvPr id="26" name="Text 24"/>
+          <p:cNvSpPr/>
+          <p:nvPr/>
+        </p:nvSpPr>
+        <p:spPr>
+          <a:xfrm>
+            <a:off x="566928" y="4675592"/>
+            <a:ext cx="475488" cy="165194"/>
+          </a:xfrm>
+          <a:prstGeom prst="rect">
+            <a:avLst/>
+          </a:prstGeom>
+          <a:noFill/>
+          <a:ln/>
+        </p:spPr>
+        <p:txBody>
+          <a:bodyPr wrap="none" lIns="0" tIns="0" rIns="0" bIns="0" rtlCol="0" anchor="ctr"/>
+          <a:lstStyle/>
+          <a:p>
+            <a:pPr algn="r" indent="0" marL="0">
+              <a:buNone/>
+            </a:pPr>
+            <a:r>
+              <a:rPr lang="en-US" sz="700" b="1" dirty="0">
+                <a:solidFill>
+                  <a:srgbClr val="10161F"/>
+                </a:solidFill>
+                <a:latin typeface="맑은 고딕" pitchFamily="34" charset="0"/>
+                <a:ea typeface="맑은 고딕" pitchFamily="34" charset="-122"/>
+                <a:cs typeface="맑은 고딕" pitchFamily="34" charset="-120"/>
+              </a:rPr>
+              <a:t>7F</a:t>
+            </a:r>
+            <a:endParaRPr lang="en-US" sz="700" dirty="0"/>
+          </a:p>
+        </p:txBody>
+      </p:sp>
+      <p:sp>
+        <p:nvSpPr>
+          <p:cNvPr id="27" name="Shape 25"/>
+          <p:cNvSpPr/>
+          <p:nvPr/>
+        </p:nvSpPr>
+        <p:spPr>
+          <a:xfrm>
+            <a:off x="1115568" y="4707596"/>
+            <a:ext cx="1444752" cy="101186"/>
+          </a:xfrm>
+          <a:prstGeom prst="rect">
+            <a:avLst/>
+          </a:prstGeom>
+          <a:solidFill>
+            <a:srgbClr val="C5B4E3"/>
+          </a:solidFill>
+          <a:ln w="9525">
+            <a:solidFill>
+              <a:srgbClr val="5B6B73"/>
+            </a:solidFill>
+            <a:prstDash val="solid"/>
+          </a:ln>
+        </p:spPr>
+      </p:sp>
+      <p:sp>
+        <p:nvSpPr>
+          <p:cNvPr id="28" name="Text 26"/>
+          <p:cNvSpPr/>
+          <p:nvPr/>
+        </p:nvSpPr>
+        <p:spPr>
+          <a:xfrm>
+            <a:off x="1143000" y="4707596"/>
+            <a:ext cx="1389888" cy="101186"/>
+          </a:xfrm>
+          <a:prstGeom prst="rect">
+            <a:avLst/>
+          </a:prstGeom>
+          <a:noFill/>
+          <a:ln/>
+        </p:spPr>
+        <p:txBody>
+          <a:bodyPr wrap="none" lIns="0" tIns="0" rIns="0" bIns="0" rtlCol="0" anchor="ctr"/>
+          <a:lstStyle/>
+          <a:p>
+            <a:pPr algn="ctr" indent="0" marL="0">
+              <a:buNone/>
+            </a:pPr>
+            <a:r>
+              <a:rPr lang="en-US" sz="630" dirty="0">
+                <a:solidFill>
+                  <a:srgbClr val="3A3A3A"/>
+                </a:solidFill>
+                <a:latin typeface="맑은 고딕" pitchFamily="34" charset="0"/>
+                <a:ea typeface="맑은 고딕" pitchFamily="34" charset="-122"/>
+                <a:cs typeface="맑은 고딕" pitchFamily="34" charset="-120"/>
+              </a:rPr>
+              <a:t>한국글로벌자산운용_7층_본사사업부</a:t>
+            </a:r>
+            <a:endParaRPr lang="en-US" sz="630" dirty="0"/>
+          </a:p>
+        </p:txBody>
+      </p:sp>
+      <p:sp>
+        <p:nvSpPr>
+          <p:cNvPr id="29" name="Text 27"/>
+          <p:cNvSpPr/>
+          <p:nvPr/>
+        </p:nvSpPr>
+        <p:spPr>
+          <a:xfrm>
+            <a:off x="566928" y="4510398"/>
+            <a:ext cx="475488" cy="165194"/>
+          </a:xfrm>
+          <a:prstGeom prst="rect">
+            <a:avLst/>
+          </a:prstGeom>
+          <a:noFill/>
+          <a:ln/>
+        </p:spPr>
+        <p:txBody>
+          <a:bodyPr wrap="none" lIns="0" tIns="0" rIns="0" bIns="0" rtlCol="0" anchor="ctr"/>
+          <a:lstStyle/>
+          <a:p>
+            <a:pPr algn="r" indent="0" marL="0">
+              <a:buNone/>
+            </a:pPr>
+            <a:r>
+              <a:rPr lang="en-US" sz="700" b="1" dirty="0">
+                <a:solidFill>
+                  <a:srgbClr val="10161F"/>
+                </a:solidFill>
+                <a:latin typeface="맑은 고딕" pitchFamily="34" charset="0"/>
+                <a:ea typeface="맑은 고딕" pitchFamily="34" charset="-122"/>
+                <a:cs typeface="맑은 고딕" pitchFamily="34" charset="-120"/>
+              </a:rPr>
+              <a:t>8F</a:t>
+            </a:r>
+            <a:endParaRPr lang="en-US" sz="700" dirty="0"/>
+          </a:p>
+        </p:txBody>
+      </p:sp>
+      <p:sp>
+        <p:nvSpPr>
+          <p:cNvPr id="30" name="Shape 28"/>
+          <p:cNvSpPr/>
+          <p:nvPr/>
+        </p:nvSpPr>
+        <p:spPr>
+          <a:xfrm>
+            <a:off x="1115568" y="4542402"/>
+            <a:ext cx="1444752" cy="101186"/>
+          </a:xfrm>
+          <a:prstGeom prst="rect">
+            <a:avLst/>
+          </a:prstGeom>
+          <a:solidFill>
+            <a:srgbClr val="C5B4E3"/>
+          </a:solidFill>
+          <a:ln w="9525">
+            <a:solidFill>
+              <a:srgbClr val="5B6B73"/>
+            </a:solidFill>
+            <a:prstDash val="solid"/>
+          </a:ln>
+        </p:spPr>
+      </p:sp>
+      <p:sp>
+        <p:nvSpPr>
+          <p:cNvPr id="31" name="Text 29"/>
+          <p:cNvSpPr/>
+          <p:nvPr/>
+        </p:nvSpPr>
+        <p:spPr>
+          <a:xfrm>
+            <a:off x="1143000" y="4542402"/>
+            <a:ext cx="1389888" cy="101186"/>
+          </a:xfrm>
+          <a:prstGeom prst="rect">
+            <a:avLst/>
+          </a:prstGeom>
+          <a:noFill/>
+          <a:ln/>
+        </p:spPr>
+        <p:txBody>
+          <a:bodyPr wrap="none" lIns="0" tIns="0" rIns="0" bIns="0" rtlCol="0" anchor="ctr"/>
+          <a:lstStyle/>
+          <a:p>
+            <a:pPr algn="ctr" indent="0" marL="0">
+              <a:buNone/>
+            </a:pPr>
+            <a:r>
+              <a:rPr lang="en-US" sz="630" dirty="0">
+                <a:solidFill>
+                  <a:srgbClr val="3A3A3A"/>
+                </a:solidFill>
+                <a:latin typeface="맑은 고딕" pitchFamily="34" charset="0"/>
+                <a:ea typeface="맑은 고딕" pitchFamily="34" charset="-122"/>
+                <a:cs typeface="맑은 고딕" pitchFamily="34" charset="-120"/>
+              </a:rPr>
+              <a:t>한국글로벌자산운용_8층_본사사업부</a:t>
+            </a:r>
+            <a:endParaRPr lang="en-US" sz="630" dirty="0"/>
+          </a:p>
+        </p:txBody>
+      </p:sp>
+      <p:sp>
+        <p:nvSpPr>
+          <p:cNvPr id="32" name="Text 30"/>
+          <p:cNvSpPr/>
+          <p:nvPr/>
+        </p:nvSpPr>
+        <p:spPr>
+          <a:xfrm>
+            <a:off x="566928" y="4345205"/>
+            <a:ext cx="475488" cy="165194"/>
+          </a:xfrm>
+          <a:prstGeom prst="rect">
+            <a:avLst/>
+          </a:prstGeom>
+          <a:noFill/>
+          <a:ln/>
+        </p:spPr>
+        <p:txBody>
+          <a:bodyPr wrap="none" lIns="0" tIns="0" rIns="0" bIns="0" rtlCol="0" anchor="ctr"/>
+          <a:lstStyle/>
+          <a:p>
+            <a:pPr algn="r" indent="0" marL="0">
+              <a:buNone/>
+            </a:pPr>
+            <a:r>
+              <a:rPr lang="en-US" sz="700" b="1" dirty="0">
+                <a:solidFill>
+                  <a:srgbClr val="10161F"/>
+                </a:solidFill>
+                <a:latin typeface="맑은 고딕" pitchFamily="34" charset="0"/>
+                <a:ea typeface="맑은 고딕" pitchFamily="34" charset="-122"/>
+                <a:cs typeface="맑은 고딕" pitchFamily="34" charset="-120"/>
+              </a:rPr>
+              <a:t>9F</a:t>
+            </a:r>
+            <a:endParaRPr lang="en-US" sz="700" dirty="0"/>
+          </a:p>
+        </p:txBody>
+      </p:sp>
+      <p:sp>
+        <p:nvSpPr>
+          <p:cNvPr id="33" name="Shape 31"/>
+          <p:cNvSpPr/>
+          <p:nvPr/>
+        </p:nvSpPr>
+        <p:spPr>
+          <a:xfrm>
+            <a:off x="1115568" y="4377209"/>
+            <a:ext cx="1444752" cy="101186"/>
+          </a:xfrm>
+          <a:prstGeom prst="rect">
+            <a:avLst/>
+          </a:prstGeom>
+          <a:solidFill>
+            <a:srgbClr val="C5B4E3"/>
+          </a:solidFill>
+          <a:ln w="9525">
+            <a:solidFill>
+              <a:srgbClr val="5B6B73"/>
+            </a:solidFill>
+            <a:prstDash val="solid"/>
+          </a:ln>
+        </p:spPr>
+      </p:sp>
+      <p:sp>
+        <p:nvSpPr>
+          <p:cNvPr id="34" name="Text 32"/>
+          <p:cNvSpPr/>
+          <p:nvPr/>
+        </p:nvSpPr>
+        <p:spPr>
+          <a:xfrm>
+            <a:off x="1143000" y="4377209"/>
+            <a:ext cx="1389888" cy="101186"/>
+          </a:xfrm>
+          <a:prstGeom prst="rect">
+            <a:avLst/>
+          </a:prstGeom>
+          <a:noFill/>
+          <a:ln/>
+        </p:spPr>
+        <p:txBody>
+          <a:bodyPr wrap="none" lIns="0" tIns="0" rIns="0" bIns="0" rtlCol="0" anchor="ctr"/>
+          <a:lstStyle/>
+          <a:p>
+            <a:pPr algn="ctr" indent="0" marL="0">
+              <a:buNone/>
+            </a:pPr>
+            <a:r>
+              <a:rPr lang="en-US" sz="630" dirty="0">
+                <a:solidFill>
+                  <a:srgbClr val="3A3A3A"/>
+                </a:solidFill>
+                <a:latin typeface="맑은 고딕" pitchFamily="34" charset="0"/>
+                <a:ea typeface="맑은 고딕" pitchFamily="34" charset="-122"/>
+                <a:cs typeface="맑은 고딕" pitchFamily="34" charset="-120"/>
+              </a:rPr>
+              <a:t>한국글로벌자산운용_9층_본사사업부</a:t>
+            </a:r>
+            <a:endParaRPr lang="en-US" sz="630" dirty="0"/>
+          </a:p>
+        </p:txBody>
+      </p:sp>
+      <p:sp>
+        <p:nvSpPr>
+          <p:cNvPr id="35" name="Text 33"/>
+          <p:cNvSpPr/>
+          <p:nvPr/>
+        </p:nvSpPr>
+        <p:spPr>
+          <a:xfrm>
+            <a:off x="566928" y="4180011"/>
+            <a:ext cx="475488" cy="165194"/>
+          </a:xfrm>
+          <a:prstGeom prst="rect">
+            <a:avLst/>
+          </a:prstGeom>
+          <a:noFill/>
+          <a:ln/>
+        </p:spPr>
+        <p:txBody>
+          <a:bodyPr wrap="none" lIns="0" tIns="0" rIns="0" bIns="0" rtlCol="0" anchor="ctr"/>
+          <a:lstStyle/>
+          <a:p>
+            <a:pPr algn="r" indent="0" marL="0">
+              <a:buNone/>
+            </a:pPr>
+            <a:r>
+              <a:rPr lang="en-US" sz="700" b="1" dirty="0">
+                <a:solidFill>
+                  <a:srgbClr val="10161F"/>
+                </a:solidFill>
+                <a:latin typeface="맑은 고딕" pitchFamily="34" charset="0"/>
+                <a:ea typeface="맑은 고딕" pitchFamily="34" charset="-122"/>
+                <a:cs typeface="맑은 고딕" pitchFamily="34" charset="-120"/>
+              </a:rPr>
+              <a:t>10F</a:t>
+            </a:r>
+            <a:endParaRPr lang="en-US" sz="700" dirty="0"/>
+          </a:p>
+        </p:txBody>
+      </p:sp>
+      <p:sp>
+        <p:nvSpPr>
+          <p:cNvPr id="36" name="Shape 34"/>
+          <p:cNvSpPr/>
+          <p:nvPr/>
+        </p:nvSpPr>
+        <p:spPr>
+          <a:xfrm>
+            <a:off x="1115568" y="4212015"/>
+            <a:ext cx="1444752" cy="101186"/>
+          </a:xfrm>
+          <a:prstGeom prst="rect">
+            <a:avLst/>
+          </a:prstGeom>
+          <a:solidFill>
+            <a:srgbClr val="C5B4E3"/>
+          </a:solidFill>
+          <a:ln w="9525">
+            <a:solidFill>
+              <a:srgbClr val="5B6B73"/>
+            </a:solidFill>
+            <a:prstDash val="solid"/>
+          </a:ln>
+        </p:spPr>
+      </p:sp>
+      <p:sp>
+        <p:nvSpPr>
+          <p:cNvPr id="37" name="Text 35"/>
+          <p:cNvSpPr/>
+          <p:nvPr/>
+        </p:nvSpPr>
+        <p:spPr>
+          <a:xfrm>
+            <a:off x="566928" y="4014818"/>
+            <a:ext cx="475488" cy="165194"/>
+          </a:xfrm>
+          <a:prstGeom prst="rect">
+            <a:avLst/>
+          </a:prstGeom>
+          <a:noFill/>
+          <a:ln/>
+        </p:spPr>
+        <p:txBody>
+          <a:bodyPr wrap="none" lIns="0" tIns="0" rIns="0" bIns="0" rtlCol="0" anchor="ctr"/>
+          <a:lstStyle/>
+          <a:p>
+            <a:pPr algn="r" indent="0" marL="0">
+              <a:buNone/>
+            </a:pPr>
+            <a:r>
+              <a:rPr lang="en-US" sz="700" b="1" dirty="0">
+                <a:solidFill>
+                  <a:srgbClr val="10161F"/>
+                </a:solidFill>
+                <a:latin typeface="맑은 고딕" pitchFamily="34" charset="0"/>
+                <a:ea typeface="맑은 고딕" pitchFamily="34" charset="-122"/>
+                <a:cs typeface="맑은 고딕" pitchFamily="34" charset="-120"/>
+              </a:rPr>
+              <a:t>11F</a:t>
+            </a:r>
+            <a:endParaRPr lang="en-US" sz="700" dirty="0"/>
+          </a:p>
+        </p:txBody>
+      </p:sp>
+      <p:sp>
+        <p:nvSpPr>
+          <p:cNvPr id="38" name="Shape 36"/>
+          <p:cNvSpPr/>
+          <p:nvPr/>
+        </p:nvSpPr>
+        <p:spPr>
+          <a:xfrm>
+            <a:off x="1115568" y="4046822"/>
+            <a:ext cx="1444752" cy="101186"/>
+          </a:xfrm>
+          <a:prstGeom prst="rect">
+            <a:avLst/>
+          </a:prstGeom>
+          <a:solidFill>
+            <a:srgbClr val="C5B4E3"/>
+          </a:solidFill>
+          <a:ln w="9525">
+            <a:solidFill>
+              <a:srgbClr val="5B6B73"/>
+            </a:solidFill>
+            <a:prstDash val="solid"/>
+          </a:ln>
+        </p:spPr>
+      </p:sp>
+      <p:sp>
+        <p:nvSpPr>
+          <p:cNvPr id="39" name="Text 37"/>
+          <p:cNvSpPr/>
+          <p:nvPr/>
+        </p:nvSpPr>
+        <p:spPr>
+          <a:xfrm>
+            <a:off x="566928" y="3849624"/>
+            <a:ext cx="475488" cy="165194"/>
+          </a:xfrm>
+          <a:prstGeom prst="rect">
+            <a:avLst/>
+          </a:prstGeom>
+          <a:noFill/>
+          <a:ln/>
+        </p:spPr>
+        <p:txBody>
+          <a:bodyPr wrap="none" lIns="0" tIns="0" rIns="0" bIns="0" rtlCol="0" anchor="ctr"/>
+          <a:lstStyle/>
+          <a:p>
+            <a:pPr algn="r" indent="0" marL="0">
+              <a:buNone/>
+            </a:pPr>
+            <a:r>
+              <a:rPr lang="en-US" sz="700" b="1" dirty="0">
+                <a:solidFill>
+                  <a:srgbClr val="10161F"/>
+                </a:solidFill>
+                <a:latin typeface="맑은 고딕" pitchFamily="34" charset="0"/>
+                <a:ea typeface="맑은 고딕" pitchFamily="34" charset="-122"/>
+                <a:cs typeface="맑은 고딕" pitchFamily="34" charset="-120"/>
+              </a:rPr>
+              <a:t>12F</a:t>
+            </a:r>
+            <a:endParaRPr lang="en-US" sz="700" dirty="0"/>
+          </a:p>
+        </p:txBody>
+      </p:sp>
+      <p:sp>
+        <p:nvSpPr>
+          <p:cNvPr id="40" name="Shape 38"/>
+          <p:cNvSpPr/>
+          <p:nvPr/>
+        </p:nvSpPr>
+        <p:spPr>
+          <a:xfrm>
+            <a:off x="1115568" y="3881628"/>
+            <a:ext cx="1444752" cy="101186"/>
+          </a:xfrm>
+          <a:prstGeom prst="rect">
+            <a:avLst/>
+          </a:prstGeom>
+          <a:solidFill>
+            <a:srgbClr val="C5B4E3"/>
+          </a:solidFill>
+          <a:ln w="9525">
+            <a:solidFill>
+              <a:srgbClr val="5B6B73"/>
+            </a:solidFill>
+            <a:prstDash val="solid"/>
+          </a:ln>
+        </p:spPr>
+      </p:sp>
+      <p:sp>
+        <p:nvSpPr>
+          <p:cNvPr id="41" name="Text 39"/>
+          <p:cNvSpPr/>
+          <p:nvPr/>
+        </p:nvSpPr>
+        <p:spPr>
+          <a:xfrm>
+            <a:off x="566928" y="3684430"/>
+            <a:ext cx="475488" cy="165194"/>
+          </a:xfrm>
+          <a:prstGeom prst="rect">
+            <a:avLst/>
+          </a:prstGeom>
+          <a:noFill/>
+          <a:ln/>
+        </p:spPr>
+        <p:txBody>
+          <a:bodyPr wrap="none" lIns="0" tIns="0" rIns="0" bIns="0" rtlCol="0" anchor="ctr"/>
+          <a:lstStyle/>
+          <a:p>
+            <a:pPr algn="r" indent="0" marL="0">
+              <a:buNone/>
+            </a:pPr>
+            <a:r>
+              <a:rPr lang="en-US" sz="700" b="1" dirty="0">
+                <a:solidFill>
+                  <a:srgbClr val="10161F"/>
+                </a:solidFill>
+                <a:latin typeface="맑은 고딕" pitchFamily="34" charset="0"/>
+                <a:ea typeface="맑은 고딕" pitchFamily="34" charset="-122"/>
+                <a:cs typeface="맑은 고딕" pitchFamily="34" charset="-120"/>
+              </a:rPr>
+              <a:t>13F</a:t>
+            </a:r>
+            <a:endParaRPr lang="en-US" sz="700" dirty="0"/>
+          </a:p>
+        </p:txBody>
+      </p:sp>
+      <p:sp>
+        <p:nvSpPr>
+          <p:cNvPr id="42" name="Shape 40"/>
+          <p:cNvSpPr/>
+          <p:nvPr/>
+        </p:nvSpPr>
+        <p:spPr>
+          <a:xfrm>
+            <a:off x="1115568" y="3716434"/>
+            <a:ext cx="1444752" cy="101186"/>
+          </a:xfrm>
+          <a:prstGeom prst="rect">
+            <a:avLst/>
+          </a:prstGeom>
+          <a:solidFill>
+            <a:srgbClr val="C5B4E3"/>
+          </a:solidFill>
+          <a:ln w="9525">
+            <a:solidFill>
+              <a:srgbClr val="5B6B73"/>
+            </a:solidFill>
+            <a:prstDash val="solid"/>
+          </a:ln>
+        </p:spPr>
+      </p:sp>
+      <p:sp>
+        <p:nvSpPr>
+          <p:cNvPr id="43" name="Text 41"/>
+          <p:cNvSpPr/>
+          <p:nvPr/>
+        </p:nvSpPr>
+        <p:spPr>
+          <a:xfrm>
+            <a:off x="566928" y="3519237"/>
+            <a:ext cx="475488" cy="165194"/>
+          </a:xfrm>
+          <a:prstGeom prst="rect">
+            <a:avLst/>
+          </a:prstGeom>
+          <a:noFill/>
+          <a:ln/>
+        </p:spPr>
+        <p:txBody>
+          <a:bodyPr wrap="none" lIns="0" tIns="0" rIns="0" bIns="0" rtlCol="0" anchor="ctr"/>
+          <a:lstStyle/>
+          <a:p>
+            <a:pPr algn="r" indent="0" marL="0">
+              <a:buNone/>
+            </a:pPr>
+            <a:r>
+              <a:rPr lang="en-US" sz="700" b="1" dirty="0">
+                <a:solidFill>
+                  <a:srgbClr val="10161F"/>
+                </a:solidFill>
+                <a:latin typeface="맑은 고딕" pitchFamily="34" charset="0"/>
+                <a:ea typeface="맑은 고딕" pitchFamily="34" charset="-122"/>
+                <a:cs typeface="맑은 고딕" pitchFamily="34" charset="-120"/>
+              </a:rPr>
+              <a:t>14F</a:t>
+            </a:r>
+            <a:endParaRPr lang="en-US" sz="700" dirty="0"/>
+          </a:p>
+        </p:txBody>
+      </p:sp>
+      <p:sp>
+        <p:nvSpPr>
+          <p:cNvPr id="44" name="Shape 42"/>
+          <p:cNvSpPr/>
+          <p:nvPr/>
+        </p:nvSpPr>
+        <p:spPr>
+          <a:xfrm>
+            <a:off x="1115568" y="3551241"/>
+            <a:ext cx="1444752" cy="101186"/>
+          </a:xfrm>
+          <a:prstGeom prst="rect">
+            <a:avLst/>
+          </a:prstGeom>
+          <a:solidFill>
+            <a:srgbClr val="C5B4E3"/>
+          </a:solidFill>
+          <a:ln w="9525">
+            <a:solidFill>
+              <a:srgbClr val="5B6B73"/>
+            </a:solidFill>
+            <a:prstDash val="solid"/>
+          </a:ln>
+        </p:spPr>
+      </p:sp>
+      <p:sp>
+        <p:nvSpPr>
+          <p:cNvPr id="45" name="Text 43"/>
+          <p:cNvSpPr/>
+          <p:nvPr/>
+        </p:nvSpPr>
+        <p:spPr>
+          <a:xfrm>
+            <a:off x="566928" y="3354043"/>
+            <a:ext cx="475488" cy="165194"/>
+          </a:xfrm>
+          <a:prstGeom prst="rect">
+            <a:avLst/>
+          </a:prstGeom>
+          <a:noFill/>
+          <a:ln/>
+        </p:spPr>
+        <p:txBody>
+          <a:bodyPr wrap="none" lIns="0" tIns="0" rIns="0" bIns="0" rtlCol="0" anchor="ctr"/>
+          <a:lstStyle/>
+          <a:p>
+            <a:pPr algn="r" indent="0" marL="0">
+              <a:buNone/>
+            </a:pPr>
+            <a:r>
+              <a:rPr lang="en-US" sz="700" b="1" dirty="0">
+                <a:solidFill>
+                  <a:srgbClr val="10161F"/>
+                </a:solidFill>
+                <a:latin typeface="맑은 고딕" pitchFamily="34" charset="0"/>
+                <a:ea typeface="맑은 고딕" pitchFamily="34" charset="-122"/>
+                <a:cs typeface="맑은 고딕" pitchFamily="34" charset="-120"/>
+              </a:rPr>
+              <a:t>15F</a:t>
+            </a:r>
+            <a:endParaRPr lang="en-US" sz="700" dirty="0"/>
+          </a:p>
+        </p:txBody>
+      </p:sp>
+      <p:sp>
+        <p:nvSpPr>
+          <p:cNvPr id="46" name="Shape 44"/>
+          <p:cNvSpPr/>
+          <p:nvPr/>
+        </p:nvSpPr>
+        <p:spPr>
+          <a:xfrm>
+            <a:off x="1115568" y="3386047"/>
+            <a:ext cx="1444752" cy="101186"/>
+          </a:xfrm>
+          <a:prstGeom prst="rect">
+            <a:avLst/>
+          </a:prstGeom>
+          <a:solidFill>
+            <a:srgbClr val="C5B4E3"/>
+          </a:solidFill>
+          <a:ln w="9525">
+            <a:solidFill>
+              <a:srgbClr val="5B6B73"/>
+            </a:solidFill>
+            <a:prstDash val="solid"/>
+          </a:ln>
+        </p:spPr>
+      </p:sp>
+      <p:sp>
+        <p:nvSpPr>
+          <p:cNvPr id="47" name="Text 45"/>
+          <p:cNvSpPr/>
+          <p:nvPr/>
+        </p:nvSpPr>
+        <p:spPr>
+          <a:xfrm>
+            <a:off x="566928" y="3188850"/>
+            <a:ext cx="475488" cy="165194"/>
+          </a:xfrm>
+          <a:prstGeom prst="rect">
+            <a:avLst/>
+          </a:prstGeom>
+          <a:noFill/>
+          <a:ln/>
+        </p:spPr>
+        <p:txBody>
+          <a:bodyPr wrap="none" lIns="0" tIns="0" rIns="0" bIns="0" rtlCol="0" anchor="ctr"/>
+          <a:lstStyle/>
+          <a:p>
+            <a:pPr algn="r" indent="0" marL="0">
+              <a:buNone/>
+            </a:pPr>
+            <a:r>
+              <a:rPr lang="en-US" sz="700" b="1" dirty="0">
+                <a:solidFill>
+                  <a:srgbClr val="10161F"/>
+                </a:solidFill>
+                <a:latin typeface="맑은 고딕" pitchFamily="34" charset="0"/>
+                <a:ea typeface="맑은 고딕" pitchFamily="34" charset="-122"/>
+                <a:cs typeface="맑은 고딕" pitchFamily="34" charset="-120"/>
+              </a:rPr>
+              <a:t>16F</a:t>
+            </a:r>
+            <a:endParaRPr lang="en-US" sz="700" dirty="0"/>
+          </a:p>
+        </p:txBody>
+      </p:sp>
+      <p:sp>
+        <p:nvSpPr>
+          <p:cNvPr id="48" name="Shape 46"/>
+          <p:cNvSpPr/>
+          <p:nvPr/>
+        </p:nvSpPr>
+        <p:spPr>
+          <a:xfrm>
+            <a:off x="1115568" y="3220854"/>
+            <a:ext cx="1444752" cy="101186"/>
+          </a:xfrm>
+          <a:prstGeom prst="rect">
+            <a:avLst/>
+          </a:prstGeom>
+          <a:solidFill>
+            <a:srgbClr val="C5B4E3"/>
+          </a:solidFill>
+          <a:ln w="9525">
+            <a:solidFill>
+              <a:srgbClr val="5B6B73"/>
+            </a:solidFill>
+            <a:prstDash val="solid"/>
+          </a:ln>
+        </p:spPr>
+      </p:sp>
+      <p:sp>
+        <p:nvSpPr>
+          <p:cNvPr id="49" name="Text 47"/>
+          <p:cNvSpPr/>
+          <p:nvPr/>
+        </p:nvSpPr>
+        <p:spPr>
+          <a:xfrm>
+            <a:off x="566928" y="3023656"/>
+            <a:ext cx="475488" cy="165194"/>
+          </a:xfrm>
+          <a:prstGeom prst="rect">
+            <a:avLst/>
+          </a:prstGeom>
+          <a:noFill/>
+          <a:ln/>
+        </p:spPr>
+        <p:txBody>
+          <a:bodyPr wrap="none" lIns="0" tIns="0" rIns="0" bIns="0" rtlCol="0" anchor="ctr"/>
+          <a:lstStyle/>
+          <a:p>
+            <a:pPr algn="r" indent="0" marL="0">
+              <a:buNone/>
+            </a:pPr>
+            <a:r>
+              <a:rPr lang="en-US" sz="700" b="1" dirty="0">
+                <a:solidFill>
+                  <a:srgbClr val="10161F"/>
+                </a:solidFill>
+                <a:latin typeface="맑은 고딕" pitchFamily="34" charset="0"/>
+                <a:ea typeface="맑은 고딕" pitchFamily="34" charset="-122"/>
+                <a:cs typeface="맑은 고딕" pitchFamily="34" charset="-120"/>
+              </a:rPr>
+              <a:t>17F</a:t>
+            </a:r>
+            <a:endParaRPr lang="en-US" sz="700" dirty="0"/>
+          </a:p>
+        </p:txBody>
+      </p:sp>
+      <p:sp>
+        <p:nvSpPr>
+          <p:cNvPr id="50" name="Shape 48"/>
+          <p:cNvSpPr/>
+          <p:nvPr/>
+        </p:nvSpPr>
+        <p:spPr>
+          <a:xfrm>
+            <a:off x="1115568" y="3055660"/>
+            <a:ext cx="1444752" cy="101186"/>
+          </a:xfrm>
+          <a:prstGeom prst="rect">
+            <a:avLst/>
+          </a:prstGeom>
+          <a:solidFill>
+            <a:srgbClr val="C5B4E3"/>
+          </a:solidFill>
+          <a:ln w="9525">
+            <a:solidFill>
+              <a:srgbClr val="5B6B73"/>
+            </a:solidFill>
+            <a:prstDash val="solid"/>
+          </a:ln>
+        </p:spPr>
+      </p:sp>
+      <p:sp>
+        <p:nvSpPr>
+          <p:cNvPr id="51" name="Text 49"/>
+          <p:cNvSpPr/>
+          <p:nvPr/>
+        </p:nvSpPr>
+        <p:spPr>
+          <a:xfrm>
+            <a:off x="566928" y="2858463"/>
+            <a:ext cx="475488" cy="165194"/>
+          </a:xfrm>
+          <a:prstGeom prst="rect">
+            <a:avLst/>
+          </a:prstGeom>
+          <a:noFill/>
+          <a:ln/>
+        </p:spPr>
+        <p:txBody>
+          <a:bodyPr wrap="none" lIns="0" tIns="0" rIns="0" bIns="0" rtlCol="0" anchor="ctr"/>
+          <a:lstStyle/>
+          <a:p>
+            <a:pPr algn="r" indent="0" marL="0">
+              <a:buNone/>
+            </a:pPr>
+            <a:r>
+              <a:rPr lang="en-US" sz="700" b="1" dirty="0">
+                <a:solidFill>
+                  <a:srgbClr val="10161F"/>
+                </a:solidFill>
+                <a:latin typeface="맑은 고딕" pitchFamily="34" charset="0"/>
+                <a:ea typeface="맑은 고딕" pitchFamily="34" charset="-122"/>
+                <a:cs typeface="맑은 고딕" pitchFamily="34" charset="-120"/>
+              </a:rPr>
+              <a:t>18F</a:t>
+            </a:r>
+            <a:endParaRPr lang="en-US" sz="700" dirty="0"/>
+          </a:p>
+        </p:txBody>
+      </p:sp>
+      <p:sp>
+        <p:nvSpPr>
+          <p:cNvPr id="52" name="Shape 50"/>
+          <p:cNvSpPr/>
+          <p:nvPr/>
+        </p:nvSpPr>
+        <p:spPr>
+          <a:xfrm>
+            <a:off x="1115568" y="2890467"/>
+            <a:ext cx="1444752" cy="101186"/>
+          </a:xfrm>
+          <a:prstGeom prst="rect">
+            <a:avLst/>
+          </a:prstGeom>
+          <a:solidFill>
+            <a:srgbClr val="C5B4E3"/>
+          </a:solidFill>
+          <a:ln w="9525">
+            <a:solidFill>
+              <a:srgbClr val="5B6B73"/>
+            </a:solidFill>
+            <a:prstDash val="solid"/>
+          </a:ln>
+        </p:spPr>
+      </p:sp>
+      <p:sp>
+        <p:nvSpPr>
+          <p:cNvPr id="53" name="Text 51"/>
+          <p:cNvSpPr/>
+          <p:nvPr/>
+        </p:nvSpPr>
+        <p:spPr>
+          <a:xfrm>
+            <a:off x="566928" y="2693269"/>
+            <a:ext cx="475488" cy="165194"/>
+          </a:xfrm>
+          <a:prstGeom prst="rect">
+            <a:avLst/>
+          </a:prstGeom>
+          <a:noFill/>
+          <a:ln/>
+        </p:spPr>
+        <p:txBody>
+          <a:bodyPr wrap="none" lIns="0" tIns="0" rIns="0" bIns="0" rtlCol="0" anchor="ctr"/>
+          <a:lstStyle/>
+          <a:p>
+            <a:pPr algn="r" indent="0" marL="0">
+              <a:buNone/>
+            </a:pPr>
+            <a:r>
+              <a:rPr lang="en-US" sz="700" b="1" dirty="0">
+                <a:solidFill>
+                  <a:srgbClr val="10161F"/>
+                </a:solidFill>
+                <a:latin typeface="맑은 고딕" pitchFamily="34" charset="0"/>
+                <a:ea typeface="맑은 고딕" pitchFamily="34" charset="-122"/>
+                <a:cs typeface="맑은 고딕" pitchFamily="34" charset="-120"/>
+              </a:rPr>
+              <a:t>19F</a:t>
+            </a:r>
+            <a:endParaRPr lang="en-US" sz="700" dirty="0"/>
+          </a:p>
+        </p:txBody>
+      </p:sp>
+      <p:sp>
+        <p:nvSpPr>
+          <p:cNvPr id="54" name="Shape 52"/>
+          <p:cNvSpPr/>
+          <p:nvPr/>
+        </p:nvSpPr>
+        <p:spPr>
+          <a:xfrm>
+            <a:off x="1115568" y="2725273"/>
+            <a:ext cx="1444752" cy="101186"/>
+          </a:xfrm>
+          <a:prstGeom prst="rect">
+            <a:avLst/>
+          </a:prstGeom>
+          <a:solidFill>
+            <a:srgbClr val="C5B4E3"/>
+          </a:solidFill>
+          <a:ln w="9525">
+            <a:solidFill>
+              <a:srgbClr val="5B6B73"/>
+            </a:solidFill>
+            <a:prstDash val="solid"/>
+          </a:ln>
+        </p:spPr>
+      </p:sp>
+      <p:sp>
+        <p:nvSpPr>
+          <p:cNvPr id="55" name="Text 53"/>
+          <p:cNvSpPr/>
+          <p:nvPr/>
+        </p:nvSpPr>
+        <p:spPr>
+          <a:xfrm>
+            <a:off x="566928" y="2528075"/>
+            <a:ext cx="475488" cy="165194"/>
+          </a:xfrm>
+          <a:prstGeom prst="rect">
+            <a:avLst/>
+          </a:prstGeom>
+          <a:noFill/>
+          <a:ln/>
+        </p:spPr>
+        <p:txBody>
+          <a:bodyPr wrap="none" lIns="0" tIns="0" rIns="0" bIns="0" rtlCol="0" anchor="ctr"/>
+          <a:lstStyle/>
+          <a:p>
+            <a:pPr algn="r" indent="0" marL="0">
+              <a:buNone/>
+            </a:pPr>
+            <a:r>
+              <a:rPr lang="en-US" sz="700" b="1" dirty="0">
+                <a:solidFill>
+                  <a:srgbClr val="10161F"/>
+                </a:solidFill>
+                <a:latin typeface="맑은 고딕" pitchFamily="34" charset="0"/>
+                <a:ea typeface="맑은 고딕" pitchFamily="34" charset="-122"/>
+                <a:cs typeface="맑은 고딕" pitchFamily="34" charset="-120"/>
+              </a:rPr>
+              <a:t>20F</a:t>
+            </a:r>
+            <a:endParaRPr lang="en-US" sz="700" dirty="0"/>
+          </a:p>
+        </p:txBody>
+      </p:sp>
+      <p:sp>
+        <p:nvSpPr>
+          <p:cNvPr id="56" name="Shape 54"/>
+          <p:cNvSpPr/>
+          <p:nvPr/>
+        </p:nvSpPr>
+        <p:spPr>
+          <a:xfrm>
+            <a:off x="1115568" y="2560079"/>
+            <a:ext cx="1444752" cy="101186"/>
+          </a:xfrm>
+          <a:prstGeom prst="rect">
+            <a:avLst/>
+          </a:prstGeom>
+          <a:solidFill>
+            <a:srgbClr val="C5B4E3"/>
+          </a:solidFill>
+          <a:ln w="9525">
+            <a:solidFill>
+              <a:srgbClr val="5B6B73"/>
+            </a:solidFill>
+            <a:prstDash val="solid"/>
+          </a:ln>
+        </p:spPr>
+      </p:sp>
+      <p:sp>
+        <p:nvSpPr>
+          <p:cNvPr id="57" name="Text 55"/>
+          <p:cNvSpPr/>
+          <p:nvPr/>
+        </p:nvSpPr>
+        <p:spPr>
+          <a:xfrm>
+            <a:off x="566928" y="2362882"/>
+            <a:ext cx="475488" cy="165194"/>
+          </a:xfrm>
+          <a:prstGeom prst="rect">
+            <a:avLst/>
+          </a:prstGeom>
+          <a:noFill/>
+          <a:ln/>
+        </p:spPr>
+        <p:txBody>
+          <a:bodyPr wrap="none" lIns="0" tIns="0" rIns="0" bIns="0" rtlCol="0" anchor="ctr"/>
+          <a:lstStyle/>
+          <a:p>
+            <a:pPr algn="r" indent="0" marL="0">
+              <a:buNone/>
+            </a:pPr>
+            <a:r>
+              <a:rPr lang="en-US" sz="700" b="1" dirty="0">
+                <a:solidFill>
+                  <a:srgbClr val="10161F"/>
+                </a:solidFill>
+                <a:latin typeface="맑은 고딕" pitchFamily="34" charset="0"/>
+                <a:ea typeface="맑은 고딕" pitchFamily="34" charset="-122"/>
+                <a:cs typeface="맑은 고딕" pitchFamily="34" charset="-120"/>
+              </a:rPr>
+              <a:t>21F</a:t>
+            </a:r>
+            <a:endParaRPr lang="en-US" sz="700" dirty="0"/>
+          </a:p>
+        </p:txBody>
+      </p:sp>
+      <p:sp>
+        <p:nvSpPr>
+          <p:cNvPr id="58" name="Shape 56"/>
+          <p:cNvSpPr/>
+          <p:nvPr/>
+        </p:nvSpPr>
+        <p:spPr>
+          <a:xfrm>
+            <a:off x="1115568" y="2394886"/>
+            <a:ext cx="1444752" cy="101186"/>
+          </a:xfrm>
+          <a:prstGeom prst="rect">
+            <a:avLst/>
+          </a:prstGeom>
+          <a:solidFill>
+            <a:srgbClr val="C5B4E3"/>
+          </a:solidFill>
+          <a:ln w="9525">
+            <a:solidFill>
+              <a:srgbClr val="5B6B73"/>
+            </a:solidFill>
+            <a:prstDash val="solid"/>
+          </a:ln>
+        </p:spPr>
+      </p:sp>
+      <p:sp>
+        <p:nvSpPr>
+          <p:cNvPr id="59" name="Text 57"/>
+          <p:cNvSpPr/>
+          <p:nvPr/>
+        </p:nvSpPr>
+        <p:spPr>
+          <a:xfrm>
+            <a:off x="566928" y="2197688"/>
+            <a:ext cx="475488" cy="165194"/>
+          </a:xfrm>
+          <a:prstGeom prst="rect">
+            <a:avLst/>
+          </a:prstGeom>
+          <a:noFill/>
+          <a:ln/>
+        </p:spPr>
+        <p:txBody>
+          <a:bodyPr wrap="none" lIns="0" tIns="0" rIns="0" bIns="0" rtlCol="0" anchor="ctr"/>
+          <a:lstStyle/>
+          <a:p>
+            <a:pPr algn="r" indent="0" marL="0">
+              <a:buNone/>
+            </a:pPr>
+            <a:r>
+              <a:rPr lang="en-US" sz="700" b="1" dirty="0">
+                <a:solidFill>
+                  <a:srgbClr val="10161F"/>
+                </a:solidFill>
+                <a:latin typeface="맑은 고딕" pitchFamily="34" charset="0"/>
+                <a:ea typeface="맑은 고딕" pitchFamily="34" charset="-122"/>
+                <a:cs typeface="맑은 고딕" pitchFamily="34" charset="-120"/>
+              </a:rPr>
+              <a:t>22F</a:t>
+            </a:r>
+            <a:endParaRPr lang="en-US" sz="700" dirty="0"/>
+          </a:p>
+        </p:txBody>
+      </p:sp>
+      <p:sp>
+        <p:nvSpPr>
+          <p:cNvPr id="60" name="Shape 58"/>
+          <p:cNvSpPr/>
+          <p:nvPr/>
+        </p:nvSpPr>
+        <p:spPr>
+          <a:xfrm>
+            <a:off x="1115568" y="2229692"/>
+            <a:ext cx="1444752" cy="101186"/>
+          </a:xfrm>
+          <a:prstGeom prst="rect">
+            <a:avLst/>
+          </a:prstGeom>
+          <a:solidFill>
+            <a:srgbClr val="C5B4E3"/>
+          </a:solidFill>
+          <a:ln w="9525">
+            <a:solidFill>
+              <a:srgbClr val="5B6B73"/>
+            </a:solidFill>
+            <a:prstDash val="solid"/>
+          </a:ln>
+        </p:spPr>
+      </p:sp>
+      <p:sp>
+        <p:nvSpPr>
+          <p:cNvPr id="61" name="Text 59"/>
+          <p:cNvSpPr/>
+          <p:nvPr/>
+        </p:nvSpPr>
+        <p:spPr>
+          <a:xfrm>
+            <a:off x="566928" y="2032495"/>
+            <a:ext cx="475488" cy="165194"/>
+          </a:xfrm>
+          <a:prstGeom prst="rect">
+            <a:avLst/>
+          </a:prstGeom>
+          <a:noFill/>
+          <a:ln/>
+        </p:spPr>
+        <p:txBody>
+          <a:bodyPr wrap="none" lIns="0" tIns="0" rIns="0" bIns="0" rtlCol="0" anchor="ctr"/>
+          <a:lstStyle/>
+          <a:p>
+            <a:pPr algn="r" indent="0" marL="0">
+              <a:buNone/>
+            </a:pPr>
+            <a:r>
+              <a:rPr lang="en-US" sz="700" b="1" dirty="0">
+                <a:solidFill>
+                  <a:srgbClr val="10161F"/>
+                </a:solidFill>
+                <a:latin typeface="맑은 고딕" pitchFamily="34" charset="0"/>
+                <a:ea typeface="맑은 고딕" pitchFamily="34" charset="-122"/>
+                <a:cs typeface="맑은 고딕" pitchFamily="34" charset="-120"/>
+              </a:rPr>
+              <a:t>23F</a:t>
+            </a:r>
+            <a:endParaRPr lang="en-US" sz="700" dirty="0"/>
+          </a:p>
+        </p:txBody>
+      </p:sp>
+      <p:sp>
+        <p:nvSpPr>
+          <p:cNvPr id="62" name="Shape 60"/>
+          <p:cNvSpPr/>
+          <p:nvPr/>
+        </p:nvSpPr>
+        <p:spPr>
+          <a:xfrm>
+            <a:off x="1115568" y="2064499"/>
+            <a:ext cx="1444752" cy="101186"/>
+          </a:xfrm>
+          <a:prstGeom prst="rect">
+            <a:avLst/>
+          </a:prstGeom>
+          <a:solidFill>
+            <a:srgbClr val="C5B4E3"/>
+          </a:solidFill>
+          <a:ln w="9525">
+            <a:solidFill>
+              <a:srgbClr val="5B6B73"/>
+            </a:solidFill>
+            <a:prstDash val="solid"/>
+          </a:ln>
+        </p:spPr>
+      </p:sp>
+      <p:sp>
+        <p:nvSpPr>
+          <p:cNvPr id="63" name="Text 61"/>
+          <p:cNvSpPr/>
+          <p:nvPr/>
+        </p:nvSpPr>
+        <p:spPr>
+          <a:xfrm>
+            <a:off x="566928" y="1867301"/>
+            <a:ext cx="475488" cy="165194"/>
+          </a:xfrm>
+          <a:prstGeom prst="rect">
+            <a:avLst/>
+          </a:prstGeom>
+          <a:noFill/>
+          <a:ln/>
+        </p:spPr>
+        <p:txBody>
+          <a:bodyPr wrap="none" lIns="0" tIns="0" rIns="0" bIns="0" rtlCol="0" anchor="ctr"/>
+          <a:lstStyle/>
+          <a:p>
+            <a:pPr algn="r" indent="0" marL="0">
+              <a:buNone/>
+            </a:pPr>
+            <a:r>
+              <a:rPr lang="en-US" sz="700" b="1" dirty="0">
+                <a:solidFill>
+                  <a:srgbClr val="10161F"/>
+                </a:solidFill>
+                <a:latin typeface="맑은 고딕" pitchFamily="34" charset="0"/>
+                <a:ea typeface="맑은 고딕" pitchFamily="34" charset="-122"/>
+                <a:cs typeface="맑은 고딕" pitchFamily="34" charset="-120"/>
+              </a:rPr>
+              <a:t>24F</a:t>
+            </a:r>
+            <a:endParaRPr lang="en-US" sz="700" dirty="0"/>
+          </a:p>
+        </p:txBody>
+      </p:sp>
+      <p:sp>
+        <p:nvSpPr>
+          <p:cNvPr id="64" name="Shape 62"/>
+          <p:cNvSpPr/>
+          <p:nvPr/>
+        </p:nvSpPr>
+        <p:spPr>
+          <a:xfrm>
+            <a:off x="1115568" y="1899305"/>
+            <a:ext cx="1444752" cy="101186"/>
+          </a:xfrm>
+          <a:prstGeom prst="rect">
+            <a:avLst/>
+          </a:prstGeom>
+          <a:solidFill>
+            <a:srgbClr val="C5B4E3"/>
+          </a:solidFill>
+          <a:ln w="9525">
+            <a:solidFill>
+              <a:srgbClr val="5B6B73"/>
+            </a:solidFill>
+            <a:prstDash val="solid"/>
+          </a:ln>
+        </p:spPr>
+      </p:sp>
+      <p:sp>
+        <p:nvSpPr>
+          <p:cNvPr id="65" name="Text 63"/>
+          <p:cNvSpPr/>
+          <p:nvPr/>
+        </p:nvSpPr>
+        <p:spPr>
+          <a:xfrm>
+            <a:off x="603504" y="5831947"/>
+            <a:ext cx="232664" cy="221381"/>
+          </a:xfrm>
+          <a:prstGeom prst="rect">
+            <a:avLst/>
+          </a:prstGeom>
+          <a:noFill/>
+          <a:ln/>
+        </p:spPr>
+        <p:txBody>
+          <a:bodyPr wrap="none" lIns="0" tIns="0" rIns="0" bIns="0" rtlCol="0" anchor="ctr"/>
+          <a:lstStyle/>
+          <a:p>
+            <a:pPr indent="0" marL="0">
+              <a:buNone/>
+            </a:pPr>
+            <a:r>
+              <a:rPr lang="en-US" sz="700" dirty="0">
+                <a:solidFill>
+                  <a:srgbClr val="5B6B73"/>
+                </a:solidFill>
+                <a:latin typeface="맑은 고딕" pitchFamily="34" charset="0"/>
+                <a:ea typeface="맑은 고딕" pitchFamily="34" charset="-122"/>
+                <a:cs typeface="맑은 고딕" pitchFamily="34" charset="-120"/>
+              </a:rPr>
+              <a:t>만기</a:t>
+            </a:r>
+            <a:endParaRPr lang="en-US" sz="700" dirty="0"/>
+          </a:p>
+        </p:txBody>
+      </p:sp>
+      <p:sp>
+        <p:nvSpPr>
+          <p:cNvPr id="66" name="Shape 64"/>
+          <p:cNvSpPr/>
+          <p:nvPr/>
+        </p:nvSpPr>
+        <p:spPr>
+          <a:xfrm>
+            <a:off x="872744" y="5887773"/>
+            <a:ext cx="118872" cy="109728"/>
+          </a:xfrm>
+          <a:prstGeom prst="rect">
+            <a:avLst/>
+          </a:prstGeom>
+          <a:solidFill>
+            <a:srgbClr val="C5B4E3"/>
+          </a:solidFill>
+          <a:ln w="6350">
+            <a:solidFill>
+              <a:srgbClr val="5B6B73"/>
+            </a:solidFill>
+            <a:prstDash val="solid"/>
+          </a:ln>
+        </p:spPr>
+      </p:sp>
+      <p:sp>
+        <p:nvSpPr>
+          <p:cNvPr id="67" name="Text 65"/>
+          <p:cNvSpPr/>
+          <p:nvPr/>
+        </p:nvSpPr>
+        <p:spPr>
+          <a:xfrm>
+            <a:off x="1028192" y="5831947"/>
+            <a:ext cx="250444" cy="221381"/>
+          </a:xfrm>
+          <a:prstGeom prst="rect">
+            <a:avLst/>
+          </a:prstGeom>
+          <a:noFill/>
+          <a:ln/>
+        </p:spPr>
+        <p:txBody>
+          <a:bodyPr wrap="none" lIns="0" tIns="0" rIns="0" bIns="0" rtlCol="0" anchor="ctr"/>
+          <a:lstStyle/>
+          <a:p>
+            <a:pPr indent="0" marL="0">
+              <a:buNone/>
+            </a:pPr>
+            <a:r>
+              <a:rPr lang="en-US" sz="700" dirty="0">
+                <a:solidFill>
+                  <a:srgbClr val="5B6B73"/>
+                </a:solidFill>
+                <a:latin typeface="맑은 고딕" pitchFamily="34" charset="0"/>
+                <a:ea typeface="맑은 고딕" pitchFamily="34" charset="-122"/>
+                <a:cs typeface="맑은 고딕" pitchFamily="34" charset="-120"/>
+              </a:rPr>
+              <a:t>2028</a:t>
+            </a:r>
+            <a:endParaRPr lang="en-US" sz="700" dirty="0"/>
           </a:p>
         </p:txBody>
       </p:sp>
@@ -1068,26 +3083,26 @@
           </p:nvPr>
         </p:nvGraphicFramePr>
         <p:xfrm>
-          <a:off x="3950208" y="1645920"/>
-          <a:ext cx="7674559" cy="914400"/>
+          <a:off x="2807208" y="1645920"/>
+          <a:ext cx="8817559" cy="914400"/>
         </p:xfrm>
         <a:graphic>
           <a:graphicData uri="http://schemas.openxmlformats.org/drawingml/2006/table">
             <a:tbl>
               <a:tblPr/>
               <a:tblGrid>
-                <a:gridCol w="438912"/>
-                <a:gridCol w="960120"/>
-                <a:gridCol w="804672"/>
-                <a:gridCol w="713232"/>
-                <a:gridCol w="713232"/>
-                <a:gridCol w="713232"/>
-                <a:gridCol w="713232"/>
-                <a:gridCol w="713232"/>
-                <a:gridCol w="713232"/>
-                <a:gridCol w="1188720"/>
+                <a:gridCol w="448056"/>
+                <a:gridCol w="2020824"/>
+                <a:gridCol w="585216"/>
+                <a:gridCol w="612648"/>
+                <a:gridCol w="612648"/>
+                <a:gridCol w="1078992"/>
+                <a:gridCol w="923544"/>
+                <a:gridCol w="868680"/>
+                <a:gridCol w="923544"/>
+                <a:gridCol w="740664"/>
               </a:tblGrid>
-              <a:tr h="243840">
+              <a:tr h="221381">
                 <a:tc>
                   <a:txBody>
                     <a:bodyPr/>
@@ -1097,14 +3112,14 @@
                         <a:buNone/>
                       </a:pPr>
                       <a:r>
-                        <a:rPr lang="en-US" sz="900" b="1" dirty="0">
+                        <a:rPr lang="en-US" sz="750" b="1" dirty="0">
                           <a:solidFill>
                             <a:srgbClr val="FFFFFF"/>
                           </a:solidFill>
                         </a:rPr>
                         <a:t>층</a:t>
                       </a:r>
-                      <a:endParaRPr lang="en-US" sz="900" dirty="0"/>
+                      <a:endParaRPr lang="en-US" sz="750" dirty="0"/>
                     </a:p>
                   </a:txBody>
                   <a:tcPr marL="50800" marR="50800" marT="25400" marB="25400" anchor="ctr">
@@ -1158,14 +3173,14 @@
                         <a:buNone/>
                       </a:pPr>
                       <a:r>
-                        <a:rPr lang="en-US" sz="900" b="1" dirty="0">
+                        <a:rPr lang="en-US" sz="750" b="1" dirty="0">
                           <a:solidFill>
                             <a:srgbClr val="FFFFFF"/>
                           </a:solidFill>
                         </a:rPr>
                         <a:t>임차인</a:t>
                       </a:r>
-                      <a:endParaRPr lang="en-US" sz="900" dirty="0"/>
+                      <a:endParaRPr lang="en-US" sz="750" dirty="0"/>
                     </a:p>
                   </a:txBody>
                   <a:tcPr marL="50800" marR="50800" marT="25400" marB="25400" anchor="ctr">
@@ -1219,14 +3234,14 @@
                         <a:buNone/>
                       </a:pPr>
                       <a:r>
-                        <a:rPr lang="en-US" sz="900" b="1" dirty="0">
+                        <a:rPr lang="en-US" sz="750" b="1" dirty="0">
                           <a:solidFill>
                             <a:srgbClr val="FFFFFF"/>
                           </a:solidFill>
                         </a:rPr>
                         <a:t>용도</a:t>
                       </a:r>
-                      <a:endParaRPr lang="en-US" sz="900" dirty="0"/>
+                      <a:endParaRPr lang="en-US" sz="750" dirty="0"/>
                     </a:p>
                   </a:txBody>
                   <a:tcPr marL="50800" marR="50800" marT="25400" marB="25400" anchor="ctr">
@@ -1280,14 +3295,14 @@
                         <a:buNone/>
                       </a:pPr>
                       <a:r>
-                        <a:rPr lang="en-US" sz="900" b="1" dirty="0">
+                        <a:rPr lang="en-US" sz="750" b="1" dirty="0">
                           <a:solidFill>
                             <a:srgbClr val="FFFFFF"/>
                           </a:solidFill>
                         </a:rPr>
                         <a:t>임대면적</a:t>
                       </a:r>
-                      <a:endParaRPr lang="en-US" sz="900" dirty="0"/>
+                      <a:endParaRPr lang="en-US" sz="750" dirty="0"/>
                     </a:p>
                   </a:txBody>
                   <a:tcPr marL="50800" marR="50800" marT="25400" marB="25400" anchor="ctr">
@@ -1341,14 +3356,14 @@
                         <a:buNone/>
                       </a:pPr>
                       <a:r>
-                        <a:rPr lang="en-US" sz="900" b="1" dirty="0">
+                        <a:rPr lang="en-US" sz="750" b="1" dirty="0">
                           <a:solidFill>
                             <a:srgbClr val="FFFFFF"/>
                           </a:solidFill>
                         </a:rPr>
                         <a:t>전용면적</a:t>
                       </a:r>
-                      <a:endParaRPr lang="en-US" sz="900" dirty="0"/>
+                      <a:endParaRPr lang="en-US" sz="750" dirty="0"/>
                     </a:p>
                   </a:txBody>
                   <a:tcPr marL="50800" marR="50800" marT="25400" marB="25400" anchor="ctr">
@@ -1402,14 +3417,14 @@
                         <a:buNone/>
                       </a:pPr>
                       <a:r>
-                        <a:rPr lang="en-US" sz="900" b="1" dirty="0">
+                        <a:rPr lang="en-US" sz="750" b="1" dirty="0">
                           <a:solidFill>
                             <a:srgbClr val="FFFFFF"/>
                           </a:solidFill>
                         </a:rPr>
                         <a:t>보증금</a:t>
                       </a:r>
-                      <a:endParaRPr lang="en-US" sz="900" dirty="0"/>
+                      <a:endParaRPr lang="en-US" sz="750" dirty="0"/>
                     </a:p>
                   </a:txBody>
                   <a:tcPr marL="50800" marR="50800" marT="25400" marB="25400" anchor="ctr">
@@ -1463,14 +3478,14 @@
                         <a:buNone/>
                       </a:pPr>
                       <a:r>
-                        <a:rPr lang="en-US" sz="900" b="1" dirty="0">
+                        <a:rPr lang="en-US" sz="750" b="1" dirty="0">
                           <a:solidFill>
                             <a:srgbClr val="FFFFFF"/>
                           </a:solidFill>
                         </a:rPr>
                         <a:t>월임대료</a:t>
                       </a:r>
-                      <a:endParaRPr lang="en-US" sz="900" dirty="0"/>
+                      <a:endParaRPr lang="en-US" sz="750" dirty="0"/>
                     </a:p>
                   </a:txBody>
                   <a:tcPr marL="50800" marR="50800" marT="25400" marB="25400" anchor="ctr">
@@ -1524,14 +3539,14 @@
                         <a:buNone/>
                       </a:pPr>
                       <a:r>
-                        <a:rPr lang="en-US" sz="900" b="1" dirty="0">
+                        <a:rPr lang="en-US" sz="750" b="1" dirty="0">
                           <a:solidFill>
                             <a:srgbClr val="FFFFFF"/>
                           </a:solidFill>
                         </a:rPr>
                         <a:t>관리비</a:t>
                       </a:r>
-                      <a:endParaRPr lang="en-US" sz="900" dirty="0"/>
+                      <a:endParaRPr lang="en-US" sz="750" dirty="0"/>
                     </a:p>
                   </a:txBody>
                   <a:tcPr marL="50800" marR="50800" marT="25400" marB="25400" anchor="ctr">
@@ -1585,14 +3600,14 @@
                         <a:buNone/>
                       </a:pPr>
                       <a:r>
-                        <a:rPr lang="en-US" sz="900" b="1" dirty="0">
+                        <a:rPr lang="en-US" sz="750" b="1" dirty="0">
                           <a:solidFill>
                             <a:srgbClr val="FFFFFF"/>
                           </a:solidFill>
                         </a:rPr>
                         <a:t>월합계</a:t>
                       </a:r>
-                      <a:endParaRPr lang="en-US" sz="900" dirty="0"/>
+                      <a:endParaRPr lang="en-US" sz="750" dirty="0"/>
                     </a:p>
                   </a:txBody>
                   <a:tcPr marL="50800" marR="50800" marT="25400" marB="25400" anchor="ctr">
@@ -1646,14 +3661,14 @@
                         <a:buNone/>
                       </a:pPr>
                       <a:r>
-                        <a:rPr lang="en-US" sz="900" b="1" dirty="0">
+                        <a:rPr lang="en-US" sz="750" b="1" dirty="0">
                           <a:solidFill>
                             <a:srgbClr val="FFFFFF"/>
                           </a:solidFill>
                         </a:rPr>
                         <a:t>만기일</a:t>
                       </a:r>
-                      <a:endParaRPr lang="en-US" sz="900" dirty="0"/>
+                      <a:endParaRPr lang="en-US" sz="750" dirty="0"/>
                     </a:p>
                   </a:txBody>
                   <a:tcPr marL="50800" marR="50800" marT="25400" marB="25400" anchor="ctr">
@@ -1699,7 +3714,7 @@
                   </a:tcPr>
                 </a:tc>
               </a:tr>
-              <a:tr h="243840">
+              <a:tr h="221381">
                 <a:tc>
                   <a:txBody>
                     <a:bodyPr/>
@@ -1709,7 +3724,7 @@
                         <a:buNone/>
                       </a:pPr>
                       <a:r>
-                        <a:rPr lang="en-US" sz="750" dirty="0">
+                        <a:rPr lang="en-US" sz="700" dirty="0">
                           <a:solidFill>
                             <a:srgbClr val="2B2B2B"/>
                           </a:solidFill>
@@ -1719,7 +3734,7 @@
                         </a:rPr>
                         <a:t>24F</a:t>
                       </a:r>
-                      <a:endParaRPr lang="en-US" sz="750" dirty="0">
+                      <a:endParaRPr lang="en-US" sz="700" dirty="0">
                         <a:latin typeface="맑은 고딕" charset="0"/>
                         <a:ea typeface="맑은 고딕" charset="0"/>
                         <a:cs typeface="맑은 고딕" charset="0"/>
@@ -1785,7 +3800,7 @@
                           <a:ea typeface="맑은 고딕" pitchFamily="34" charset="-122"/>
                           <a:cs typeface="맑은 고딕" pitchFamily="34" charset="-120"/>
                         </a:rPr>
-                        <a:t>한국글로벌자산운용…</a:t>
+                        <a:t>한국글로벌자산운용_24층_본사사업부</a:t>
                       </a:r>
                       <a:endParaRPr lang="en-US" sz="700" dirty="0">
                         <a:latin typeface="맑은 고딕" charset="0"/>
@@ -1845,7 +3860,7 @@
                         <a:buNone/>
                       </a:pPr>
                       <a:r>
-                        <a:rPr lang="en-US" sz="750" dirty="0">
+                        <a:rPr lang="en-US" sz="700" dirty="0">
                           <a:solidFill>
                             <a:srgbClr val="2B2B2B"/>
                           </a:solidFill>
@@ -1855,7 +3870,7 @@
                         </a:rPr>
                         <a:t>업무시설</a:t>
                       </a:r>
-                      <a:endParaRPr lang="en-US" sz="750" dirty="0">
+                      <a:endParaRPr lang="en-US" sz="700" dirty="0">
                         <a:latin typeface="맑은 고딕" charset="0"/>
                         <a:ea typeface="맑은 고딕" charset="0"/>
                         <a:cs typeface="맑은 고딕" charset="0"/>
@@ -1913,7 +3928,7 @@
                         <a:buNone/>
                       </a:pPr>
                       <a:r>
-                        <a:rPr lang="en-US" sz="750" dirty="0">
+                        <a:rPr lang="en-US" sz="700" dirty="0">
                           <a:solidFill>
                             <a:srgbClr val="2B2B2B"/>
                           </a:solidFill>
@@ -1923,7 +3938,7 @@
                         </a:rPr>
                         <a:t>1,250.5</a:t>
                       </a:r>
-                      <a:endParaRPr lang="en-US" sz="750" dirty="0">
+                      <a:endParaRPr lang="en-US" sz="700" dirty="0">
                         <a:latin typeface="맑은 고딕" charset="0"/>
                         <a:ea typeface="맑은 고딕" charset="0"/>
                         <a:cs typeface="맑은 고딕" charset="0"/>
@@ -1981,7 +3996,7 @@
                         <a:buNone/>
                       </a:pPr>
                       <a:r>
-                        <a:rPr lang="en-US" sz="750" dirty="0">
+                        <a:rPr lang="en-US" sz="700" dirty="0">
                           <a:solidFill>
                             <a:srgbClr val="2B2B2B"/>
                           </a:solidFill>
@@ -1991,7 +4006,7 @@
                         </a:rPr>
                         <a:t>750.3</a:t>
                       </a:r>
-                      <a:endParaRPr lang="en-US" sz="750" dirty="0">
+                      <a:endParaRPr lang="en-US" sz="700" dirty="0">
                         <a:latin typeface="맑은 고딕" charset="0"/>
                         <a:ea typeface="맑은 고딕" charset="0"/>
                         <a:cs typeface="맑은 고딕" charset="0"/>
@@ -2057,7 +4072,7 @@
                           <a:ea typeface="맑은 고딕" pitchFamily="34" charset="-122"/>
                           <a:cs typeface="맑은 고딕" pitchFamily="34" charset="-120"/>
                         </a:rPr>
-                        <a:t>150,000,000,…</a:t>
+                        <a:t>150,000,000,000</a:t>
                       </a:r>
                       <a:endParaRPr lang="en-US" sz="700" dirty="0">
                         <a:latin typeface="맑은 고딕" charset="0"/>
@@ -2185,7 +4200,7 @@
                         <a:buNone/>
                       </a:pPr>
                       <a:r>
-                        <a:rPr lang="en-US" sz="750" dirty="0">
+                        <a:rPr lang="en-US" sz="700" dirty="0">
                           <a:solidFill>
                             <a:srgbClr val="2B2B2B"/>
                           </a:solidFill>
@@ -2195,7 +4210,7 @@
                         </a:rPr>
                         <a:t>150,000,000</a:t>
                       </a:r>
-                      <a:endParaRPr lang="en-US" sz="750" dirty="0">
+                      <a:endParaRPr lang="en-US" sz="700" dirty="0">
                         <a:latin typeface="맑은 고딕" charset="0"/>
                         <a:ea typeface="맑은 고딕" charset="0"/>
                         <a:cs typeface="맑은 고딕" charset="0"/>
@@ -2321,7 +4336,7 @@
                         <a:buNone/>
                       </a:pPr>
                       <a:r>
-                        <a:rPr lang="en-US" sz="750" dirty="0">
+                        <a:rPr lang="en-US" sz="700" dirty="0">
                           <a:solidFill>
                             <a:srgbClr val="2B2B2B"/>
                           </a:solidFill>
@@ -2331,7 +4346,7 @@
                         </a:rPr>
                         <a:t>2028-12-31</a:t>
                       </a:r>
-                      <a:endParaRPr lang="en-US" sz="750" dirty="0">
+                      <a:endParaRPr lang="en-US" sz="700" dirty="0">
                         <a:latin typeface="맑은 고딕" charset="0"/>
                         <a:ea typeface="맑은 고딕" charset="0"/>
                         <a:cs typeface="맑은 고딕" charset="0"/>
@@ -2381,7 +4396,7 @@
                   </a:tcPr>
                 </a:tc>
               </a:tr>
-              <a:tr h="243840">
+              <a:tr h="221381">
                 <a:tc>
                   <a:txBody>
                     <a:bodyPr/>
@@ -2391,7 +4406,7 @@
                         <a:buNone/>
                       </a:pPr>
                       <a:r>
-                        <a:rPr lang="en-US" sz="750" dirty="0">
+                        <a:rPr lang="en-US" sz="700" dirty="0">
                           <a:solidFill>
                             <a:srgbClr val="2B2B2B"/>
                           </a:solidFill>
@@ -2401,7 +4416,7 @@
                         </a:rPr>
                         <a:t>23F</a:t>
                       </a:r>
-                      <a:endParaRPr lang="en-US" sz="750" dirty="0">
+                      <a:endParaRPr lang="en-US" sz="700" dirty="0">
                         <a:latin typeface="맑은 고딕" charset="0"/>
                         <a:ea typeface="맑은 고딕" charset="0"/>
                         <a:cs typeface="맑은 고딕" charset="0"/>
@@ -2467,7 +4482,7 @@
                           <a:ea typeface="맑은 고딕" pitchFamily="34" charset="-122"/>
                           <a:cs typeface="맑은 고딕" pitchFamily="34" charset="-120"/>
                         </a:rPr>
-                        <a:t>한국글로벌자산운용…</a:t>
+                        <a:t>한국글로벌자산운용_23층_본사사업부</a:t>
                       </a:r>
                       <a:endParaRPr lang="en-US" sz="700" dirty="0">
                         <a:latin typeface="맑은 고딕" charset="0"/>
@@ -2527,7 +4542,7 @@
                         <a:buNone/>
                       </a:pPr>
                       <a:r>
-                        <a:rPr lang="en-US" sz="750" dirty="0">
+                        <a:rPr lang="en-US" sz="700" dirty="0">
                           <a:solidFill>
                             <a:srgbClr val="2B2B2B"/>
                           </a:solidFill>
@@ -2537,7 +4552,7 @@
                         </a:rPr>
                         <a:t>업무시설</a:t>
                       </a:r>
-                      <a:endParaRPr lang="en-US" sz="750" dirty="0">
+                      <a:endParaRPr lang="en-US" sz="700" dirty="0">
                         <a:latin typeface="맑은 고딕" charset="0"/>
                         <a:ea typeface="맑은 고딕" charset="0"/>
                         <a:cs typeface="맑은 고딕" charset="0"/>
@@ -2595,7 +4610,7 @@
                         <a:buNone/>
                       </a:pPr>
                       <a:r>
-                        <a:rPr lang="en-US" sz="750" dirty="0">
+                        <a:rPr lang="en-US" sz="700" dirty="0">
                           <a:solidFill>
                             <a:srgbClr val="2B2B2B"/>
                           </a:solidFill>
@@ -2605,7 +4620,7 @@
                         </a:rPr>
                         <a:t>1,250.5</a:t>
                       </a:r>
-                      <a:endParaRPr lang="en-US" sz="750" dirty="0">
+                      <a:endParaRPr lang="en-US" sz="700" dirty="0">
                         <a:latin typeface="맑은 고딕" charset="0"/>
                         <a:ea typeface="맑은 고딕" charset="0"/>
                         <a:cs typeface="맑은 고딕" charset="0"/>
@@ -2663,7 +4678,7 @@
                         <a:buNone/>
                       </a:pPr>
                       <a:r>
-                        <a:rPr lang="en-US" sz="750" dirty="0">
+                        <a:rPr lang="en-US" sz="700" dirty="0">
                           <a:solidFill>
                             <a:srgbClr val="2B2B2B"/>
                           </a:solidFill>
@@ -2673,7 +4688,7 @@
                         </a:rPr>
                         <a:t>750.3</a:t>
                       </a:r>
-                      <a:endParaRPr lang="en-US" sz="750" dirty="0">
+                      <a:endParaRPr lang="en-US" sz="700" dirty="0">
                         <a:latin typeface="맑은 고딕" charset="0"/>
                         <a:ea typeface="맑은 고딕" charset="0"/>
                         <a:cs typeface="맑은 고딕" charset="0"/>
@@ -2739,7 +4754,7 @@
                           <a:ea typeface="맑은 고딕" pitchFamily="34" charset="-122"/>
                           <a:cs typeface="맑은 고딕" pitchFamily="34" charset="-120"/>
                         </a:rPr>
-                        <a:t>150,000,000,…</a:t>
+                        <a:t>150,000,000,000</a:t>
                       </a:r>
                       <a:endParaRPr lang="en-US" sz="700" dirty="0">
                         <a:latin typeface="맑은 고딕" charset="0"/>
@@ -2867,7 +4882,7 @@
                         <a:buNone/>
                       </a:pPr>
                       <a:r>
-                        <a:rPr lang="en-US" sz="750" dirty="0">
+                        <a:rPr lang="en-US" sz="700" dirty="0">
                           <a:solidFill>
                             <a:srgbClr val="2B2B2B"/>
                           </a:solidFill>
@@ -2877,7 +4892,7 @@
                         </a:rPr>
                         <a:t>150,000,000</a:t>
                       </a:r>
-                      <a:endParaRPr lang="en-US" sz="750" dirty="0">
+                      <a:endParaRPr lang="en-US" sz="700" dirty="0">
                         <a:latin typeface="맑은 고딕" charset="0"/>
                         <a:ea typeface="맑은 고딕" charset="0"/>
                         <a:cs typeface="맑은 고딕" charset="0"/>
@@ -3003,7 +5018,7 @@
                         <a:buNone/>
                       </a:pPr>
                       <a:r>
-                        <a:rPr lang="en-US" sz="750" dirty="0">
+                        <a:rPr lang="en-US" sz="700" dirty="0">
                           <a:solidFill>
                             <a:srgbClr val="2B2B2B"/>
                           </a:solidFill>
@@ -3013,7 +5028,7 @@
                         </a:rPr>
                         <a:t>2028-12-31</a:t>
                       </a:r>
-                      <a:endParaRPr lang="en-US" sz="750" dirty="0">
+                      <a:endParaRPr lang="en-US" sz="700" dirty="0">
                         <a:latin typeface="맑은 고딕" charset="0"/>
                         <a:ea typeface="맑은 고딕" charset="0"/>
                         <a:cs typeface="맑은 고딕" charset="0"/>
@@ -3063,7 +5078,7 @@
                   </a:tcPr>
                 </a:tc>
               </a:tr>
-              <a:tr h="243840">
+              <a:tr h="221381">
                 <a:tc>
                   <a:txBody>
                     <a:bodyPr/>
@@ -3073,7 +5088,7 @@
                         <a:buNone/>
                       </a:pPr>
                       <a:r>
-                        <a:rPr lang="en-US" sz="750" dirty="0">
+                        <a:rPr lang="en-US" sz="700" dirty="0">
                           <a:solidFill>
                             <a:srgbClr val="2B2B2B"/>
                           </a:solidFill>
@@ -3083,7 +5098,7 @@
                         </a:rPr>
                         <a:t>22F</a:t>
                       </a:r>
-                      <a:endParaRPr lang="en-US" sz="750" dirty="0">
+                      <a:endParaRPr lang="en-US" sz="700" dirty="0">
                         <a:latin typeface="맑은 고딕" charset="0"/>
                         <a:ea typeface="맑은 고딕" charset="0"/>
                         <a:cs typeface="맑은 고딕" charset="0"/>
@@ -3149,7 +5164,7 @@
                           <a:ea typeface="맑은 고딕" pitchFamily="34" charset="-122"/>
                           <a:cs typeface="맑은 고딕" pitchFamily="34" charset="-120"/>
                         </a:rPr>
-                        <a:t>한국글로벌자산운용…</a:t>
+                        <a:t>한국글로벌자산운용_22층_본사사업부</a:t>
                       </a:r>
                       <a:endParaRPr lang="en-US" sz="700" dirty="0">
                         <a:latin typeface="맑은 고딕" charset="0"/>
@@ -3209,7 +5224,7 @@
                         <a:buNone/>
                       </a:pPr>
                       <a:r>
-                        <a:rPr lang="en-US" sz="750" dirty="0">
+                        <a:rPr lang="en-US" sz="700" dirty="0">
                           <a:solidFill>
                             <a:srgbClr val="2B2B2B"/>
                           </a:solidFill>
@@ -3219,7 +5234,7 @@
                         </a:rPr>
                         <a:t>업무시설</a:t>
                       </a:r>
-                      <a:endParaRPr lang="en-US" sz="750" dirty="0">
+                      <a:endParaRPr lang="en-US" sz="700" dirty="0">
                         <a:latin typeface="맑은 고딕" charset="0"/>
                         <a:ea typeface="맑은 고딕" charset="0"/>
                         <a:cs typeface="맑은 고딕" charset="0"/>
@@ -3277,7 +5292,7 @@
                         <a:buNone/>
                       </a:pPr>
                       <a:r>
-                        <a:rPr lang="en-US" sz="750" dirty="0">
+                        <a:rPr lang="en-US" sz="700" dirty="0">
                           <a:solidFill>
                             <a:srgbClr val="2B2B2B"/>
                           </a:solidFill>
@@ -3287,7 +5302,7 @@
                         </a:rPr>
                         <a:t>1,250.5</a:t>
                       </a:r>
-                      <a:endParaRPr lang="en-US" sz="750" dirty="0">
+                      <a:endParaRPr lang="en-US" sz="700" dirty="0">
                         <a:latin typeface="맑은 고딕" charset="0"/>
                         <a:ea typeface="맑은 고딕" charset="0"/>
                         <a:cs typeface="맑은 고딕" charset="0"/>
@@ -3345,7 +5360,7 @@
                         <a:buNone/>
                       </a:pPr>
                       <a:r>
-                        <a:rPr lang="en-US" sz="750" dirty="0">
+                        <a:rPr lang="en-US" sz="700" dirty="0">
                           <a:solidFill>
                             <a:srgbClr val="2B2B2B"/>
                           </a:solidFill>
@@ -3355,7 +5370,7 @@
                         </a:rPr>
                         <a:t>750.3</a:t>
                       </a:r>
-                      <a:endParaRPr lang="en-US" sz="750" dirty="0">
+                      <a:endParaRPr lang="en-US" sz="700" dirty="0">
                         <a:latin typeface="맑은 고딕" charset="0"/>
                         <a:ea typeface="맑은 고딕" charset="0"/>
                         <a:cs typeface="맑은 고딕" charset="0"/>
@@ -3421,7 +5436,7 @@
                           <a:ea typeface="맑은 고딕" pitchFamily="34" charset="-122"/>
                           <a:cs typeface="맑은 고딕" pitchFamily="34" charset="-120"/>
                         </a:rPr>
-                        <a:t>150,000,000,…</a:t>
+                        <a:t>150,000,000,000</a:t>
                       </a:r>
                       <a:endParaRPr lang="en-US" sz="700" dirty="0">
                         <a:latin typeface="맑은 고딕" charset="0"/>
@@ -3549,7 +5564,7 @@
                         <a:buNone/>
                       </a:pPr>
                       <a:r>
-                        <a:rPr lang="en-US" sz="750" dirty="0">
+                        <a:rPr lang="en-US" sz="700" dirty="0">
                           <a:solidFill>
                             <a:srgbClr val="2B2B2B"/>
                           </a:solidFill>
@@ -3559,7 +5574,7 @@
                         </a:rPr>
                         <a:t>150,000,000</a:t>
                       </a:r>
-                      <a:endParaRPr lang="en-US" sz="750" dirty="0">
+                      <a:endParaRPr lang="en-US" sz="700" dirty="0">
                         <a:latin typeface="맑은 고딕" charset="0"/>
                         <a:ea typeface="맑은 고딕" charset="0"/>
                         <a:cs typeface="맑은 고딕" charset="0"/>
@@ -3685,7 +5700,7 @@
                         <a:buNone/>
                       </a:pPr>
                       <a:r>
-                        <a:rPr lang="en-US" sz="750" dirty="0">
+                        <a:rPr lang="en-US" sz="700" dirty="0">
                           <a:solidFill>
                             <a:srgbClr val="2B2B2B"/>
                           </a:solidFill>
@@ -3695,7 +5710,7 @@
                         </a:rPr>
                         <a:t>2028-12-31</a:t>
                       </a:r>
-                      <a:endParaRPr lang="en-US" sz="750" dirty="0">
+                      <a:endParaRPr lang="en-US" sz="700" dirty="0">
                         <a:latin typeface="맑은 고딕" charset="0"/>
                         <a:ea typeface="맑은 고딕" charset="0"/>
                         <a:cs typeface="맑은 고딕" charset="0"/>
@@ -3745,7 +5760,7 @@
                   </a:tcPr>
                 </a:tc>
               </a:tr>
-              <a:tr h="243840">
+              <a:tr h="221381">
                 <a:tc>
                   <a:txBody>
                     <a:bodyPr/>
@@ -3755,7 +5770,7 @@
                         <a:buNone/>
                       </a:pPr>
                       <a:r>
-                        <a:rPr lang="en-US" sz="750" dirty="0">
+                        <a:rPr lang="en-US" sz="700" dirty="0">
                           <a:solidFill>
                             <a:srgbClr val="2B2B2B"/>
                           </a:solidFill>
@@ -3765,7 +5780,7 @@
                         </a:rPr>
                         <a:t>21F</a:t>
                       </a:r>
-                      <a:endParaRPr lang="en-US" sz="750" dirty="0">
+                      <a:endParaRPr lang="en-US" sz="700" dirty="0">
                         <a:latin typeface="맑은 고딕" charset="0"/>
                         <a:ea typeface="맑은 고딕" charset="0"/>
                         <a:cs typeface="맑은 고딕" charset="0"/>
@@ -3831,7 +5846,7 @@
                           <a:ea typeface="맑은 고딕" pitchFamily="34" charset="-122"/>
                           <a:cs typeface="맑은 고딕" pitchFamily="34" charset="-120"/>
                         </a:rPr>
-                        <a:t>한국글로벌자산운용…</a:t>
+                        <a:t>한국글로벌자산운용_21층_본사사업부</a:t>
                       </a:r>
                       <a:endParaRPr lang="en-US" sz="700" dirty="0">
                         <a:latin typeface="맑은 고딕" charset="0"/>
@@ -3891,7 +5906,7 @@
                         <a:buNone/>
                       </a:pPr>
                       <a:r>
-                        <a:rPr lang="en-US" sz="750" dirty="0">
+                        <a:rPr lang="en-US" sz="700" dirty="0">
                           <a:solidFill>
                             <a:srgbClr val="2B2B2B"/>
                           </a:solidFill>
@@ -3901,7 +5916,7 @@
                         </a:rPr>
                         <a:t>업무시설</a:t>
                       </a:r>
-                      <a:endParaRPr lang="en-US" sz="750" dirty="0">
+                      <a:endParaRPr lang="en-US" sz="700" dirty="0">
                         <a:latin typeface="맑은 고딕" charset="0"/>
                         <a:ea typeface="맑은 고딕" charset="0"/>
                         <a:cs typeface="맑은 고딕" charset="0"/>
@@ -3959,7 +5974,7 @@
                         <a:buNone/>
                       </a:pPr>
                       <a:r>
-                        <a:rPr lang="en-US" sz="750" dirty="0">
+                        <a:rPr lang="en-US" sz="700" dirty="0">
                           <a:solidFill>
                             <a:srgbClr val="2B2B2B"/>
                           </a:solidFill>
@@ -3969,7 +5984,7 @@
                         </a:rPr>
                         <a:t>1,250.5</a:t>
                       </a:r>
-                      <a:endParaRPr lang="en-US" sz="750" dirty="0">
+                      <a:endParaRPr lang="en-US" sz="700" dirty="0">
                         <a:latin typeface="맑은 고딕" charset="0"/>
                         <a:ea typeface="맑은 고딕" charset="0"/>
                         <a:cs typeface="맑은 고딕" charset="0"/>
@@ -4027,7 +6042,7 @@
                         <a:buNone/>
                       </a:pPr>
                       <a:r>
-                        <a:rPr lang="en-US" sz="750" dirty="0">
+                        <a:rPr lang="en-US" sz="700" dirty="0">
                           <a:solidFill>
                             <a:srgbClr val="2B2B2B"/>
                           </a:solidFill>
@@ -4037,7 +6052,7 @@
                         </a:rPr>
                         <a:t>750.3</a:t>
                       </a:r>
-                      <a:endParaRPr lang="en-US" sz="750" dirty="0">
+                      <a:endParaRPr lang="en-US" sz="700" dirty="0">
                         <a:latin typeface="맑은 고딕" charset="0"/>
                         <a:ea typeface="맑은 고딕" charset="0"/>
                         <a:cs typeface="맑은 고딕" charset="0"/>
@@ -4103,7 +6118,7 @@
                           <a:ea typeface="맑은 고딕" pitchFamily="34" charset="-122"/>
                           <a:cs typeface="맑은 고딕" pitchFamily="34" charset="-120"/>
                         </a:rPr>
-                        <a:t>150,000,000,…</a:t>
+                        <a:t>150,000,000,000</a:t>
                       </a:r>
                       <a:endParaRPr lang="en-US" sz="700" dirty="0">
                         <a:latin typeface="맑은 고딕" charset="0"/>
@@ -4231,7 +6246,7 @@
                         <a:buNone/>
                       </a:pPr>
                       <a:r>
-                        <a:rPr lang="en-US" sz="750" dirty="0">
+                        <a:rPr lang="en-US" sz="700" dirty="0">
                           <a:solidFill>
                             <a:srgbClr val="2B2B2B"/>
                           </a:solidFill>
@@ -4241,7 +6256,7 @@
                         </a:rPr>
                         <a:t>150,000,000</a:t>
                       </a:r>
-                      <a:endParaRPr lang="en-US" sz="750" dirty="0">
+                      <a:endParaRPr lang="en-US" sz="700" dirty="0">
                         <a:latin typeface="맑은 고딕" charset="0"/>
                         <a:ea typeface="맑은 고딕" charset="0"/>
                         <a:cs typeface="맑은 고딕" charset="0"/>
@@ -4367,7 +6382,7 @@
                         <a:buNone/>
                       </a:pPr>
                       <a:r>
-                        <a:rPr lang="en-US" sz="750" dirty="0">
+                        <a:rPr lang="en-US" sz="700" dirty="0">
                           <a:solidFill>
                             <a:srgbClr val="2B2B2B"/>
                           </a:solidFill>
@@ -4377,7 +6392,7 @@
                         </a:rPr>
                         <a:t>2028-12-31</a:t>
                       </a:r>
-                      <a:endParaRPr lang="en-US" sz="750" dirty="0">
+                      <a:endParaRPr lang="en-US" sz="700" dirty="0">
                         <a:latin typeface="맑은 고딕" charset="0"/>
                         <a:ea typeface="맑은 고딕" charset="0"/>
                         <a:cs typeface="맑은 고딕" charset="0"/>
@@ -4427,7 +6442,7 @@
                   </a:tcPr>
                 </a:tc>
               </a:tr>
-              <a:tr h="243840">
+              <a:tr h="221381">
                 <a:tc>
                   <a:txBody>
                     <a:bodyPr/>
@@ -4437,7 +6452,7 @@
                         <a:buNone/>
                       </a:pPr>
                       <a:r>
-                        <a:rPr lang="en-US" sz="750" dirty="0">
+                        <a:rPr lang="en-US" sz="700" dirty="0">
                           <a:solidFill>
                             <a:srgbClr val="2B2B2B"/>
                           </a:solidFill>
@@ -4447,7 +6462,7 @@
                         </a:rPr>
                         <a:t>20F</a:t>
                       </a:r>
-                      <a:endParaRPr lang="en-US" sz="750" dirty="0">
+                      <a:endParaRPr lang="en-US" sz="700" dirty="0">
                         <a:latin typeface="맑은 고딕" charset="0"/>
                         <a:ea typeface="맑은 고딕" charset="0"/>
                         <a:cs typeface="맑은 고딕" charset="0"/>
@@ -4513,7 +6528,7 @@
                           <a:ea typeface="맑은 고딕" pitchFamily="34" charset="-122"/>
                           <a:cs typeface="맑은 고딕" pitchFamily="34" charset="-120"/>
                         </a:rPr>
-                        <a:t>한국글로벌자산운용…</a:t>
+                        <a:t>한국글로벌자산운용_20층_본사사업부</a:t>
                       </a:r>
                       <a:endParaRPr lang="en-US" sz="700" dirty="0">
                         <a:latin typeface="맑은 고딕" charset="0"/>
@@ -4573,7 +6588,7 @@
                         <a:buNone/>
                       </a:pPr>
                       <a:r>
-                        <a:rPr lang="en-US" sz="750" dirty="0">
+                        <a:rPr lang="en-US" sz="700" dirty="0">
                           <a:solidFill>
                             <a:srgbClr val="2B2B2B"/>
                           </a:solidFill>
@@ -4583,7 +6598,7 @@
                         </a:rPr>
                         <a:t>업무시설</a:t>
                       </a:r>
-                      <a:endParaRPr lang="en-US" sz="750" dirty="0">
+                      <a:endParaRPr lang="en-US" sz="700" dirty="0">
                         <a:latin typeface="맑은 고딕" charset="0"/>
                         <a:ea typeface="맑은 고딕" charset="0"/>
                         <a:cs typeface="맑은 고딕" charset="0"/>
@@ -4641,7 +6656,7 @@
                         <a:buNone/>
                       </a:pPr>
                       <a:r>
-                        <a:rPr lang="en-US" sz="750" dirty="0">
+                        <a:rPr lang="en-US" sz="700" dirty="0">
                           <a:solidFill>
                             <a:srgbClr val="2B2B2B"/>
                           </a:solidFill>
@@ -4651,7 +6666,7 @@
                         </a:rPr>
                         <a:t>1,250.5</a:t>
                       </a:r>
-                      <a:endParaRPr lang="en-US" sz="750" dirty="0">
+                      <a:endParaRPr lang="en-US" sz="700" dirty="0">
                         <a:latin typeface="맑은 고딕" charset="0"/>
                         <a:ea typeface="맑은 고딕" charset="0"/>
                         <a:cs typeface="맑은 고딕" charset="0"/>
@@ -4709,7 +6724,7 @@
                         <a:buNone/>
                       </a:pPr>
                       <a:r>
-                        <a:rPr lang="en-US" sz="750" dirty="0">
+                        <a:rPr lang="en-US" sz="700" dirty="0">
                           <a:solidFill>
                             <a:srgbClr val="2B2B2B"/>
                           </a:solidFill>
@@ -4719,7 +6734,7 @@
                         </a:rPr>
                         <a:t>750.3</a:t>
                       </a:r>
-                      <a:endParaRPr lang="en-US" sz="750" dirty="0">
+                      <a:endParaRPr lang="en-US" sz="700" dirty="0">
                         <a:latin typeface="맑은 고딕" charset="0"/>
                         <a:ea typeface="맑은 고딕" charset="0"/>
                         <a:cs typeface="맑은 고딕" charset="0"/>
@@ -4785,7 +6800,7 @@
                           <a:ea typeface="맑은 고딕" pitchFamily="34" charset="-122"/>
                           <a:cs typeface="맑은 고딕" pitchFamily="34" charset="-120"/>
                         </a:rPr>
-                        <a:t>150,000,000,…</a:t>
+                        <a:t>150,000,000,000</a:t>
                       </a:r>
                       <a:endParaRPr lang="en-US" sz="700" dirty="0">
                         <a:latin typeface="맑은 고딕" charset="0"/>
@@ -4913,7 +6928,7 @@
                         <a:buNone/>
                       </a:pPr>
                       <a:r>
-                        <a:rPr lang="en-US" sz="750" dirty="0">
+                        <a:rPr lang="en-US" sz="700" dirty="0">
                           <a:solidFill>
                             <a:srgbClr val="2B2B2B"/>
                           </a:solidFill>
@@ -4923,7 +6938,7 @@
                         </a:rPr>
                         <a:t>150,000,000</a:t>
                       </a:r>
-                      <a:endParaRPr lang="en-US" sz="750" dirty="0">
+                      <a:endParaRPr lang="en-US" sz="700" dirty="0">
                         <a:latin typeface="맑은 고딕" charset="0"/>
                         <a:ea typeface="맑은 고딕" charset="0"/>
                         <a:cs typeface="맑은 고딕" charset="0"/>
@@ -5049,7 +7064,7 @@
                         <a:buNone/>
                       </a:pPr>
                       <a:r>
-                        <a:rPr lang="en-US" sz="750" dirty="0">
+                        <a:rPr lang="en-US" sz="700" dirty="0">
                           <a:solidFill>
                             <a:srgbClr val="2B2B2B"/>
                           </a:solidFill>
@@ -5059,7 +7074,7 @@
                         </a:rPr>
                         <a:t>2028-12-31</a:t>
                       </a:r>
-                      <a:endParaRPr lang="en-US" sz="750" dirty="0">
+                      <a:endParaRPr lang="en-US" sz="700" dirty="0">
                         <a:latin typeface="맑은 고딕" charset="0"/>
                         <a:ea typeface="맑은 고딕" charset="0"/>
                         <a:cs typeface="맑은 고딕" charset="0"/>
@@ -5109,7 +7124,7 @@
                   </a:tcPr>
                 </a:tc>
               </a:tr>
-              <a:tr h="243840">
+              <a:tr h="221381">
                 <a:tc>
                   <a:txBody>
                     <a:bodyPr/>
@@ -5119,7 +7134,7 @@
                         <a:buNone/>
                       </a:pPr>
                       <a:r>
-                        <a:rPr lang="en-US" sz="750" dirty="0">
+                        <a:rPr lang="en-US" sz="700" dirty="0">
                           <a:solidFill>
                             <a:srgbClr val="2B2B2B"/>
                           </a:solidFill>
@@ -5129,7 +7144,7 @@
                         </a:rPr>
                         <a:t>19F</a:t>
                       </a:r>
-                      <a:endParaRPr lang="en-US" sz="750" dirty="0">
+                      <a:endParaRPr lang="en-US" sz="700" dirty="0">
                         <a:latin typeface="맑은 고딕" charset="0"/>
                         <a:ea typeface="맑은 고딕" charset="0"/>
                         <a:cs typeface="맑은 고딕" charset="0"/>
@@ -5195,7 +7210,7 @@
                           <a:ea typeface="맑은 고딕" pitchFamily="34" charset="-122"/>
                           <a:cs typeface="맑은 고딕" pitchFamily="34" charset="-120"/>
                         </a:rPr>
-                        <a:t>한국글로벌자산운용…</a:t>
+                        <a:t>한국글로벌자산운용_19층_본사사업부</a:t>
                       </a:r>
                       <a:endParaRPr lang="en-US" sz="700" dirty="0">
                         <a:latin typeface="맑은 고딕" charset="0"/>
@@ -5255,7 +7270,7 @@
                         <a:buNone/>
                       </a:pPr>
                       <a:r>
-                        <a:rPr lang="en-US" sz="750" dirty="0">
+                        <a:rPr lang="en-US" sz="700" dirty="0">
                           <a:solidFill>
                             <a:srgbClr val="2B2B2B"/>
                           </a:solidFill>
@@ -5265,7 +7280,7 @@
                         </a:rPr>
                         <a:t>업무시설</a:t>
                       </a:r>
-                      <a:endParaRPr lang="en-US" sz="750" dirty="0">
+                      <a:endParaRPr lang="en-US" sz="700" dirty="0">
                         <a:latin typeface="맑은 고딕" charset="0"/>
                         <a:ea typeface="맑은 고딕" charset="0"/>
                         <a:cs typeface="맑은 고딕" charset="0"/>
@@ -5323,7 +7338,7 @@
                         <a:buNone/>
                       </a:pPr>
                       <a:r>
-                        <a:rPr lang="en-US" sz="750" dirty="0">
+                        <a:rPr lang="en-US" sz="700" dirty="0">
                           <a:solidFill>
                             <a:srgbClr val="2B2B2B"/>
                           </a:solidFill>
@@ -5333,7 +7348,7 @@
                         </a:rPr>
                         <a:t>1,250.5</a:t>
                       </a:r>
-                      <a:endParaRPr lang="en-US" sz="750" dirty="0">
+                      <a:endParaRPr lang="en-US" sz="700" dirty="0">
                         <a:latin typeface="맑은 고딕" charset="0"/>
                         <a:ea typeface="맑은 고딕" charset="0"/>
                         <a:cs typeface="맑은 고딕" charset="0"/>
@@ -5391,7 +7406,7 @@
                         <a:buNone/>
                       </a:pPr>
                       <a:r>
-                        <a:rPr lang="en-US" sz="750" dirty="0">
+                        <a:rPr lang="en-US" sz="700" dirty="0">
                           <a:solidFill>
                             <a:srgbClr val="2B2B2B"/>
                           </a:solidFill>
@@ -5401,7 +7416,7 @@
                         </a:rPr>
                         <a:t>750.3</a:t>
                       </a:r>
-                      <a:endParaRPr lang="en-US" sz="750" dirty="0">
+                      <a:endParaRPr lang="en-US" sz="700" dirty="0">
                         <a:latin typeface="맑은 고딕" charset="0"/>
                         <a:ea typeface="맑은 고딕" charset="0"/>
                         <a:cs typeface="맑은 고딕" charset="0"/>
@@ -5467,7 +7482,7 @@
                           <a:ea typeface="맑은 고딕" pitchFamily="34" charset="-122"/>
                           <a:cs typeface="맑은 고딕" pitchFamily="34" charset="-120"/>
                         </a:rPr>
-                        <a:t>150,000,000,…</a:t>
+                        <a:t>150,000,000,000</a:t>
                       </a:r>
                       <a:endParaRPr lang="en-US" sz="700" dirty="0">
                         <a:latin typeface="맑은 고딕" charset="0"/>
@@ -5595,7 +7610,7 @@
                         <a:buNone/>
                       </a:pPr>
                       <a:r>
-                        <a:rPr lang="en-US" sz="750" dirty="0">
+                        <a:rPr lang="en-US" sz="700" dirty="0">
                           <a:solidFill>
                             <a:srgbClr val="2B2B2B"/>
                           </a:solidFill>
@@ -5605,7 +7620,7 @@
                         </a:rPr>
                         <a:t>150,000,000</a:t>
                       </a:r>
-                      <a:endParaRPr lang="en-US" sz="750" dirty="0">
+                      <a:endParaRPr lang="en-US" sz="700" dirty="0">
                         <a:latin typeface="맑은 고딕" charset="0"/>
                         <a:ea typeface="맑은 고딕" charset="0"/>
                         <a:cs typeface="맑은 고딕" charset="0"/>
@@ -5731,7 +7746,7 @@
                         <a:buNone/>
                       </a:pPr>
                       <a:r>
-                        <a:rPr lang="en-US" sz="750" dirty="0">
+                        <a:rPr lang="en-US" sz="700" dirty="0">
                           <a:solidFill>
                             <a:srgbClr val="2B2B2B"/>
                           </a:solidFill>
@@ -5741,7 +7756,7 @@
                         </a:rPr>
                         <a:t>2028-12-31</a:t>
                       </a:r>
-                      <a:endParaRPr lang="en-US" sz="750" dirty="0">
+                      <a:endParaRPr lang="en-US" sz="700" dirty="0">
                         <a:latin typeface="맑은 고딕" charset="0"/>
                         <a:ea typeface="맑은 고딕" charset="0"/>
                         <a:cs typeface="맑은 고딕" charset="0"/>
@@ -5791,7 +7806,7 @@
                   </a:tcPr>
                 </a:tc>
               </a:tr>
-              <a:tr h="243840">
+              <a:tr h="221381">
                 <a:tc>
                   <a:txBody>
                     <a:bodyPr/>
@@ -5801,7 +7816,7 @@
                         <a:buNone/>
                       </a:pPr>
                       <a:r>
-                        <a:rPr lang="en-US" sz="750" dirty="0">
+                        <a:rPr lang="en-US" sz="700" dirty="0">
                           <a:solidFill>
                             <a:srgbClr val="2B2B2B"/>
                           </a:solidFill>
@@ -5811,7 +7826,7 @@
                         </a:rPr>
                         <a:t>18F</a:t>
                       </a:r>
-                      <a:endParaRPr lang="en-US" sz="750" dirty="0">
+                      <a:endParaRPr lang="en-US" sz="700" dirty="0">
                         <a:latin typeface="맑은 고딕" charset="0"/>
                         <a:ea typeface="맑은 고딕" charset="0"/>
                         <a:cs typeface="맑은 고딕" charset="0"/>
@@ -5877,7 +7892,7 @@
                           <a:ea typeface="맑은 고딕" pitchFamily="34" charset="-122"/>
                           <a:cs typeface="맑은 고딕" pitchFamily="34" charset="-120"/>
                         </a:rPr>
-                        <a:t>한국글로벌자산운용…</a:t>
+                        <a:t>한국글로벌자산운용_18층_본사사업부</a:t>
                       </a:r>
                       <a:endParaRPr lang="en-US" sz="700" dirty="0">
                         <a:latin typeface="맑은 고딕" charset="0"/>
@@ -5937,7 +7952,7 @@
                         <a:buNone/>
                       </a:pPr>
                       <a:r>
-                        <a:rPr lang="en-US" sz="750" dirty="0">
+                        <a:rPr lang="en-US" sz="700" dirty="0">
                           <a:solidFill>
                             <a:srgbClr val="2B2B2B"/>
                           </a:solidFill>
@@ -5947,7 +7962,7 @@
                         </a:rPr>
                         <a:t>업무시설</a:t>
                       </a:r>
-                      <a:endParaRPr lang="en-US" sz="750" dirty="0">
+                      <a:endParaRPr lang="en-US" sz="700" dirty="0">
                         <a:latin typeface="맑은 고딕" charset="0"/>
                         <a:ea typeface="맑은 고딕" charset="0"/>
                         <a:cs typeface="맑은 고딕" charset="0"/>
@@ -6005,7 +8020,7 @@
                         <a:buNone/>
                       </a:pPr>
                       <a:r>
-                        <a:rPr lang="en-US" sz="750" dirty="0">
+                        <a:rPr lang="en-US" sz="700" dirty="0">
                           <a:solidFill>
                             <a:srgbClr val="2B2B2B"/>
                           </a:solidFill>
@@ -6015,7 +8030,7 @@
                         </a:rPr>
                         <a:t>1,250.5</a:t>
                       </a:r>
-                      <a:endParaRPr lang="en-US" sz="750" dirty="0">
+                      <a:endParaRPr lang="en-US" sz="700" dirty="0">
                         <a:latin typeface="맑은 고딕" charset="0"/>
                         <a:ea typeface="맑은 고딕" charset="0"/>
                         <a:cs typeface="맑은 고딕" charset="0"/>
@@ -6073,7 +8088,7 @@
                         <a:buNone/>
                       </a:pPr>
                       <a:r>
-                        <a:rPr lang="en-US" sz="750" dirty="0">
+                        <a:rPr lang="en-US" sz="700" dirty="0">
                           <a:solidFill>
                             <a:srgbClr val="2B2B2B"/>
                           </a:solidFill>
@@ -6083,7 +8098,7 @@
                         </a:rPr>
                         <a:t>750.3</a:t>
                       </a:r>
-                      <a:endParaRPr lang="en-US" sz="750" dirty="0">
+                      <a:endParaRPr lang="en-US" sz="700" dirty="0">
                         <a:latin typeface="맑은 고딕" charset="0"/>
                         <a:ea typeface="맑은 고딕" charset="0"/>
                         <a:cs typeface="맑은 고딕" charset="0"/>
@@ -6149,7 +8164,7 @@
                           <a:ea typeface="맑은 고딕" pitchFamily="34" charset="-122"/>
                           <a:cs typeface="맑은 고딕" pitchFamily="34" charset="-120"/>
                         </a:rPr>
-                        <a:t>150,000,000,…</a:t>
+                        <a:t>150,000,000,000</a:t>
                       </a:r>
                       <a:endParaRPr lang="en-US" sz="700" dirty="0">
                         <a:latin typeface="맑은 고딕" charset="0"/>
@@ -6277,7 +8292,7 @@
                         <a:buNone/>
                       </a:pPr>
                       <a:r>
-                        <a:rPr lang="en-US" sz="750" dirty="0">
+                        <a:rPr lang="en-US" sz="700" dirty="0">
                           <a:solidFill>
                             <a:srgbClr val="2B2B2B"/>
                           </a:solidFill>
@@ -6287,7 +8302,7 @@
                         </a:rPr>
                         <a:t>150,000,000</a:t>
                       </a:r>
-                      <a:endParaRPr lang="en-US" sz="750" dirty="0">
+                      <a:endParaRPr lang="en-US" sz="700" dirty="0">
                         <a:latin typeface="맑은 고딕" charset="0"/>
                         <a:ea typeface="맑은 고딕" charset="0"/>
                         <a:cs typeface="맑은 고딕" charset="0"/>
@@ -6413,7 +8428,7 @@
                         <a:buNone/>
                       </a:pPr>
                       <a:r>
-                        <a:rPr lang="en-US" sz="750" dirty="0">
+                        <a:rPr lang="en-US" sz="700" dirty="0">
                           <a:solidFill>
                             <a:srgbClr val="2B2B2B"/>
                           </a:solidFill>
@@ -6423,7 +8438,7 @@
                         </a:rPr>
                         <a:t>2028-12-31</a:t>
                       </a:r>
-                      <a:endParaRPr lang="en-US" sz="750" dirty="0">
+                      <a:endParaRPr lang="en-US" sz="700" dirty="0">
                         <a:latin typeface="맑은 고딕" charset="0"/>
                         <a:ea typeface="맑은 고딕" charset="0"/>
                         <a:cs typeface="맑은 고딕" charset="0"/>
@@ -6473,7 +8488,7 @@
                   </a:tcPr>
                 </a:tc>
               </a:tr>
-              <a:tr h="243840">
+              <a:tr h="221381">
                 <a:tc>
                   <a:txBody>
                     <a:bodyPr/>
@@ -6483,7 +8498,7 @@
                         <a:buNone/>
                       </a:pPr>
                       <a:r>
-                        <a:rPr lang="en-US" sz="750" dirty="0">
+                        <a:rPr lang="en-US" sz="700" dirty="0">
                           <a:solidFill>
                             <a:srgbClr val="2B2B2B"/>
                           </a:solidFill>
@@ -6493,7 +8508,7 @@
                         </a:rPr>
                         <a:t>17F</a:t>
                       </a:r>
-                      <a:endParaRPr lang="en-US" sz="750" dirty="0">
+                      <a:endParaRPr lang="en-US" sz="700" dirty="0">
                         <a:latin typeface="맑은 고딕" charset="0"/>
                         <a:ea typeface="맑은 고딕" charset="0"/>
                         <a:cs typeface="맑은 고딕" charset="0"/>
@@ -6559,7 +8574,7 @@
                           <a:ea typeface="맑은 고딕" pitchFamily="34" charset="-122"/>
                           <a:cs typeface="맑은 고딕" pitchFamily="34" charset="-120"/>
                         </a:rPr>
-                        <a:t>한국글로벌자산운용…</a:t>
+                        <a:t>한국글로벌자산운용_17층_본사사업부</a:t>
                       </a:r>
                       <a:endParaRPr lang="en-US" sz="700" dirty="0">
                         <a:latin typeface="맑은 고딕" charset="0"/>
@@ -6619,7 +8634,7 @@
                         <a:buNone/>
                       </a:pPr>
                       <a:r>
-                        <a:rPr lang="en-US" sz="750" dirty="0">
+                        <a:rPr lang="en-US" sz="700" dirty="0">
                           <a:solidFill>
                             <a:srgbClr val="2B2B2B"/>
                           </a:solidFill>
@@ -6629,7 +8644,7 @@
                         </a:rPr>
                         <a:t>업무시설</a:t>
                       </a:r>
-                      <a:endParaRPr lang="en-US" sz="750" dirty="0">
+                      <a:endParaRPr lang="en-US" sz="700" dirty="0">
                         <a:latin typeface="맑은 고딕" charset="0"/>
                         <a:ea typeface="맑은 고딕" charset="0"/>
                         <a:cs typeface="맑은 고딕" charset="0"/>
@@ -6687,7 +8702,7 @@
                         <a:buNone/>
                       </a:pPr>
                       <a:r>
-                        <a:rPr lang="en-US" sz="750" dirty="0">
+                        <a:rPr lang="en-US" sz="700" dirty="0">
                           <a:solidFill>
                             <a:srgbClr val="2B2B2B"/>
                           </a:solidFill>
@@ -6697,7 +8712,7 @@
                         </a:rPr>
                         <a:t>1,250.5</a:t>
                       </a:r>
-                      <a:endParaRPr lang="en-US" sz="750" dirty="0">
+                      <a:endParaRPr lang="en-US" sz="700" dirty="0">
                         <a:latin typeface="맑은 고딕" charset="0"/>
                         <a:ea typeface="맑은 고딕" charset="0"/>
                         <a:cs typeface="맑은 고딕" charset="0"/>
@@ -6755,7 +8770,7 @@
                         <a:buNone/>
                       </a:pPr>
                       <a:r>
-                        <a:rPr lang="en-US" sz="750" dirty="0">
+                        <a:rPr lang="en-US" sz="700" dirty="0">
                           <a:solidFill>
                             <a:srgbClr val="2B2B2B"/>
                           </a:solidFill>
@@ -6765,7 +8780,7 @@
                         </a:rPr>
                         <a:t>750.3</a:t>
                       </a:r>
-                      <a:endParaRPr lang="en-US" sz="750" dirty="0">
+                      <a:endParaRPr lang="en-US" sz="700" dirty="0">
                         <a:latin typeface="맑은 고딕" charset="0"/>
                         <a:ea typeface="맑은 고딕" charset="0"/>
                         <a:cs typeface="맑은 고딕" charset="0"/>
@@ -6831,7 +8846,7 @@
                           <a:ea typeface="맑은 고딕" pitchFamily="34" charset="-122"/>
                           <a:cs typeface="맑은 고딕" pitchFamily="34" charset="-120"/>
                         </a:rPr>
-                        <a:t>150,000,000,…</a:t>
+                        <a:t>150,000,000,000</a:t>
                       </a:r>
                       <a:endParaRPr lang="en-US" sz="700" dirty="0">
                         <a:latin typeface="맑은 고딕" charset="0"/>
@@ -6959,7 +8974,7 @@
                         <a:buNone/>
                       </a:pPr>
                       <a:r>
-                        <a:rPr lang="en-US" sz="750" dirty="0">
+                        <a:rPr lang="en-US" sz="700" dirty="0">
                           <a:solidFill>
                             <a:srgbClr val="2B2B2B"/>
                           </a:solidFill>
@@ -6969,7 +8984,7 @@
                         </a:rPr>
                         <a:t>150,000,000</a:t>
                       </a:r>
-                      <a:endParaRPr lang="en-US" sz="750" dirty="0">
+                      <a:endParaRPr lang="en-US" sz="700" dirty="0">
                         <a:latin typeface="맑은 고딕" charset="0"/>
                         <a:ea typeface="맑은 고딕" charset="0"/>
                         <a:cs typeface="맑은 고딕" charset="0"/>
@@ -7095,7 +9110,7 @@
                         <a:buNone/>
                       </a:pPr>
                       <a:r>
-                        <a:rPr lang="en-US" sz="750" dirty="0">
+                        <a:rPr lang="en-US" sz="700" dirty="0">
                           <a:solidFill>
                             <a:srgbClr val="2B2B2B"/>
                           </a:solidFill>
@@ -7105,7 +9120,7 @@
                         </a:rPr>
                         <a:t>2028-12-31</a:t>
                       </a:r>
-                      <a:endParaRPr lang="en-US" sz="750" dirty="0">
+                      <a:endParaRPr lang="en-US" sz="700" dirty="0">
                         <a:latin typeface="맑은 고딕" charset="0"/>
                         <a:ea typeface="맑은 고딕" charset="0"/>
                         <a:cs typeface="맑은 고딕" charset="0"/>
@@ -7155,7 +9170,7 @@
                   </a:tcPr>
                 </a:tc>
               </a:tr>
-              <a:tr h="243840">
+              <a:tr h="221381">
                 <a:tc>
                   <a:txBody>
                     <a:bodyPr/>
@@ -7165,7 +9180,7 @@
                         <a:buNone/>
                       </a:pPr>
                       <a:r>
-                        <a:rPr lang="en-US" sz="750" dirty="0">
+                        <a:rPr lang="en-US" sz="700" dirty="0">
                           <a:solidFill>
                             <a:srgbClr val="2B2B2B"/>
                           </a:solidFill>
@@ -7175,7 +9190,7 @@
                         </a:rPr>
                         <a:t>16F</a:t>
                       </a:r>
-                      <a:endParaRPr lang="en-US" sz="750" dirty="0">
+                      <a:endParaRPr lang="en-US" sz="700" dirty="0">
                         <a:latin typeface="맑은 고딕" charset="0"/>
                         <a:ea typeface="맑은 고딕" charset="0"/>
                         <a:cs typeface="맑은 고딕" charset="0"/>
@@ -7241,7 +9256,7 @@
                           <a:ea typeface="맑은 고딕" pitchFamily="34" charset="-122"/>
                           <a:cs typeface="맑은 고딕" pitchFamily="34" charset="-120"/>
                         </a:rPr>
-                        <a:t>한국글로벌자산운용…</a:t>
+                        <a:t>한국글로벌자산운용_16층_본사사업부</a:t>
                       </a:r>
                       <a:endParaRPr lang="en-US" sz="700" dirty="0">
                         <a:latin typeface="맑은 고딕" charset="0"/>
@@ -7301,7 +9316,7 @@
                         <a:buNone/>
                       </a:pPr>
                       <a:r>
-                        <a:rPr lang="en-US" sz="750" dirty="0">
+                        <a:rPr lang="en-US" sz="700" dirty="0">
                           <a:solidFill>
                             <a:srgbClr val="2B2B2B"/>
                           </a:solidFill>
@@ -7311,7 +9326,7 @@
                         </a:rPr>
                         <a:t>업무시설</a:t>
                       </a:r>
-                      <a:endParaRPr lang="en-US" sz="750" dirty="0">
+                      <a:endParaRPr lang="en-US" sz="700" dirty="0">
                         <a:latin typeface="맑은 고딕" charset="0"/>
                         <a:ea typeface="맑은 고딕" charset="0"/>
                         <a:cs typeface="맑은 고딕" charset="0"/>
@@ -7369,7 +9384,7 @@
                         <a:buNone/>
                       </a:pPr>
                       <a:r>
-                        <a:rPr lang="en-US" sz="750" dirty="0">
+                        <a:rPr lang="en-US" sz="700" dirty="0">
                           <a:solidFill>
                             <a:srgbClr val="2B2B2B"/>
                           </a:solidFill>
@@ -7379,7 +9394,7 @@
                         </a:rPr>
                         <a:t>1,250.5</a:t>
                       </a:r>
-                      <a:endParaRPr lang="en-US" sz="750" dirty="0">
+                      <a:endParaRPr lang="en-US" sz="700" dirty="0">
                         <a:latin typeface="맑은 고딕" charset="0"/>
                         <a:ea typeface="맑은 고딕" charset="0"/>
                         <a:cs typeface="맑은 고딕" charset="0"/>
@@ -7437,7 +9452,7 @@
                         <a:buNone/>
                       </a:pPr>
                       <a:r>
-                        <a:rPr lang="en-US" sz="750" dirty="0">
+                        <a:rPr lang="en-US" sz="700" dirty="0">
                           <a:solidFill>
                             <a:srgbClr val="2B2B2B"/>
                           </a:solidFill>
@@ -7447,7 +9462,7 @@
                         </a:rPr>
                         <a:t>750.3</a:t>
                       </a:r>
-                      <a:endParaRPr lang="en-US" sz="750" dirty="0">
+                      <a:endParaRPr lang="en-US" sz="700" dirty="0">
                         <a:latin typeface="맑은 고딕" charset="0"/>
                         <a:ea typeface="맑은 고딕" charset="0"/>
                         <a:cs typeface="맑은 고딕" charset="0"/>
@@ -7513,7 +9528,7 @@
                           <a:ea typeface="맑은 고딕" pitchFamily="34" charset="-122"/>
                           <a:cs typeface="맑은 고딕" pitchFamily="34" charset="-120"/>
                         </a:rPr>
-                        <a:t>150,000,000,…</a:t>
+                        <a:t>150,000,000,000</a:t>
                       </a:r>
                       <a:endParaRPr lang="en-US" sz="700" dirty="0">
                         <a:latin typeface="맑은 고딕" charset="0"/>
@@ -7641,7 +9656,7 @@
                         <a:buNone/>
                       </a:pPr>
                       <a:r>
-                        <a:rPr lang="en-US" sz="750" dirty="0">
+                        <a:rPr lang="en-US" sz="700" dirty="0">
                           <a:solidFill>
                             <a:srgbClr val="2B2B2B"/>
                           </a:solidFill>
@@ -7651,7 +9666,7 @@
                         </a:rPr>
                         <a:t>150,000,000</a:t>
                       </a:r>
-                      <a:endParaRPr lang="en-US" sz="750" dirty="0">
+                      <a:endParaRPr lang="en-US" sz="700" dirty="0">
                         <a:latin typeface="맑은 고딕" charset="0"/>
                         <a:ea typeface="맑은 고딕" charset="0"/>
                         <a:cs typeface="맑은 고딕" charset="0"/>
@@ -7777,7 +9792,7 @@
                         <a:buNone/>
                       </a:pPr>
                       <a:r>
-                        <a:rPr lang="en-US" sz="750" dirty="0">
+                        <a:rPr lang="en-US" sz="700" dirty="0">
                           <a:solidFill>
                             <a:srgbClr val="2B2B2B"/>
                           </a:solidFill>
@@ -7787,7 +9802,7 @@
                         </a:rPr>
                         <a:t>2028-12-31</a:t>
                       </a:r>
-                      <a:endParaRPr lang="en-US" sz="750" dirty="0">
+                      <a:endParaRPr lang="en-US" sz="700" dirty="0">
                         <a:latin typeface="맑은 고딕" charset="0"/>
                         <a:ea typeface="맑은 고딕" charset="0"/>
                         <a:cs typeface="맑은 고딕" charset="0"/>
@@ -7837,7 +9852,7 @@
                   </a:tcPr>
                 </a:tc>
               </a:tr>
-              <a:tr h="243840">
+              <a:tr h="221381">
                 <a:tc>
                   <a:txBody>
                     <a:bodyPr/>
@@ -7847,7 +9862,7 @@
                         <a:buNone/>
                       </a:pPr>
                       <a:r>
-                        <a:rPr lang="en-US" sz="750" dirty="0">
+                        <a:rPr lang="en-US" sz="700" dirty="0">
                           <a:solidFill>
                             <a:srgbClr val="2B2B2B"/>
                           </a:solidFill>
@@ -7857,7 +9872,7 @@
                         </a:rPr>
                         <a:t>15F</a:t>
                       </a:r>
-                      <a:endParaRPr lang="en-US" sz="750" dirty="0">
+                      <a:endParaRPr lang="en-US" sz="700" dirty="0">
                         <a:latin typeface="맑은 고딕" charset="0"/>
                         <a:ea typeface="맑은 고딕" charset="0"/>
                         <a:cs typeface="맑은 고딕" charset="0"/>
@@ -7923,7 +9938,7 @@
                           <a:ea typeface="맑은 고딕" pitchFamily="34" charset="-122"/>
                           <a:cs typeface="맑은 고딕" pitchFamily="34" charset="-120"/>
                         </a:rPr>
-                        <a:t>한국글로벌자산운용…</a:t>
+                        <a:t>한국글로벌자산운용_15층_본사사업부</a:t>
                       </a:r>
                       <a:endParaRPr lang="en-US" sz="700" dirty="0">
                         <a:latin typeface="맑은 고딕" charset="0"/>
@@ -7983,7 +9998,7 @@
                         <a:buNone/>
                       </a:pPr>
                       <a:r>
-                        <a:rPr lang="en-US" sz="750" dirty="0">
+                        <a:rPr lang="en-US" sz="700" dirty="0">
                           <a:solidFill>
                             <a:srgbClr val="2B2B2B"/>
                           </a:solidFill>
@@ -7993,7 +10008,7 @@
                         </a:rPr>
                         <a:t>업무시설</a:t>
                       </a:r>
-                      <a:endParaRPr lang="en-US" sz="750" dirty="0">
+                      <a:endParaRPr lang="en-US" sz="700" dirty="0">
                         <a:latin typeface="맑은 고딕" charset="0"/>
                         <a:ea typeface="맑은 고딕" charset="0"/>
                         <a:cs typeface="맑은 고딕" charset="0"/>
@@ -8051,7 +10066,7 @@
                         <a:buNone/>
                       </a:pPr>
                       <a:r>
-                        <a:rPr lang="en-US" sz="750" dirty="0">
+                        <a:rPr lang="en-US" sz="700" dirty="0">
                           <a:solidFill>
                             <a:srgbClr val="2B2B2B"/>
                           </a:solidFill>
@@ -8061,7 +10076,7 @@
                         </a:rPr>
                         <a:t>1,250.5</a:t>
                       </a:r>
-                      <a:endParaRPr lang="en-US" sz="750" dirty="0">
+                      <a:endParaRPr lang="en-US" sz="700" dirty="0">
                         <a:latin typeface="맑은 고딕" charset="0"/>
                         <a:ea typeface="맑은 고딕" charset="0"/>
                         <a:cs typeface="맑은 고딕" charset="0"/>
@@ -8119,7 +10134,7 @@
                         <a:buNone/>
                       </a:pPr>
                       <a:r>
-                        <a:rPr lang="en-US" sz="750" dirty="0">
+                        <a:rPr lang="en-US" sz="700" dirty="0">
                           <a:solidFill>
                             <a:srgbClr val="2B2B2B"/>
                           </a:solidFill>
@@ -8129,7 +10144,7 @@
                         </a:rPr>
                         <a:t>750.3</a:t>
                       </a:r>
-                      <a:endParaRPr lang="en-US" sz="750" dirty="0">
+                      <a:endParaRPr lang="en-US" sz="700" dirty="0">
                         <a:latin typeface="맑은 고딕" charset="0"/>
                         <a:ea typeface="맑은 고딕" charset="0"/>
                         <a:cs typeface="맑은 고딕" charset="0"/>
@@ -8195,7 +10210,7 @@
                           <a:ea typeface="맑은 고딕" pitchFamily="34" charset="-122"/>
                           <a:cs typeface="맑은 고딕" pitchFamily="34" charset="-120"/>
                         </a:rPr>
-                        <a:t>150,000,000,…</a:t>
+                        <a:t>150,000,000,000</a:t>
                       </a:r>
                       <a:endParaRPr lang="en-US" sz="700" dirty="0">
                         <a:latin typeface="맑은 고딕" charset="0"/>
@@ -8323,7 +10338,7 @@
                         <a:buNone/>
                       </a:pPr>
                       <a:r>
-                        <a:rPr lang="en-US" sz="750" dirty="0">
+                        <a:rPr lang="en-US" sz="700" dirty="0">
                           <a:solidFill>
                             <a:srgbClr val="2B2B2B"/>
                           </a:solidFill>
@@ -8333,7 +10348,7 @@
                         </a:rPr>
                         <a:t>150,000,000</a:t>
                       </a:r>
-                      <a:endParaRPr lang="en-US" sz="750" dirty="0">
+                      <a:endParaRPr lang="en-US" sz="700" dirty="0">
                         <a:latin typeface="맑은 고딕" charset="0"/>
                         <a:ea typeface="맑은 고딕" charset="0"/>
                         <a:cs typeface="맑은 고딕" charset="0"/>
@@ -8459,7 +10474,7 @@
                         <a:buNone/>
                       </a:pPr>
                       <a:r>
-                        <a:rPr lang="en-US" sz="750" dirty="0">
+                        <a:rPr lang="en-US" sz="700" dirty="0">
                           <a:solidFill>
                             <a:srgbClr val="2B2B2B"/>
                           </a:solidFill>
@@ -8469,7 +10484,7 @@
                         </a:rPr>
                         <a:t>2028-12-31</a:t>
                       </a:r>
-                      <a:endParaRPr lang="en-US" sz="750" dirty="0">
+                      <a:endParaRPr lang="en-US" sz="700" dirty="0">
                         <a:latin typeface="맑은 고딕" charset="0"/>
                         <a:ea typeface="맑은 고딕" charset="0"/>
                         <a:cs typeface="맑은 고딕" charset="0"/>
@@ -8519,7 +10534,7 @@
                   </a:tcPr>
                 </a:tc>
               </a:tr>
-              <a:tr h="243840">
+              <a:tr h="221381">
                 <a:tc>
                   <a:txBody>
                     <a:bodyPr/>
@@ -8529,7 +10544,7 @@
                         <a:buNone/>
                       </a:pPr>
                       <a:r>
-                        <a:rPr lang="en-US" sz="750" dirty="0">
+                        <a:rPr lang="en-US" sz="700" dirty="0">
                           <a:solidFill>
                             <a:srgbClr val="2B2B2B"/>
                           </a:solidFill>
@@ -8539,7 +10554,7 @@
                         </a:rPr>
                         <a:t>14F</a:t>
                       </a:r>
-                      <a:endParaRPr lang="en-US" sz="750" dirty="0">
+                      <a:endParaRPr lang="en-US" sz="700" dirty="0">
                         <a:latin typeface="맑은 고딕" charset="0"/>
                         <a:ea typeface="맑은 고딕" charset="0"/>
                         <a:cs typeface="맑은 고딕" charset="0"/>
@@ -8605,7 +10620,7 @@
                           <a:ea typeface="맑은 고딕" pitchFamily="34" charset="-122"/>
                           <a:cs typeface="맑은 고딕" pitchFamily="34" charset="-120"/>
                         </a:rPr>
-                        <a:t>한국글로벌자산운용…</a:t>
+                        <a:t>한국글로벌자산운용_14층_본사사업부</a:t>
                       </a:r>
                       <a:endParaRPr lang="en-US" sz="700" dirty="0">
                         <a:latin typeface="맑은 고딕" charset="0"/>
@@ -8665,7 +10680,7 @@
                         <a:buNone/>
                       </a:pPr>
                       <a:r>
-                        <a:rPr lang="en-US" sz="750" dirty="0">
+                        <a:rPr lang="en-US" sz="700" dirty="0">
                           <a:solidFill>
                             <a:srgbClr val="2B2B2B"/>
                           </a:solidFill>
@@ -8675,7 +10690,7 @@
                         </a:rPr>
                         <a:t>업무시설</a:t>
                       </a:r>
-                      <a:endParaRPr lang="en-US" sz="750" dirty="0">
+                      <a:endParaRPr lang="en-US" sz="700" dirty="0">
                         <a:latin typeface="맑은 고딕" charset="0"/>
                         <a:ea typeface="맑은 고딕" charset="0"/>
                         <a:cs typeface="맑은 고딕" charset="0"/>
@@ -8733,7 +10748,7 @@
                         <a:buNone/>
                       </a:pPr>
                       <a:r>
-                        <a:rPr lang="en-US" sz="750" dirty="0">
+                        <a:rPr lang="en-US" sz="700" dirty="0">
                           <a:solidFill>
                             <a:srgbClr val="2B2B2B"/>
                           </a:solidFill>
@@ -8743,7 +10758,7 @@
                         </a:rPr>
                         <a:t>1,250.5</a:t>
                       </a:r>
-                      <a:endParaRPr lang="en-US" sz="750" dirty="0">
+                      <a:endParaRPr lang="en-US" sz="700" dirty="0">
                         <a:latin typeface="맑은 고딕" charset="0"/>
                         <a:ea typeface="맑은 고딕" charset="0"/>
                         <a:cs typeface="맑은 고딕" charset="0"/>
@@ -8801,7 +10816,7 @@
                         <a:buNone/>
                       </a:pPr>
                       <a:r>
-                        <a:rPr lang="en-US" sz="750" dirty="0">
+                        <a:rPr lang="en-US" sz="700" dirty="0">
                           <a:solidFill>
                             <a:srgbClr val="2B2B2B"/>
                           </a:solidFill>
@@ -8811,7 +10826,7 @@
                         </a:rPr>
                         <a:t>750.3</a:t>
                       </a:r>
-                      <a:endParaRPr lang="en-US" sz="750" dirty="0">
+                      <a:endParaRPr lang="en-US" sz="700" dirty="0">
                         <a:latin typeface="맑은 고딕" charset="0"/>
                         <a:ea typeface="맑은 고딕" charset="0"/>
                         <a:cs typeface="맑은 고딕" charset="0"/>
@@ -8877,7 +10892,7 @@
                           <a:ea typeface="맑은 고딕" pitchFamily="34" charset="-122"/>
                           <a:cs typeface="맑은 고딕" pitchFamily="34" charset="-120"/>
                         </a:rPr>
-                        <a:t>150,000,000,…</a:t>
+                        <a:t>150,000,000,000</a:t>
                       </a:r>
                       <a:endParaRPr lang="en-US" sz="700" dirty="0">
                         <a:latin typeface="맑은 고딕" charset="0"/>
@@ -9005,7 +11020,7 @@
                         <a:buNone/>
                       </a:pPr>
                       <a:r>
-                        <a:rPr lang="en-US" sz="750" dirty="0">
+                        <a:rPr lang="en-US" sz="700" dirty="0">
                           <a:solidFill>
                             <a:srgbClr val="2B2B2B"/>
                           </a:solidFill>
@@ -9015,7 +11030,7 @@
                         </a:rPr>
                         <a:t>150,000,000</a:t>
                       </a:r>
-                      <a:endParaRPr lang="en-US" sz="750" dirty="0">
+                      <a:endParaRPr lang="en-US" sz="700" dirty="0">
                         <a:latin typeface="맑은 고딕" charset="0"/>
                         <a:ea typeface="맑은 고딕" charset="0"/>
                         <a:cs typeface="맑은 고딕" charset="0"/>
@@ -9141,7 +11156,7 @@
                         <a:buNone/>
                       </a:pPr>
                       <a:r>
-                        <a:rPr lang="en-US" sz="750" dirty="0">
+                        <a:rPr lang="en-US" sz="700" dirty="0">
                           <a:solidFill>
                             <a:srgbClr val="2B2B2B"/>
                           </a:solidFill>
@@ -9151,7 +11166,7 @@
                         </a:rPr>
                         <a:t>2028-12-31</a:t>
                       </a:r>
-                      <a:endParaRPr lang="en-US" sz="750" dirty="0">
+                      <a:endParaRPr lang="en-US" sz="700" dirty="0">
                         <a:latin typeface="맑은 고딕" charset="0"/>
                         <a:ea typeface="맑은 고딕" charset="0"/>
                         <a:cs typeface="맑은 고딕" charset="0"/>
@@ -9201,7 +11216,7 @@
                   </a:tcPr>
                 </a:tc>
               </a:tr>
-              <a:tr h="243840">
+              <a:tr h="221381">
                 <a:tc>
                   <a:txBody>
                     <a:bodyPr/>
@@ -9211,7 +11226,7 @@
                         <a:buNone/>
                       </a:pPr>
                       <a:r>
-                        <a:rPr lang="en-US" sz="750" dirty="0">
+                        <a:rPr lang="en-US" sz="700" dirty="0">
                           <a:solidFill>
                             <a:srgbClr val="2B2B2B"/>
                           </a:solidFill>
@@ -9221,7 +11236,7 @@
                         </a:rPr>
                         <a:t>13F</a:t>
                       </a:r>
-                      <a:endParaRPr lang="en-US" sz="750" dirty="0">
+                      <a:endParaRPr lang="en-US" sz="700" dirty="0">
                         <a:latin typeface="맑은 고딕" charset="0"/>
                         <a:ea typeface="맑은 고딕" charset="0"/>
                         <a:cs typeface="맑은 고딕" charset="0"/>
@@ -9287,7 +11302,7 @@
                           <a:ea typeface="맑은 고딕" pitchFamily="34" charset="-122"/>
                           <a:cs typeface="맑은 고딕" pitchFamily="34" charset="-120"/>
                         </a:rPr>
-                        <a:t>한국글로벌자산운용…</a:t>
+                        <a:t>한국글로벌자산운용_13층_본사사업부</a:t>
                       </a:r>
                       <a:endParaRPr lang="en-US" sz="700" dirty="0">
                         <a:latin typeface="맑은 고딕" charset="0"/>
@@ -9347,7 +11362,7 @@
                         <a:buNone/>
                       </a:pPr>
                       <a:r>
-                        <a:rPr lang="en-US" sz="750" dirty="0">
+                        <a:rPr lang="en-US" sz="700" dirty="0">
                           <a:solidFill>
                             <a:srgbClr val="2B2B2B"/>
                           </a:solidFill>
@@ -9357,7 +11372,7 @@
                         </a:rPr>
                         <a:t>업무시설</a:t>
                       </a:r>
-                      <a:endParaRPr lang="en-US" sz="750" dirty="0">
+                      <a:endParaRPr lang="en-US" sz="700" dirty="0">
                         <a:latin typeface="맑은 고딕" charset="0"/>
                         <a:ea typeface="맑은 고딕" charset="0"/>
                         <a:cs typeface="맑은 고딕" charset="0"/>
@@ -9415,7 +11430,7 @@
                         <a:buNone/>
                       </a:pPr>
                       <a:r>
-                        <a:rPr lang="en-US" sz="750" dirty="0">
+                        <a:rPr lang="en-US" sz="700" dirty="0">
                           <a:solidFill>
                             <a:srgbClr val="2B2B2B"/>
                           </a:solidFill>
@@ -9425,7 +11440,7 @@
                         </a:rPr>
                         <a:t>1,250.5</a:t>
                       </a:r>
-                      <a:endParaRPr lang="en-US" sz="750" dirty="0">
+                      <a:endParaRPr lang="en-US" sz="700" dirty="0">
                         <a:latin typeface="맑은 고딕" charset="0"/>
                         <a:ea typeface="맑은 고딕" charset="0"/>
                         <a:cs typeface="맑은 고딕" charset="0"/>
@@ -9483,7 +11498,7 @@
                         <a:buNone/>
                       </a:pPr>
                       <a:r>
-                        <a:rPr lang="en-US" sz="750" dirty="0">
+                        <a:rPr lang="en-US" sz="700" dirty="0">
                           <a:solidFill>
                             <a:srgbClr val="2B2B2B"/>
                           </a:solidFill>
@@ -9493,7 +11508,7 @@
                         </a:rPr>
                         <a:t>750.3</a:t>
                       </a:r>
-                      <a:endParaRPr lang="en-US" sz="750" dirty="0">
+                      <a:endParaRPr lang="en-US" sz="700" dirty="0">
                         <a:latin typeface="맑은 고딕" charset="0"/>
                         <a:ea typeface="맑은 고딕" charset="0"/>
                         <a:cs typeface="맑은 고딕" charset="0"/>
@@ -9559,7 +11574,7 @@
                           <a:ea typeface="맑은 고딕" pitchFamily="34" charset="-122"/>
                           <a:cs typeface="맑은 고딕" pitchFamily="34" charset="-120"/>
                         </a:rPr>
-                        <a:t>150,000,000,…</a:t>
+                        <a:t>150,000,000,000</a:t>
                       </a:r>
                       <a:endParaRPr lang="en-US" sz="700" dirty="0">
                         <a:latin typeface="맑은 고딕" charset="0"/>
@@ -9687,7 +11702,7 @@
                         <a:buNone/>
                       </a:pPr>
                       <a:r>
-                        <a:rPr lang="en-US" sz="750" dirty="0">
+                        <a:rPr lang="en-US" sz="700" dirty="0">
                           <a:solidFill>
                             <a:srgbClr val="2B2B2B"/>
                           </a:solidFill>
@@ -9697,7 +11712,7 @@
                         </a:rPr>
                         <a:t>150,000,000</a:t>
                       </a:r>
-                      <a:endParaRPr lang="en-US" sz="750" dirty="0">
+                      <a:endParaRPr lang="en-US" sz="700" dirty="0">
                         <a:latin typeface="맑은 고딕" charset="0"/>
                         <a:ea typeface="맑은 고딕" charset="0"/>
                         <a:cs typeface="맑은 고딕" charset="0"/>
@@ -9823,7 +11838,7 @@
                         <a:buNone/>
                       </a:pPr>
                       <a:r>
-                        <a:rPr lang="en-US" sz="750" dirty="0">
+                        <a:rPr lang="en-US" sz="700" dirty="0">
                           <a:solidFill>
                             <a:srgbClr val="2B2B2B"/>
                           </a:solidFill>
@@ -9833,7 +11848,7 @@
                         </a:rPr>
                         <a:t>2028-12-31</a:t>
                       </a:r>
-                      <a:endParaRPr lang="en-US" sz="750" dirty="0">
+                      <a:endParaRPr lang="en-US" sz="700" dirty="0">
                         <a:latin typeface="맑은 고딕" charset="0"/>
                         <a:ea typeface="맑은 고딕" charset="0"/>
                         <a:cs typeface="맑은 고딕" charset="0"/>
@@ -9883,7 +11898,7 @@
                   </a:tcPr>
                 </a:tc>
               </a:tr>
-              <a:tr h="243840">
+              <a:tr h="221381">
                 <a:tc>
                   <a:txBody>
                     <a:bodyPr/>
@@ -9893,7 +11908,7 @@
                         <a:buNone/>
                       </a:pPr>
                       <a:r>
-                        <a:rPr lang="en-US" sz="750" dirty="0">
+                        <a:rPr lang="en-US" sz="700" dirty="0">
                           <a:solidFill>
                             <a:srgbClr val="2B2B2B"/>
                           </a:solidFill>
@@ -9903,7 +11918,7 @@
                         </a:rPr>
                         <a:t>12F</a:t>
                       </a:r>
-                      <a:endParaRPr lang="en-US" sz="750" dirty="0">
+                      <a:endParaRPr lang="en-US" sz="700" dirty="0">
                         <a:latin typeface="맑은 고딕" charset="0"/>
                         <a:ea typeface="맑은 고딕" charset="0"/>
                         <a:cs typeface="맑은 고딕" charset="0"/>
@@ -9969,7 +11984,7 @@
                           <a:ea typeface="맑은 고딕" pitchFamily="34" charset="-122"/>
                           <a:cs typeface="맑은 고딕" pitchFamily="34" charset="-120"/>
                         </a:rPr>
-                        <a:t>한국글로벌자산운용…</a:t>
+                        <a:t>한국글로벌자산운용_12층_본사사업부</a:t>
                       </a:r>
                       <a:endParaRPr lang="en-US" sz="700" dirty="0">
                         <a:latin typeface="맑은 고딕" charset="0"/>
@@ -10029,7 +12044,7 @@
                         <a:buNone/>
                       </a:pPr>
                       <a:r>
-                        <a:rPr lang="en-US" sz="750" dirty="0">
+                        <a:rPr lang="en-US" sz="700" dirty="0">
                           <a:solidFill>
                             <a:srgbClr val="2B2B2B"/>
                           </a:solidFill>
@@ -10039,7 +12054,7 @@
                         </a:rPr>
                         <a:t>업무시설</a:t>
                       </a:r>
-                      <a:endParaRPr lang="en-US" sz="750" dirty="0">
+                      <a:endParaRPr lang="en-US" sz="700" dirty="0">
                         <a:latin typeface="맑은 고딕" charset="0"/>
                         <a:ea typeface="맑은 고딕" charset="0"/>
                         <a:cs typeface="맑은 고딕" charset="0"/>
@@ -10097,7 +12112,7 @@
                         <a:buNone/>
                       </a:pPr>
                       <a:r>
-                        <a:rPr lang="en-US" sz="750" dirty="0">
+                        <a:rPr lang="en-US" sz="700" dirty="0">
                           <a:solidFill>
                             <a:srgbClr val="2B2B2B"/>
                           </a:solidFill>
@@ -10107,7 +12122,7 @@
                         </a:rPr>
                         <a:t>1,250.5</a:t>
                       </a:r>
-                      <a:endParaRPr lang="en-US" sz="750" dirty="0">
+                      <a:endParaRPr lang="en-US" sz="700" dirty="0">
                         <a:latin typeface="맑은 고딕" charset="0"/>
                         <a:ea typeface="맑은 고딕" charset="0"/>
                         <a:cs typeface="맑은 고딕" charset="0"/>
@@ -10165,7 +12180,7 @@
                         <a:buNone/>
                       </a:pPr>
                       <a:r>
-                        <a:rPr lang="en-US" sz="750" dirty="0">
+                        <a:rPr lang="en-US" sz="700" dirty="0">
                           <a:solidFill>
                             <a:srgbClr val="2B2B2B"/>
                           </a:solidFill>
@@ -10175,7 +12190,7 @@
                         </a:rPr>
                         <a:t>750.3</a:t>
                       </a:r>
-                      <a:endParaRPr lang="en-US" sz="750" dirty="0">
+                      <a:endParaRPr lang="en-US" sz="700" dirty="0">
                         <a:latin typeface="맑은 고딕" charset="0"/>
                         <a:ea typeface="맑은 고딕" charset="0"/>
                         <a:cs typeface="맑은 고딕" charset="0"/>
@@ -10241,7 +12256,7 @@
                           <a:ea typeface="맑은 고딕" pitchFamily="34" charset="-122"/>
                           <a:cs typeface="맑은 고딕" pitchFamily="34" charset="-120"/>
                         </a:rPr>
-                        <a:t>150,000,000,…</a:t>
+                        <a:t>150,000,000,000</a:t>
                       </a:r>
                       <a:endParaRPr lang="en-US" sz="700" dirty="0">
                         <a:latin typeface="맑은 고딕" charset="0"/>
@@ -10369,7 +12384,7 @@
                         <a:buNone/>
                       </a:pPr>
                       <a:r>
-                        <a:rPr lang="en-US" sz="750" dirty="0">
+                        <a:rPr lang="en-US" sz="700" dirty="0">
                           <a:solidFill>
                             <a:srgbClr val="2B2B2B"/>
                           </a:solidFill>
@@ -10379,7 +12394,7 @@
                         </a:rPr>
                         <a:t>150,000,000</a:t>
                       </a:r>
-                      <a:endParaRPr lang="en-US" sz="750" dirty="0">
+                      <a:endParaRPr lang="en-US" sz="700" dirty="0">
                         <a:latin typeface="맑은 고딕" charset="0"/>
                         <a:ea typeface="맑은 고딕" charset="0"/>
                         <a:cs typeface="맑은 고딕" charset="0"/>
@@ -10505,7 +12520,7 @@
                         <a:buNone/>
                       </a:pPr>
                       <a:r>
-                        <a:rPr lang="en-US" sz="750" dirty="0">
+                        <a:rPr lang="en-US" sz="700" dirty="0">
                           <a:solidFill>
                             <a:srgbClr val="2B2B2B"/>
                           </a:solidFill>
@@ -10515,7 +12530,7 @@
                         </a:rPr>
                         <a:t>2028-12-31</a:t>
                       </a:r>
-                      <a:endParaRPr lang="en-US" sz="750" dirty="0">
+                      <a:endParaRPr lang="en-US" sz="700" dirty="0">
                         <a:latin typeface="맑은 고딕" charset="0"/>
                         <a:ea typeface="맑은 고딕" charset="0"/>
                         <a:cs typeface="맑은 고딕" charset="0"/>
@@ -10565,7 +12580,7 @@
                   </a:tcPr>
                 </a:tc>
               </a:tr>
-              <a:tr h="243840">
+              <a:tr h="221381">
                 <a:tc>
                   <a:txBody>
                     <a:bodyPr/>
@@ -10575,7 +12590,7 @@
                         <a:buNone/>
                       </a:pPr>
                       <a:r>
-                        <a:rPr lang="en-US" sz="750" dirty="0">
+                        <a:rPr lang="en-US" sz="700" dirty="0">
                           <a:solidFill>
                             <a:srgbClr val="2B2B2B"/>
                           </a:solidFill>
@@ -10585,7 +12600,7 @@
                         </a:rPr>
                         <a:t>11F</a:t>
                       </a:r>
-                      <a:endParaRPr lang="en-US" sz="750" dirty="0">
+                      <a:endParaRPr lang="en-US" sz="700" dirty="0">
                         <a:latin typeface="맑은 고딕" charset="0"/>
                         <a:ea typeface="맑은 고딕" charset="0"/>
                         <a:cs typeface="맑은 고딕" charset="0"/>
@@ -10651,7 +12666,7 @@
                           <a:ea typeface="맑은 고딕" pitchFamily="34" charset="-122"/>
                           <a:cs typeface="맑은 고딕" pitchFamily="34" charset="-120"/>
                         </a:rPr>
-                        <a:t>한국글로벌자산운용…</a:t>
+                        <a:t>한국글로벌자산운용_11층_본사사업부</a:t>
                       </a:r>
                       <a:endParaRPr lang="en-US" sz="700" dirty="0">
                         <a:latin typeface="맑은 고딕" charset="0"/>
@@ -10711,7 +12726,7 @@
                         <a:buNone/>
                       </a:pPr>
                       <a:r>
-                        <a:rPr lang="en-US" sz="750" dirty="0">
+                        <a:rPr lang="en-US" sz="700" dirty="0">
                           <a:solidFill>
                             <a:srgbClr val="2B2B2B"/>
                           </a:solidFill>
@@ -10721,7 +12736,7 @@
                         </a:rPr>
                         <a:t>업무시설</a:t>
                       </a:r>
-                      <a:endParaRPr lang="en-US" sz="750" dirty="0">
+                      <a:endParaRPr lang="en-US" sz="700" dirty="0">
                         <a:latin typeface="맑은 고딕" charset="0"/>
                         <a:ea typeface="맑은 고딕" charset="0"/>
                         <a:cs typeface="맑은 고딕" charset="0"/>
@@ -10779,7 +12794,7 @@
                         <a:buNone/>
                       </a:pPr>
                       <a:r>
-                        <a:rPr lang="en-US" sz="750" dirty="0">
+                        <a:rPr lang="en-US" sz="700" dirty="0">
                           <a:solidFill>
                             <a:srgbClr val="2B2B2B"/>
                           </a:solidFill>
@@ -10789,7 +12804,7 @@
                         </a:rPr>
                         <a:t>1,250.5</a:t>
                       </a:r>
-                      <a:endParaRPr lang="en-US" sz="750" dirty="0">
+                      <a:endParaRPr lang="en-US" sz="700" dirty="0">
                         <a:latin typeface="맑은 고딕" charset="0"/>
                         <a:ea typeface="맑은 고딕" charset="0"/>
                         <a:cs typeface="맑은 고딕" charset="0"/>
@@ -10847,7 +12862,7 @@
                         <a:buNone/>
                       </a:pPr>
                       <a:r>
-                        <a:rPr lang="en-US" sz="750" dirty="0">
+                        <a:rPr lang="en-US" sz="700" dirty="0">
                           <a:solidFill>
                             <a:srgbClr val="2B2B2B"/>
                           </a:solidFill>
@@ -10857,7 +12872,7 @@
                         </a:rPr>
                         <a:t>750.3</a:t>
                       </a:r>
-                      <a:endParaRPr lang="en-US" sz="750" dirty="0">
+                      <a:endParaRPr lang="en-US" sz="700" dirty="0">
                         <a:latin typeface="맑은 고딕" charset="0"/>
                         <a:ea typeface="맑은 고딕" charset="0"/>
                         <a:cs typeface="맑은 고딕" charset="0"/>
@@ -10923,7 +12938,7 @@
                           <a:ea typeface="맑은 고딕" pitchFamily="34" charset="-122"/>
                           <a:cs typeface="맑은 고딕" pitchFamily="34" charset="-120"/>
                         </a:rPr>
-                        <a:t>150,000,000,…</a:t>
+                        <a:t>150,000,000,000</a:t>
                       </a:r>
                       <a:endParaRPr lang="en-US" sz="700" dirty="0">
                         <a:latin typeface="맑은 고딕" charset="0"/>
@@ -11051,7 +13066,7 @@
                         <a:buNone/>
                       </a:pPr>
                       <a:r>
-                        <a:rPr lang="en-US" sz="750" dirty="0">
+                        <a:rPr lang="en-US" sz="700" dirty="0">
                           <a:solidFill>
                             <a:srgbClr val="2B2B2B"/>
                           </a:solidFill>
@@ -11061,7 +13076,7 @@
                         </a:rPr>
                         <a:t>150,000,000</a:t>
                       </a:r>
-                      <a:endParaRPr lang="en-US" sz="750" dirty="0">
+                      <a:endParaRPr lang="en-US" sz="700" dirty="0">
                         <a:latin typeface="맑은 고딕" charset="0"/>
                         <a:ea typeface="맑은 고딕" charset="0"/>
                         <a:cs typeface="맑은 고딕" charset="0"/>
@@ -11187,7 +13202,7 @@
                         <a:buNone/>
                       </a:pPr>
                       <a:r>
-                        <a:rPr lang="en-US" sz="750" dirty="0">
+                        <a:rPr lang="en-US" sz="700" dirty="0">
                           <a:solidFill>
                             <a:srgbClr val="2B2B2B"/>
                           </a:solidFill>
@@ -11197,7 +13212,7 @@
                         </a:rPr>
                         <a:t>2028-12-31</a:t>
                       </a:r>
-                      <a:endParaRPr lang="en-US" sz="750" dirty="0">
+                      <a:endParaRPr lang="en-US" sz="700" dirty="0">
                         <a:latin typeface="맑은 고딕" charset="0"/>
                         <a:ea typeface="맑은 고딕" charset="0"/>
                         <a:cs typeface="맑은 고딕" charset="0"/>
@@ -11247,7 +13262,7 @@
                   </a:tcPr>
                 </a:tc>
               </a:tr>
-              <a:tr h="243840">
+              <a:tr h="221381">
                 <a:tc>
                   <a:txBody>
                     <a:bodyPr/>
@@ -11257,7 +13272,7 @@
                         <a:buNone/>
                       </a:pPr>
                       <a:r>
-                        <a:rPr lang="en-US" sz="750" dirty="0">
+                        <a:rPr lang="en-US" sz="700" dirty="0">
                           <a:solidFill>
                             <a:srgbClr val="2B2B2B"/>
                           </a:solidFill>
@@ -11267,7 +13282,7 @@
                         </a:rPr>
                         <a:t>10F</a:t>
                       </a:r>
-                      <a:endParaRPr lang="en-US" sz="750" dirty="0">
+                      <a:endParaRPr lang="en-US" sz="700" dirty="0">
                         <a:latin typeface="맑은 고딕" charset="0"/>
                         <a:ea typeface="맑은 고딕" charset="0"/>
                         <a:cs typeface="맑은 고딕" charset="0"/>
@@ -11333,7 +13348,7 @@
                           <a:ea typeface="맑은 고딕" pitchFamily="34" charset="-122"/>
                           <a:cs typeface="맑은 고딕" pitchFamily="34" charset="-120"/>
                         </a:rPr>
-                        <a:t>한국글로벌자산운용…</a:t>
+                        <a:t>한국글로벌자산운용_10층_본사사업부</a:t>
                       </a:r>
                       <a:endParaRPr lang="en-US" sz="700" dirty="0">
                         <a:latin typeface="맑은 고딕" charset="0"/>
@@ -11393,7 +13408,7 @@
                         <a:buNone/>
                       </a:pPr>
                       <a:r>
-                        <a:rPr lang="en-US" sz="750" dirty="0">
+                        <a:rPr lang="en-US" sz="700" dirty="0">
                           <a:solidFill>
                             <a:srgbClr val="2B2B2B"/>
                           </a:solidFill>
@@ -11403,7 +13418,7 @@
                         </a:rPr>
                         <a:t>업무시설</a:t>
                       </a:r>
-                      <a:endParaRPr lang="en-US" sz="750" dirty="0">
+                      <a:endParaRPr lang="en-US" sz="700" dirty="0">
                         <a:latin typeface="맑은 고딕" charset="0"/>
                         <a:ea typeface="맑은 고딕" charset="0"/>
                         <a:cs typeface="맑은 고딕" charset="0"/>
@@ -11461,7 +13476,7 @@
                         <a:buNone/>
                       </a:pPr>
                       <a:r>
-                        <a:rPr lang="en-US" sz="750" dirty="0">
+                        <a:rPr lang="en-US" sz="700" dirty="0">
                           <a:solidFill>
                             <a:srgbClr val="2B2B2B"/>
                           </a:solidFill>
@@ -11471,7 +13486,7 @@
                         </a:rPr>
                         <a:t>1,250.5</a:t>
                       </a:r>
-                      <a:endParaRPr lang="en-US" sz="750" dirty="0">
+                      <a:endParaRPr lang="en-US" sz="700" dirty="0">
                         <a:latin typeface="맑은 고딕" charset="0"/>
                         <a:ea typeface="맑은 고딕" charset="0"/>
                         <a:cs typeface="맑은 고딕" charset="0"/>
@@ -11529,7 +13544,7 @@
                         <a:buNone/>
                       </a:pPr>
                       <a:r>
-                        <a:rPr lang="en-US" sz="750" dirty="0">
+                        <a:rPr lang="en-US" sz="700" dirty="0">
                           <a:solidFill>
                             <a:srgbClr val="2B2B2B"/>
                           </a:solidFill>
@@ -11539,7 +13554,7 @@
                         </a:rPr>
                         <a:t>750.3</a:t>
                       </a:r>
-                      <a:endParaRPr lang="en-US" sz="750" dirty="0">
+                      <a:endParaRPr lang="en-US" sz="700" dirty="0">
                         <a:latin typeface="맑은 고딕" charset="0"/>
                         <a:ea typeface="맑은 고딕" charset="0"/>
                         <a:cs typeface="맑은 고딕" charset="0"/>
@@ -11605,7 +13620,7 @@
                           <a:ea typeface="맑은 고딕" pitchFamily="34" charset="-122"/>
                           <a:cs typeface="맑은 고딕" pitchFamily="34" charset="-120"/>
                         </a:rPr>
-                        <a:t>150,000,000,…</a:t>
+                        <a:t>150,000,000,000</a:t>
                       </a:r>
                       <a:endParaRPr lang="en-US" sz="700" dirty="0">
                         <a:latin typeface="맑은 고딕" charset="0"/>
@@ -11733,7 +13748,7 @@
                         <a:buNone/>
                       </a:pPr>
                       <a:r>
-                        <a:rPr lang="en-US" sz="750" dirty="0">
+                        <a:rPr lang="en-US" sz="700" dirty="0">
                           <a:solidFill>
                             <a:srgbClr val="2B2B2B"/>
                           </a:solidFill>
@@ -11743,7 +13758,7 @@
                         </a:rPr>
                         <a:t>150,000,000</a:t>
                       </a:r>
-                      <a:endParaRPr lang="en-US" sz="750" dirty="0">
+                      <a:endParaRPr lang="en-US" sz="700" dirty="0">
                         <a:latin typeface="맑은 고딕" charset="0"/>
                         <a:ea typeface="맑은 고딕" charset="0"/>
                         <a:cs typeface="맑은 고딕" charset="0"/>
@@ -11869,7 +13884,7 @@
                         <a:buNone/>
                       </a:pPr>
                       <a:r>
-                        <a:rPr lang="en-US" sz="750" dirty="0">
+                        <a:rPr lang="en-US" sz="700" dirty="0">
                           <a:solidFill>
                             <a:srgbClr val="2B2B2B"/>
                           </a:solidFill>
@@ -11879,7 +13894,7 @@
                         </a:rPr>
                         <a:t>2028-12-31</a:t>
                       </a:r>
-                      <a:endParaRPr lang="en-US" sz="750" dirty="0">
+                      <a:endParaRPr lang="en-US" sz="700" dirty="0">
                         <a:latin typeface="맑은 고딕" charset="0"/>
                         <a:ea typeface="맑은 고딕" charset="0"/>
                         <a:cs typeface="맑은 고딕" charset="0"/>
@@ -11929,7 +13944,7 @@
                   </a:tcPr>
                 </a:tc>
               </a:tr>
-              <a:tr h="243840">
+              <a:tr h="221381">
                 <a:tc>
                   <a:txBody>
                     <a:bodyPr/>
@@ -11939,7 +13954,7 @@
                         <a:buNone/>
                       </a:pPr>
                       <a:r>
-                        <a:rPr lang="en-US" sz="750" dirty="0">
+                        <a:rPr lang="en-US" sz="700" dirty="0">
                           <a:solidFill>
                             <a:srgbClr val="2B2B2B"/>
                           </a:solidFill>
@@ -11949,7 +13964,7 @@
                         </a:rPr>
                         <a:t>9F</a:t>
                       </a:r>
-                      <a:endParaRPr lang="en-US" sz="750" dirty="0">
+                      <a:endParaRPr lang="en-US" sz="700" dirty="0">
                         <a:latin typeface="맑은 고딕" charset="0"/>
                         <a:ea typeface="맑은 고딕" charset="0"/>
                         <a:cs typeface="맑은 고딕" charset="0"/>
@@ -12015,7 +14030,7 @@
                           <a:ea typeface="맑은 고딕" pitchFamily="34" charset="-122"/>
                           <a:cs typeface="맑은 고딕" pitchFamily="34" charset="-120"/>
                         </a:rPr>
-                        <a:t>한국글로벌자산운용…</a:t>
+                        <a:t>한국글로벌자산운용_9층_본사사업부</a:t>
                       </a:r>
                       <a:endParaRPr lang="en-US" sz="700" dirty="0">
                         <a:latin typeface="맑은 고딕" charset="0"/>
@@ -12075,7 +14090,7 @@
                         <a:buNone/>
                       </a:pPr>
                       <a:r>
-                        <a:rPr lang="en-US" sz="750" dirty="0">
+                        <a:rPr lang="en-US" sz="700" dirty="0">
                           <a:solidFill>
                             <a:srgbClr val="2B2B2B"/>
                           </a:solidFill>
@@ -12085,7 +14100,7 @@
                         </a:rPr>
                         <a:t>업무시설</a:t>
                       </a:r>
-                      <a:endParaRPr lang="en-US" sz="750" dirty="0">
+                      <a:endParaRPr lang="en-US" sz="700" dirty="0">
                         <a:latin typeface="맑은 고딕" charset="0"/>
                         <a:ea typeface="맑은 고딕" charset="0"/>
                         <a:cs typeface="맑은 고딕" charset="0"/>
@@ -12143,7 +14158,7 @@
                         <a:buNone/>
                       </a:pPr>
                       <a:r>
-                        <a:rPr lang="en-US" sz="750" dirty="0">
+                        <a:rPr lang="en-US" sz="700" dirty="0">
                           <a:solidFill>
                             <a:srgbClr val="2B2B2B"/>
                           </a:solidFill>
@@ -12153,7 +14168,7 @@
                         </a:rPr>
                         <a:t>1,250.5</a:t>
                       </a:r>
-                      <a:endParaRPr lang="en-US" sz="750" dirty="0">
+                      <a:endParaRPr lang="en-US" sz="700" dirty="0">
                         <a:latin typeface="맑은 고딕" charset="0"/>
                         <a:ea typeface="맑은 고딕" charset="0"/>
                         <a:cs typeface="맑은 고딕" charset="0"/>
@@ -12211,7 +14226,7 @@
                         <a:buNone/>
                       </a:pPr>
                       <a:r>
-                        <a:rPr lang="en-US" sz="750" dirty="0">
+                        <a:rPr lang="en-US" sz="700" dirty="0">
                           <a:solidFill>
                             <a:srgbClr val="2B2B2B"/>
                           </a:solidFill>
@@ -12221,7 +14236,7 @@
                         </a:rPr>
                         <a:t>750.3</a:t>
                       </a:r>
-                      <a:endParaRPr lang="en-US" sz="750" dirty="0">
+                      <a:endParaRPr lang="en-US" sz="700" dirty="0">
                         <a:latin typeface="맑은 고딕" charset="0"/>
                         <a:ea typeface="맑은 고딕" charset="0"/>
                         <a:cs typeface="맑은 고딕" charset="0"/>
@@ -12287,7 +14302,7 @@
                           <a:ea typeface="맑은 고딕" pitchFamily="34" charset="-122"/>
                           <a:cs typeface="맑은 고딕" pitchFamily="34" charset="-120"/>
                         </a:rPr>
-                        <a:t>150,000,000,…</a:t>
+                        <a:t>150,000,000,000</a:t>
                       </a:r>
                       <a:endParaRPr lang="en-US" sz="700" dirty="0">
                         <a:latin typeface="맑은 고딕" charset="0"/>
@@ -12415,7 +14430,7 @@
                         <a:buNone/>
                       </a:pPr>
                       <a:r>
-                        <a:rPr lang="en-US" sz="750" dirty="0">
+                        <a:rPr lang="en-US" sz="700" dirty="0">
                           <a:solidFill>
                             <a:srgbClr val="2B2B2B"/>
                           </a:solidFill>
@@ -12425,7 +14440,7 @@
                         </a:rPr>
                         <a:t>150,000,000</a:t>
                       </a:r>
-                      <a:endParaRPr lang="en-US" sz="750" dirty="0">
+                      <a:endParaRPr lang="en-US" sz="700" dirty="0">
                         <a:latin typeface="맑은 고딕" charset="0"/>
                         <a:ea typeface="맑은 고딕" charset="0"/>
                         <a:cs typeface="맑은 고딕" charset="0"/>
@@ -12551,7 +14566,7 @@
                         <a:buNone/>
                       </a:pPr>
                       <a:r>
-                        <a:rPr lang="en-US" sz="750" dirty="0">
+                        <a:rPr lang="en-US" sz="700" dirty="0">
                           <a:solidFill>
                             <a:srgbClr val="2B2B2B"/>
                           </a:solidFill>
@@ -12561,7 +14576,7 @@
                         </a:rPr>
                         <a:t>2028-12-31</a:t>
                       </a:r>
-                      <a:endParaRPr lang="en-US" sz="750" dirty="0">
+                      <a:endParaRPr lang="en-US" sz="700" dirty="0">
                         <a:latin typeface="맑은 고딕" charset="0"/>
                         <a:ea typeface="맑은 고딕" charset="0"/>
                         <a:cs typeface="맑은 고딕" charset="0"/>
@@ -12611,7 +14626,7 @@
                   </a:tcPr>
                 </a:tc>
               </a:tr>
-              <a:tr h="243840">
+              <a:tr h="221381">
                 <a:tc>
                   <a:txBody>
                     <a:bodyPr/>
@@ -12621,7 +14636,7 @@
                         <a:buNone/>
                       </a:pPr>
                       <a:r>
-                        <a:rPr lang="en-US" sz="750" dirty="0">
+                        <a:rPr lang="en-US" sz="700" dirty="0">
                           <a:solidFill>
                             <a:srgbClr val="2B2B2B"/>
                           </a:solidFill>
@@ -12631,7 +14646,7 @@
                         </a:rPr>
                         <a:t>8F</a:t>
                       </a:r>
-                      <a:endParaRPr lang="en-US" sz="750" dirty="0">
+                      <a:endParaRPr lang="en-US" sz="700" dirty="0">
                         <a:latin typeface="맑은 고딕" charset="0"/>
                         <a:ea typeface="맑은 고딕" charset="0"/>
                         <a:cs typeface="맑은 고딕" charset="0"/>
@@ -12697,7 +14712,7 @@
                           <a:ea typeface="맑은 고딕" pitchFamily="34" charset="-122"/>
                           <a:cs typeface="맑은 고딕" pitchFamily="34" charset="-120"/>
                         </a:rPr>
-                        <a:t>한국글로벌자산운용…</a:t>
+                        <a:t>한국글로벌자산운용_8층_본사사업부</a:t>
                       </a:r>
                       <a:endParaRPr lang="en-US" sz="700" dirty="0">
                         <a:latin typeface="맑은 고딕" charset="0"/>
@@ -12757,7 +14772,7 @@
                         <a:buNone/>
                       </a:pPr>
                       <a:r>
-                        <a:rPr lang="en-US" sz="750" dirty="0">
+                        <a:rPr lang="en-US" sz="700" dirty="0">
                           <a:solidFill>
                             <a:srgbClr val="2B2B2B"/>
                           </a:solidFill>
@@ -12767,7 +14782,7 @@
                         </a:rPr>
                         <a:t>업무시설</a:t>
                       </a:r>
-                      <a:endParaRPr lang="en-US" sz="750" dirty="0">
+                      <a:endParaRPr lang="en-US" sz="700" dirty="0">
                         <a:latin typeface="맑은 고딕" charset="0"/>
                         <a:ea typeface="맑은 고딕" charset="0"/>
                         <a:cs typeface="맑은 고딕" charset="0"/>
@@ -12825,7 +14840,7 @@
                         <a:buNone/>
                       </a:pPr>
                       <a:r>
-                        <a:rPr lang="en-US" sz="750" dirty="0">
+                        <a:rPr lang="en-US" sz="700" dirty="0">
                           <a:solidFill>
                             <a:srgbClr val="2B2B2B"/>
                           </a:solidFill>
@@ -12835,7 +14850,7 @@
                         </a:rPr>
                         <a:t>1,250.5</a:t>
                       </a:r>
-                      <a:endParaRPr lang="en-US" sz="750" dirty="0">
+                      <a:endParaRPr lang="en-US" sz="700" dirty="0">
                         <a:latin typeface="맑은 고딕" charset="0"/>
                         <a:ea typeface="맑은 고딕" charset="0"/>
                         <a:cs typeface="맑은 고딕" charset="0"/>
@@ -12893,7 +14908,7 @@
                         <a:buNone/>
                       </a:pPr>
                       <a:r>
-                        <a:rPr lang="en-US" sz="750" dirty="0">
+                        <a:rPr lang="en-US" sz="700" dirty="0">
                           <a:solidFill>
                             <a:srgbClr val="2B2B2B"/>
                           </a:solidFill>
@@ -12903,7 +14918,7 @@
                         </a:rPr>
                         <a:t>750.3</a:t>
                       </a:r>
-                      <a:endParaRPr lang="en-US" sz="750" dirty="0">
+                      <a:endParaRPr lang="en-US" sz="700" dirty="0">
                         <a:latin typeface="맑은 고딕" charset="0"/>
                         <a:ea typeface="맑은 고딕" charset="0"/>
                         <a:cs typeface="맑은 고딕" charset="0"/>
@@ -12969,7 +14984,7 @@
                           <a:ea typeface="맑은 고딕" pitchFamily="34" charset="-122"/>
                           <a:cs typeface="맑은 고딕" pitchFamily="34" charset="-120"/>
                         </a:rPr>
-                        <a:t>150,000,000,…</a:t>
+                        <a:t>150,000,000,000</a:t>
                       </a:r>
                       <a:endParaRPr lang="en-US" sz="700" dirty="0">
                         <a:latin typeface="맑은 고딕" charset="0"/>
@@ -13097,7 +15112,7 @@
                         <a:buNone/>
                       </a:pPr>
                       <a:r>
-                        <a:rPr lang="en-US" sz="750" dirty="0">
+                        <a:rPr lang="en-US" sz="700" dirty="0">
                           <a:solidFill>
                             <a:srgbClr val="2B2B2B"/>
                           </a:solidFill>
@@ -13107,7 +15122,7 @@
                         </a:rPr>
                         <a:t>150,000,000</a:t>
                       </a:r>
-                      <a:endParaRPr lang="en-US" sz="750" dirty="0">
+                      <a:endParaRPr lang="en-US" sz="700" dirty="0">
                         <a:latin typeface="맑은 고딕" charset="0"/>
                         <a:ea typeface="맑은 고딕" charset="0"/>
                         <a:cs typeface="맑은 고딕" charset="0"/>
@@ -13233,7 +15248,7 @@
                         <a:buNone/>
                       </a:pPr>
                       <a:r>
-                        <a:rPr lang="en-US" sz="750" dirty="0">
+                        <a:rPr lang="en-US" sz="700" dirty="0">
                           <a:solidFill>
                             <a:srgbClr val="2B2B2B"/>
                           </a:solidFill>
@@ -13243,7 +15258,7 @@
                         </a:rPr>
                         <a:t>2028-12-31</a:t>
                       </a:r>
-                      <a:endParaRPr lang="en-US" sz="750" dirty="0">
+                      <a:endParaRPr lang="en-US" sz="700" dirty="0">
                         <a:latin typeface="맑은 고딕" charset="0"/>
                         <a:ea typeface="맑은 고딕" charset="0"/>
                         <a:cs typeface="맑은 고딕" charset="0"/>
@@ -13289,6 +15304,688 @@
                     </a:lnB>
                     <a:solidFill>
                       <a:srgbClr val="FFFFFF"/>
+                    </a:solidFill>
+                  </a:tcPr>
+                </a:tc>
+              </a:tr>
+              <a:tr h="221381">
+                <a:tc>
+                  <a:txBody>
+                    <a:bodyPr/>
+                    <a:lstStyle/>
+                    <a:p>
+                      <a:pPr algn="ctr" indent="0" marL="0">
+                        <a:buNone/>
+                      </a:pPr>
+                      <a:r>
+                        <a:rPr lang="en-US" sz="700" b="1" dirty="0">
+                          <a:solidFill>
+                            <a:srgbClr val="10161F"/>
+                          </a:solidFill>
+                          <a:latin typeface="맑은 고딕" pitchFamily="34" charset="0"/>
+                          <a:ea typeface="맑은 고딕" pitchFamily="34" charset="-122"/>
+                          <a:cs typeface="맑은 고딕" pitchFamily="34" charset="-120"/>
+                        </a:rPr>
+                        <a:t>합계</a:t>
+                      </a:r>
+                      <a:endParaRPr lang="en-US" sz="700" dirty="0">
+                        <a:latin typeface="맑은 고딕" charset="0"/>
+                        <a:ea typeface="맑은 고딕" charset="0"/>
+                        <a:cs typeface="맑은 고딕" charset="0"/>
+                      </a:endParaRPr>
+                    </a:p>
+                  </a:txBody>
+                  <a:tcPr marL="50800" marR="50800" marT="25400" marB="25400" anchor="ctr">
+                    <a:lnL w="3810" cap="flat" cmpd="sng" algn="ctr">
+                      <a:solidFill>
+                        <a:srgbClr val="DDE3E8"/>
+                      </a:solidFill>
+                      <a:prstDash val="solid"/>
+                      <a:round/>
+                      <a:headEnd type="none" w="med" len="med"/>
+                      <a:tailEnd type="none" w="med" len="med"/>
+                    </a:lnL>
+                    <a:lnR w="3810" cap="flat" cmpd="sng" algn="ctr">
+                      <a:solidFill>
+                        <a:srgbClr val="DDE3E8"/>
+                      </a:solidFill>
+                      <a:prstDash val="solid"/>
+                      <a:round/>
+                      <a:headEnd type="none" w="med" len="med"/>
+                      <a:tailEnd type="none" w="med" len="med"/>
+                    </a:lnR>
+                    <a:lnT w="3810" cap="flat" cmpd="sng" algn="ctr">
+                      <a:solidFill>
+                        <a:srgbClr val="DDE3E8"/>
+                      </a:solidFill>
+                      <a:prstDash val="solid"/>
+                      <a:round/>
+                      <a:headEnd type="none" w="med" len="med"/>
+                      <a:tailEnd type="none" w="med" len="med"/>
+                    </a:lnT>
+                    <a:lnB w="3810" cap="flat" cmpd="sng" algn="ctr">
+                      <a:solidFill>
+                        <a:srgbClr val="DDE3E8"/>
+                      </a:solidFill>
+                      <a:prstDash val="solid"/>
+                      <a:round/>
+                      <a:headEnd type="none" w="med" len="med"/>
+                      <a:tailEnd type="none" w="med" len="med"/>
+                    </a:lnB>
+                    <a:solidFill>
+                      <a:srgbClr val="F5F7F9"/>
+                    </a:solidFill>
+                  </a:tcPr>
+                </a:tc>
+                <a:tc>
+                  <a:txBody>
+                    <a:bodyPr/>
+                    <a:lstStyle/>
+                    <a:p>
+                      <a:pPr algn="l" indent="0" marL="0">
+                        <a:buNone/>
+                      </a:pPr>
+                      <a:r>
+                        <a:rPr lang="en-US" sz="700" b="1" dirty="0">
+                          <a:solidFill>
+                            <a:srgbClr val="10161F"/>
+                          </a:solidFill>
+                          <a:latin typeface="맑은 고딕" pitchFamily="34" charset="0"/>
+                          <a:ea typeface="맑은 고딕" pitchFamily="34" charset="-122"/>
+                          <a:cs typeface="맑은 고딕" pitchFamily="34" charset="-120"/>
+                        </a:rPr>
+                        <a:t>24개 호실</a:t>
+                      </a:r>
+                      <a:endParaRPr lang="en-US" sz="700" dirty="0">
+                        <a:latin typeface="맑은 고딕" charset="0"/>
+                        <a:ea typeface="맑은 고딕" charset="0"/>
+                        <a:cs typeface="맑은 고딕" charset="0"/>
+                      </a:endParaRPr>
+                    </a:p>
+                  </a:txBody>
+                  <a:tcPr marL="50800" marR="50800" marT="25400" marB="25400" anchor="ctr">
+                    <a:lnL w="3810" cap="flat" cmpd="sng" algn="ctr">
+                      <a:solidFill>
+                        <a:srgbClr val="DDE3E8"/>
+                      </a:solidFill>
+                      <a:prstDash val="solid"/>
+                      <a:round/>
+                      <a:headEnd type="none" w="med" len="med"/>
+                      <a:tailEnd type="none" w="med" len="med"/>
+                    </a:lnL>
+                    <a:lnR w="3810" cap="flat" cmpd="sng" algn="ctr">
+                      <a:solidFill>
+                        <a:srgbClr val="DDE3E8"/>
+                      </a:solidFill>
+                      <a:prstDash val="solid"/>
+                      <a:round/>
+                      <a:headEnd type="none" w="med" len="med"/>
+                      <a:tailEnd type="none" w="med" len="med"/>
+                    </a:lnR>
+                    <a:lnT w="3810" cap="flat" cmpd="sng" algn="ctr">
+                      <a:solidFill>
+                        <a:srgbClr val="DDE3E8"/>
+                      </a:solidFill>
+                      <a:prstDash val="solid"/>
+                      <a:round/>
+                      <a:headEnd type="none" w="med" len="med"/>
+                      <a:tailEnd type="none" w="med" len="med"/>
+                    </a:lnT>
+                    <a:lnB w="3810" cap="flat" cmpd="sng" algn="ctr">
+                      <a:solidFill>
+                        <a:srgbClr val="DDE3E8"/>
+                      </a:solidFill>
+                      <a:prstDash val="solid"/>
+                      <a:round/>
+                      <a:headEnd type="none" w="med" len="med"/>
+                      <a:tailEnd type="none" w="med" len="med"/>
+                    </a:lnB>
+                    <a:solidFill>
+                      <a:srgbClr val="F5F7F9"/>
+                    </a:solidFill>
+                  </a:tcPr>
+                </a:tc>
+                <a:tc>
+                  <a:txBody>
+                    <a:bodyPr/>
+                    <a:lstStyle/>
+                    <a:p>
+                      <a:pPr algn="ctr" indent="0" marL="0">
+                        <a:buNone/>
+                      </a:pPr>
+                      <a:r>
+                        <a:rPr lang="en-US" sz="700" b="1" dirty="0">
+                          <a:solidFill>
+                            <a:srgbClr val="10161F"/>
+                          </a:solidFill>
+                          <a:latin typeface="맑은 고딕" pitchFamily="34" charset="0"/>
+                          <a:ea typeface="맑은 고딕" pitchFamily="34" charset="-122"/>
+                          <a:cs typeface="맑은 고딕" pitchFamily="34" charset="-120"/>
+                        </a:rPr>
+                        <a:t>-</a:t>
+                      </a:r>
+                      <a:endParaRPr lang="en-US" sz="700" dirty="0">
+                        <a:latin typeface="맑은 고딕" charset="0"/>
+                        <a:ea typeface="맑은 고딕" charset="0"/>
+                        <a:cs typeface="맑은 고딕" charset="0"/>
+                      </a:endParaRPr>
+                    </a:p>
+                  </a:txBody>
+                  <a:tcPr marL="50800" marR="50800" marT="25400" marB="25400" anchor="ctr">
+                    <a:lnL w="3810" cap="flat" cmpd="sng" algn="ctr">
+                      <a:solidFill>
+                        <a:srgbClr val="DDE3E8"/>
+                      </a:solidFill>
+                      <a:prstDash val="solid"/>
+                      <a:round/>
+                      <a:headEnd type="none" w="med" len="med"/>
+                      <a:tailEnd type="none" w="med" len="med"/>
+                    </a:lnL>
+                    <a:lnR w="3810" cap="flat" cmpd="sng" algn="ctr">
+                      <a:solidFill>
+                        <a:srgbClr val="DDE3E8"/>
+                      </a:solidFill>
+                      <a:prstDash val="solid"/>
+                      <a:round/>
+                      <a:headEnd type="none" w="med" len="med"/>
+                      <a:tailEnd type="none" w="med" len="med"/>
+                    </a:lnR>
+                    <a:lnT w="3810" cap="flat" cmpd="sng" algn="ctr">
+                      <a:solidFill>
+                        <a:srgbClr val="DDE3E8"/>
+                      </a:solidFill>
+                      <a:prstDash val="solid"/>
+                      <a:round/>
+                      <a:headEnd type="none" w="med" len="med"/>
+                      <a:tailEnd type="none" w="med" len="med"/>
+                    </a:lnT>
+                    <a:lnB w="3810" cap="flat" cmpd="sng" algn="ctr">
+                      <a:solidFill>
+                        <a:srgbClr val="DDE3E8"/>
+                      </a:solidFill>
+                      <a:prstDash val="solid"/>
+                      <a:round/>
+                      <a:headEnd type="none" w="med" len="med"/>
+                      <a:tailEnd type="none" w="med" len="med"/>
+                    </a:lnB>
+                    <a:solidFill>
+                      <a:srgbClr val="F5F7F9"/>
+                    </a:solidFill>
+                  </a:tcPr>
+                </a:tc>
+                <a:tc>
+                  <a:txBody>
+                    <a:bodyPr/>
+                    <a:lstStyle/>
+                    <a:p>
+                      <a:pPr algn="r" indent="0" marL="0">
+                        <a:buNone/>
+                      </a:pPr>
+                      <a:r>
+                        <a:rPr lang="en-US" sz="700" b="1" dirty="0">
+                          <a:solidFill>
+                            <a:srgbClr val="10161F"/>
+                          </a:solidFill>
+                          <a:latin typeface="맑은 고딕" pitchFamily="34" charset="0"/>
+                          <a:ea typeface="맑은 고딕" pitchFamily="34" charset="-122"/>
+                          <a:cs typeface="맑은 고딕" pitchFamily="34" charset="-120"/>
+                        </a:rPr>
+                        <a:t>30,012.0</a:t>
+                      </a:r>
+                      <a:endParaRPr lang="en-US" sz="700" dirty="0">
+                        <a:latin typeface="맑은 고딕" charset="0"/>
+                        <a:ea typeface="맑은 고딕" charset="0"/>
+                        <a:cs typeface="맑은 고딕" charset="0"/>
+                      </a:endParaRPr>
+                    </a:p>
+                  </a:txBody>
+                  <a:tcPr marL="50800" marR="50800" marT="25400" marB="25400" anchor="ctr">
+                    <a:lnL w="3810" cap="flat" cmpd="sng" algn="ctr">
+                      <a:solidFill>
+                        <a:srgbClr val="DDE3E8"/>
+                      </a:solidFill>
+                      <a:prstDash val="solid"/>
+                      <a:round/>
+                      <a:headEnd type="none" w="med" len="med"/>
+                      <a:tailEnd type="none" w="med" len="med"/>
+                    </a:lnL>
+                    <a:lnR w="3810" cap="flat" cmpd="sng" algn="ctr">
+                      <a:solidFill>
+                        <a:srgbClr val="DDE3E8"/>
+                      </a:solidFill>
+                      <a:prstDash val="solid"/>
+                      <a:round/>
+                      <a:headEnd type="none" w="med" len="med"/>
+                      <a:tailEnd type="none" w="med" len="med"/>
+                    </a:lnR>
+                    <a:lnT w="3810" cap="flat" cmpd="sng" algn="ctr">
+                      <a:solidFill>
+                        <a:srgbClr val="DDE3E8"/>
+                      </a:solidFill>
+                      <a:prstDash val="solid"/>
+                      <a:round/>
+                      <a:headEnd type="none" w="med" len="med"/>
+                      <a:tailEnd type="none" w="med" len="med"/>
+                    </a:lnT>
+                    <a:lnB w="3810" cap="flat" cmpd="sng" algn="ctr">
+                      <a:solidFill>
+                        <a:srgbClr val="DDE3E8"/>
+                      </a:solidFill>
+                      <a:prstDash val="solid"/>
+                      <a:round/>
+                      <a:headEnd type="none" w="med" len="med"/>
+                      <a:tailEnd type="none" w="med" len="med"/>
+                    </a:lnB>
+                    <a:solidFill>
+                      <a:srgbClr val="F5F7F9"/>
+                    </a:solidFill>
+                  </a:tcPr>
+                </a:tc>
+                <a:tc>
+                  <a:txBody>
+                    <a:bodyPr/>
+                    <a:lstStyle/>
+                    <a:p>
+                      <a:pPr algn="r" indent="0" marL="0">
+                        <a:buNone/>
+                      </a:pPr>
+                      <a:r>
+                        <a:rPr lang="en-US" sz="700" b="1" dirty="0">
+                          <a:solidFill>
+                            <a:srgbClr val="10161F"/>
+                          </a:solidFill>
+                          <a:latin typeface="맑은 고딕" pitchFamily="34" charset="0"/>
+                          <a:ea typeface="맑은 고딕" pitchFamily="34" charset="-122"/>
+                          <a:cs typeface="맑은 고딕" pitchFamily="34" charset="-120"/>
+                        </a:rPr>
+                        <a:t>18,007.2</a:t>
+                      </a:r>
+                      <a:endParaRPr lang="en-US" sz="700" dirty="0">
+                        <a:latin typeface="맑은 고딕" charset="0"/>
+                        <a:ea typeface="맑은 고딕" charset="0"/>
+                        <a:cs typeface="맑은 고딕" charset="0"/>
+                      </a:endParaRPr>
+                    </a:p>
+                  </a:txBody>
+                  <a:tcPr marL="50800" marR="50800" marT="25400" marB="25400" anchor="ctr">
+                    <a:lnL w="3810" cap="flat" cmpd="sng" algn="ctr">
+                      <a:solidFill>
+                        <a:srgbClr val="DDE3E8"/>
+                      </a:solidFill>
+                      <a:prstDash val="solid"/>
+                      <a:round/>
+                      <a:headEnd type="none" w="med" len="med"/>
+                      <a:tailEnd type="none" w="med" len="med"/>
+                    </a:lnL>
+                    <a:lnR w="3810" cap="flat" cmpd="sng" algn="ctr">
+                      <a:solidFill>
+                        <a:srgbClr val="DDE3E8"/>
+                      </a:solidFill>
+                      <a:prstDash val="solid"/>
+                      <a:round/>
+                      <a:headEnd type="none" w="med" len="med"/>
+                      <a:tailEnd type="none" w="med" len="med"/>
+                    </a:lnR>
+                    <a:lnT w="3810" cap="flat" cmpd="sng" algn="ctr">
+                      <a:solidFill>
+                        <a:srgbClr val="DDE3E8"/>
+                      </a:solidFill>
+                      <a:prstDash val="solid"/>
+                      <a:round/>
+                      <a:headEnd type="none" w="med" len="med"/>
+                      <a:tailEnd type="none" w="med" len="med"/>
+                    </a:lnT>
+                    <a:lnB w="3810" cap="flat" cmpd="sng" algn="ctr">
+                      <a:solidFill>
+                        <a:srgbClr val="DDE3E8"/>
+                      </a:solidFill>
+                      <a:prstDash val="solid"/>
+                      <a:round/>
+                      <a:headEnd type="none" w="med" len="med"/>
+                      <a:tailEnd type="none" w="med" len="med"/>
+                    </a:lnB>
+                    <a:solidFill>
+                      <a:srgbClr val="F5F7F9"/>
+                    </a:solidFill>
+                  </a:tcPr>
+                </a:tc>
+                <a:tc>
+                  <a:txBody>
+                    <a:bodyPr/>
+                    <a:lstStyle/>
+                    <a:p>
+                      <a:pPr algn="r" indent="0" marL="0">
+                        <a:buNone/>
+                      </a:pPr>
+                      <a:r>
+                        <a:rPr lang="en-US" sz="700" b="1" dirty="0">
+                          <a:solidFill>
+                            <a:srgbClr val="10161F"/>
+                          </a:solidFill>
+                          <a:latin typeface="맑은 고딕" pitchFamily="34" charset="0"/>
+                          <a:ea typeface="맑은 고딕" pitchFamily="34" charset="-122"/>
+                          <a:cs typeface="맑은 고딕" pitchFamily="34" charset="-120"/>
+                        </a:rPr>
+                        <a:t>3,600,000,000,000</a:t>
+                      </a:r>
+                      <a:endParaRPr lang="en-US" sz="700" dirty="0">
+                        <a:latin typeface="맑은 고딕" charset="0"/>
+                        <a:ea typeface="맑은 고딕" charset="0"/>
+                        <a:cs typeface="맑은 고딕" charset="0"/>
+                      </a:endParaRPr>
+                    </a:p>
+                  </a:txBody>
+                  <a:tcPr marL="50800" marR="50800" marT="25400" marB="25400" anchor="ctr">
+                    <a:lnL w="3810" cap="flat" cmpd="sng" algn="ctr">
+                      <a:solidFill>
+                        <a:srgbClr val="DDE3E8"/>
+                      </a:solidFill>
+                      <a:prstDash val="solid"/>
+                      <a:round/>
+                      <a:headEnd type="none" w="med" len="med"/>
+                      <a:tailEnd type="none" w="med" len="med"/>
+                    </a:lnL>
+                    <a:lnR w="3810" cap="flat" cmpd="sng" algn="ctr">
+                      <a:solidFill>
+                        <a:srgbClr val="DDE3E8"/>
+                      </a:solidFill>
+                      <a:prstDash val="solid"/>
+                      <a:round/>
+                      <a:headEnd type="none" w="med" len="med"/>
+                      <a:tailEnd type="none" w="med" len="med"/>
+                    </a:lnR>
+                    <a:lnT w="3810" cap="flat" cmpd="sng" algn="ctr">
+                      <a:solidFill>
+                        <a:srgbClr val="DDE3E8"/>
+                      </a:solidFill>
+                      <a:prstDash val="solid"/>
+                      <a:round/>
+                      <a:headEnd type="none" w="med" len="med"/>
+                      <a:tailEnd type="none" w="med" len="med"/>
+                    </a:lnT>
+                    <a:lnB w="3810" cap="flat" cmpd="sng" algn="ctr">
+                      <a:solidFill>
+                        <a:srgbClr val="DDE3E8"/>
+                      </a:solidFill>
+                      <a:prstDash val="solid"/>
+                      <a:round/>
+                      <a:headEnd type="none" w="med" len="med"/>
+                      <a:tailEnd type="none" w="med" len="med"/>
+                    </a:lnB>
+                    <a:solidFill>
+                      <a:srgbClr val="F5F7F9"/>
+                    </a:solidFill>
+                  </a:tcPr>
+                </a:tc>
+                <a:tc>
+                  <a:txBody>
+                    <a:bodyPr/>
+                    <a:lstStyle/>
+                    <a:p>
+                      <a:pPr algn="r" indent="0" marL="0">
+                        <a:buNone/>
+                      </a:pPr>
+                      <a:r>
+                        <a:rPr lang="en-US" sz="700" b="1" dirty="0">
+                          <a:solidFill>
+                            <a:srgbClr val="10161F"/>
+                          </a:solidFill>
+                          <a:latin typeface="맑은 고딕" pitchFamily="34" charset="0"/>
+                          <a:ea typeface="맑은 고딕" pitchFamily="34" charset="-122"/>
+                          <a:cs typeface="맑은 고딕" pitchFamily="34" charset="-120"/>
+                        </a:rPr>
+                        <a:t>30,000,000,000</a:t>
+                      </a:r>
+                      <a:endParaRPr lang="en-US" sz="700" dirty="0">
+                        <a:latin typeface="맑은 고딕" charset="0"/>
+                        <a:ea typeface="맑은 고딕" charset="0"/>
+                        <a:cs typeface="맑은 고딕" charset="0"/>
+                      </a:endParaRPr>
+                    </a:p>
+                  </a:txBody>
+                  <a:tcPr marL="50800" marR="50800" marT="25400" marB="25400" anchor="ctr">
+                    <a:lnL w="3810" cap="flat" cmpd="sng" algn="ctr">
+                      <a:solidFill>
+                        <a:srgbClr val="DDE3E8"/>
+                      </a:solidFill>
+                      <a:prstDash val="solid"/>
+                      <a:round/>
+                      <a:headEnd type="none" w="med" len="med"/>
+                      <a:tailEnd type="none" w="med" len="med"/>
+                    </a:lnL>
+                    <a:lnR w="3810" cap="flat" cmpd="sng" algn="ctr">
+                      <a:solidFill>
+                        <a:srgbClr val="DDE3E8"/>
+                      </a:solidFill>
+                      <a:prstDash val="solid"/>
+                      <a:round/>
+                      <a:headEnd type="none" w="med" len="med"/>
+                      <a:tailEnd type="none" w="med" len="med"/>
+                    </a:lnR>
+                    <a:lnT w="3810" cap="flat" cmpd="sng" algn="ctr">
+                      <a:solidFill>
+                        <a:srgbClr val="DDE3E8"/>
+                      </a:solidFill>
+                      <a:prstDash val="solid"/>
+                      <a:round/>
+                      <a:headEnd type="none" w="med" len="med"/>
+                      <a:tailEnd type="none" w="med" len="med"/>
+                    </a:lnT>
+                    <a:lnB w="3810" cap="flat" cmpd="sng" algn="ctr">
+                      <a:solidFill>
+                        <a:srgbClr val="DDE3E8"/>
+                      </a:solidFill>
+                      <a:prstDash val="solid"/>
+                      <a:round/>
+                      <a:headEnd type="none" w="med" len="med"/>
+                      <a:tailEnd type="none" w="med" len="med"/>
+                    </a:lnB>
+                    <a:solidFill>
+                      <a:srgbClr val="F5F7F9"/>
+                    </a:solidFill>
+                  </a:tcPr>
+                </a:tc>
+                <a:tc>
+                  <a:txBody>
+                    <a:bodyPr/>
+                    <a:lstStyle/>
+                    <a:p>
+                      <a:pPr algn="r" indent="0" marL="0">
+                        <a:buNone/>
+                      </a:pPr>
+                      <a:r>
+                        <a:rPr lang="en-US" sz="700" b="1" dirty="0">
+                          <a:solidFill>
+                            <a:srgbClr val="10161F"/>
+                          </a:solidFill>
+                          <a:latin typeface="맑은 고딕" pitchFamily="34" charset="0"/>
+                          <a:ea typeface="맑은 고딕" pitchFamily="34" charset="-122"/>
+                          <a:cs typeface="맑은 고딕" pitchFamily="34" charset="-120"/>
+                        </a:rPr>
+                        <a:t>3,600,000,000</a:t>
+                      </a:r>
+                      <a:endParaRPr lang="en-US" sz="700" dirty="0">
+                        <a:latin typeface="맑은 고딕" charset="0"/>
+                        <a:ea typeface="맑은 고딕" charset="0"/>
+                        <a:cs typeface="맑은 고딕" charset="0"/>
+                      </a:endParaRPr>
+                    </a:p>
+                  </a:txBody>
+                  <a:tcPr marL="50800" marR="50800" marT="25400" marB="25400" anchor="ctr">
+                    <a:lnL w="3810" cap="flat" cmpd="sng" algn="ctr">
+                      <a:solidFill>
+                        <a:srgbClr val="DDE3E8"/>
+                      </a:solidFill>
+                      <a:prstDash val="solid"/>
+                      <a:round/>
+                      <a:headEnd type="none" w="med" len="med"/>
+                      <a:tailEnd type="none" w="med" len="med"/>
+                    </a:lnL>
+                    <a:lnR w="3810" cap="flat" cmpd="sng" algn="ctr">
+                      <a:solidFill>
+                        <a:srgbClr val="DDE3E8"/>
+                      </a:solidFill>
+                      <a:prstDash val="solid"/>
+                      <a:round/>
+                      <a:headEnd type="none" w="med" len="med"/>
+                      <a:tailEnd type="none" w="med" len="med"/>
+                    </a:lnR>
+                    <a:lnT w="3810" cap="flat" cmpd="sng" algn="ctr">
+                      <a:solidFill>
+                        <a:srgbClr val="DDE3E8"/>
+                      </a:solidFill>
+                      <a:prstDash val="solid"/>
+                      <a:round/>
+                      <a:headEnd type="none" w="med" len="med"/>
+                      <a:tailEnd type="none" w="med" len="med"/>
+                    </a:lnT>
+                    <a:lnB w="3810" cap="flat" cmpd="sng" algn="ctr">
+                      <a:solidFill>
+                        <a:srgbClr val="DDE3E8"/>
+                      </a:solidFill>
+                      <a:prstDash val="solid"/>
+                      <a:round/>
+                      <a:headEnd type="none" w="med" len="med"/>
+                      <a:tailEnd type="none" w="med" len="med"/>
+                    </a:lnB>
+                    <a:solidFill>
+                      <a:srgbClr val="F5F7F9"/>
+                    </a:solidFill>
+                  </a:tcPr>
+                </a:tc>
+                <a:tc>
+                  <a:txBody>
+                    <a:bodyPr/>
+                    <a:lstStyle/>
+                    <a:p>
+                      <a:pPr algn="r" indent="0" marL="0">
+                        <a:buNone/>
+                      </a:pPr>
+                      <a:r>
+                        <a:rPr lang="en-US" sz="700" b="1" dirty="0">
+                          <a:solidFill>
+                            <a:srgbClr val="10161F"/>
+                          </a:solidFill>
+                          <a:latin typeface="맑은 고딕" pitchFamily="34" charset="0"/>
+                          <a:ea typeface="맑은 고딕" pitchFamily="34" charset="-122"/>
+                          <a:cs typeface="맑은 고딕" pitchFamily="34" charset="-120"/>
+                        </a:rPr>
+                        <a:t>33,600,000,000</a:t>
+                      </a:r>
+                      <a:endParaRPr lang="en-US" sz="700" dirty="0">
+                        <a:latin typeface="맑은 고딕" charset="0"/>
+                        <a:ea typeface="맑은 고딕" charset="0"/>
+                        <a:cs typeface="맑은 고딕" charset="0"/>
+                      </a:endParaRPr>
+                    </a:p>
+                  </a:txBody>
+                  <a:tcPr marL="50800" marR="50800" marT="25400" marB="25400" anchor="ctr">
+                    <a:lnL w="3810" cap="flat" cmpd="sng" algn="ctr">
+                      <a:solidFill>
+                        <a:srgbClr val="DDE3E8"/>
+                      </a:solidFill>
+                      <a:prstDash val="solid"/>
+                      <a:round/>
+                      <a:headEnd type="none" w="med" len="med"/>
+                      <a:tailEnd type="none" w="med" len="med"/>
+                    </a:lnL>
+                    <a:lnR w="3810" cap="flat" cmpd="sng" algn="ctr">
+                      <a:solidFill>
+                        <a:srgbClr val="DDE3E8"/>
+                      </a:solidFill>
+                      <a:prstDash val="solid"/>
+                      <a:round/>
+                      <a:headEnd type="none" w="med" len="med"/>
+                      <a:tailEnd type="none" w="med" len="med"/>
+                    </a:lnR>
+                    <a:lnT w="3810" cap="flat" cmpd="sng" algn="ctr">
+                      <a:solidFill>
+                        <a:srgbClr val="DDE3E8"/>
+                      </a:solidFill>
+                      <a:prstDash val="solid"/>
+                      <a:round/>
+                      <a:headEnd type="none" w="med" len="med"/>
+                      <a:tailEnd type="none" w="med" len="med"/>
+                    </a:lnT>
+                    <a:lnB w="3810" cap="flat" cmpd="sng" algn="ctr">
+                      <a:solidFill>
+                        <a:srgbClr val="DDE3E8"/>
+                      </a:solidFill>
+                      <a:prstDash val="solid"/>
+                      <a:round/>
+                      <a:headEnd type="none" w="med" len="med"/>
+                      <a:tailEnd type="none" w="med" len="med"/>
+                    </a:lnB>
+                    <a:solidFill>
+                      <a:srgbClr val="F5F7F9"/>
+                    </a:solidFill>
+                  </a:tcPr>
+                </a:tc>
+                <a:tc>
+                  <a:txBody>
+                    <a:bodyPr/>
+                    <a:lstStyle/>
+                    <a:p>
+                      <a:pPr algn="ctr" indent="0" marL="0">
+                        <a:buNone/>
+                      </a:pPr>
+                      <a:r>
+                        <a:rPr lang="en-US" sz="700" b="1" dirty="0">
+                          <a:solidFill>
+                            <a:srgbClr val="10161F"/>
+                          </a:solidFill>
+                          <a:latin typeface="맑은 고딕" pitchFamily="34" charset="0"/>
+                          <a:ea typeface="맑은 고딕" pitchFamily="34" charset="-122"/>
+                          <a:cs typeface="맑은 고딕" pitchFamily="34" charset="-120"/>
+                        </a:rPr>
+                        <a:t>-</a:t>
+                      </a:r>
+                      <a:endParaRPr lang="en-US" sz="700" dirty="0">
+                        <a:latin typeface="맑은 고딕" charset="0"/>
+                        <a:ea typeface="맑은 고딕" charset="0"/>
+                        <a:cs typeface="맑은 고딕" charset="0"/>
+                      </a:endParaRPr>
+                    </a:p>
+                  </a:txBody>
+                  <a:tcPr marL="50800" marR="50800" marT="25400" marB="25400" anchor="ctr">
+                    <a:lnL w="3810" cap="flat" cmpd="sng" algn="ctr">
+                      <a:solidFill>
+                        <a:srgbClr val="DDE3E8"/>
+                      </a:solidFill>
+                      <a:prstDash val="solid"/>
+                      <a:round/>
+                      <a:headEnd type="none" w="med" len="med"/>
+                      <a:tailEnd type="none" w="med" len="med"/>
+                    </a:lnL>
+                    <a:lnR w="3810" cap="flat" cmpd="sng" algn="ctr">
+                      <a:solidFill>
+                        <a:srgbClr val="DDE3E8"/>
+                      </a:solidFill>
+                      <a:prstDash val="solid"/>
+                      <a:round/>
+                      <a:headEnd type="none" w="med" len="med"/>
+                      <a:tailEnd type="none" w="med" len="med"/>
+                    </a:lnR>
+                    <a:lnT w="3810" cap="flat" cmpd="sng" algn="ctr">
+                      <a:solidFill>
+                        <a:srgbClr val="DDE3E8"/>
+                      </a:solidFill>
+                      <a:prstDash val="solid"/>
+                      <a:round/>
+                      <a:headEnd type="none" w="med" len="med"/>
+                      <a:tailEnd type="none" w="med" len="med"/>
+                    </a:lnT>
+                    <a:lnB w="3810" cap="flat" cmpd="sng" algn="ctr">
+                      <a:solidFill>
+                        <a:srgbClr val="DDE3E8"/>
+                      </a:solidFill>
+                      <a:prstDash val="solid"/>
+                      <a:round/>
+                      <a:headEnd type="none" w="med" len="med"/>
+                      <a:tailEnd type="none" w="med" len="med"/>
+                    </a:lnB>
+                    <a:solidFill>
+                      <a:srgbClr val="F5F7F9"/>
                     </a:solidFill>
                   </a:tcPr>
                 </a:tc>
@@ -13299,14 +15996,14 @@
       </p:graphicFrame>
       <p:sp>
         <p:nvSpPr>
-          <p:cNvPr id="8" name="Text 5"/>
+          <p:cNvPr id="69" name="Text 66"/>
           <p:cNvSpPr/>
           <p:nvPr/>
         </p:nvSpPr>
         <p:spPr>
           <a:xfrm>
-            <a:off x="3950208" y="5961888"/>
-            <a:ext cx="7674559" cy="182880"/>
+            <a:off x="2807208" y="5879592"/>
+            <a:ext cx="8817559" cy="164592"/>
           </a:xfrm>
           <a:prstGeom prst="rect">
             <a:avLst/>
@@ -13338,7 +16035,7 @@
       </p:sp>
       <p:sp>
         <p:nvSpPr>
-          <p:cNvPr id="9" name="Text 6"/>
+          <p:cNvPr id="70" name="Text 67"/>
           <p:cNvSpPr/>
           <p:nvPr/>
         </p:nvSpPr>
@@ -13377,7 +16074,7 @@
       </p:sp>
       <p:sp>
         <p:nvSpPr>
-          <p:cNvPr id="10" name="Text 7"/>
+          <p:cNvPr id="71" name="Text 68"/>
           <p:cNvSpPr/>
           <p:nvPr/>
         </p:nvSpPr>
